--- a/JECA_Soutenance_Site.pptx
+++ b/JECA_Soutenance_Site.pptx
@@ -14,6 +14,8 @@
     <p:sldId id="262" r:id="rId13"/>
     <p:sldId id="263" r:id="rId14"/>
     <p:sldId id="264" r:id="rId15"/>
+    <p:sldId id="265" r:id="rId16"/>
+    <p:sldId id="266" r:id="rId17"/>
   </p:sldIdLst>
   <p:sldSz cx="12191695" cy="6858000" type="screen4x3"/>
   <p:notesSz cx="6858000" cy="9144000"/>
@@ -3200,7 +3202,7 @@
         </p:blipFill>
         <p:spPr>
           <a:xfrm>
-            <a:off x="5455767" y="1234440"/>
+            <a:off x="5455767" y="1143000"/>
             <a:ext cx="1280160" cy="1280160"/>
           </a:xfrm>
           <a:prstGeom prst="rect">
@@ -3216,7 +3218,7 @@
         </p:nvSpPr>
         <p:spPr>
           <a:xfrm>
-            <a:off x="914400" y="2788920"/>
+            <a:off x="914400" y="2697480"/>
             <a:ext cx="10362895" cy="914400"/>
           </a:xfrm>
           <a:prstGeom prst="rect">
@@ -3258,7 +3260,7 @@
         </p:nvSpPr>
         <p:spPr>
           <a:xfrm>
-            <a:off x="5730087" y="3703320"/>
+            <a:off x="5730087" y="3611880"/>
             <a:ext cx="731520" cy="19050"/>
           </a:xfrm>
           <a:prstGeom prst="rect">
@@ -3302,7 +3304,7 @@
         </p:nvSpPr>
         <p:spPr>
           <a:xfrm>
-            <a:off x="914400" y="3886200"/>
+            <a:off x="914400" y="3794760"/>
             <a:ext cx="10362895" cy="548640"/>
           </a:xfrm>
           <a:prstGeom prst="rect">
@@ -3344,8 +3346,8 @@
         </p:nvSpPr>
         <p:spPr>
           <a:xfrm>
-            <a:off x="914400" y="4709160"/>
-            <a:ext cx="10362895" cy="1188720"/>
+            <a:off x="914400" y="4617720"/>
+            <a:ext cx="10362895" cy="1280160"/>
           </a:xfrm>
           <a:prstGeom prst="rect">
             <a:avLst/>
@@ -3367,13 +3369,13 @@
               </a:spcAft>
             </a:pPr>
             <a:r>
-              <a:rPr sz="1600" b="0" i="0">
+              <a:rPr sz="1500" b="0" i="0">
                 <a:solidFill>
                   <a:srgbClr val="444444"/>
                 </a:solidFill>
                 <a:latin typeface="Helvetica Neue"/>
               </a:rPr>
-              <a:t>Bijoux connectés de géolocalisation pour enfants</a:t>
+              <a:t>Bijoux connectés de géolocalisation pour enfants — assemblés en France</a:t>
             </a:r>
           </a:p>
           <a:p>
@@ -3392,7 +3394,7 @@
                 </a:solidFill>
                 <a:latin typeface="Helvetica Neue"/>
               </a:rPr>
-              <a:t>Soutenance e-commerce</a:t>
+              <a:t>Soutenance e-commerce · Projet Bac+4 / MBA</a:t>
             </a:r>
           </a:p>
           <a:p>
@@ -3410,8 +3412,9 @@
                   <a:srgbClr val="9C7A4A"/>
                 </a:solidFill>
                 <a:latin typeface="Helvetica Neue"/>
-              </a:rPr>
-              <a:t>▸  jeca-site.vercel.app</a:t>
+                <a:hlinkClick r:id="rId3"/>
+              </a:rPr>
+              <a:t>▸  Visiter la boutique en ligne</a:t>
             </a:r>
           </a:p>
         </p:txBody>
@@ -3421,6 +3424,1397 @@
   <p:clrMapOvr>
     <a:masterClrMapping/>
   </p:clrMapOvr>
+  <p:transition spd="med">
+    <p:fade/>
+  </p:transition>
+</p:sld>
+</file>
+
+<file path=ppt/slides/slide10.xml><?xml version="1.0" encoding="utf-8"?>
+<p:sld xmlns:a="http://schemas.openxmlformats.org/drawingml/2006/main" xmlns:p="http://schemas.openxmlformats.org/presentationml/2006/main" xmlns:r="http://schemas.openxmlformats.org/officeDocument/2006/relationships">
+  <p:cSld>
+    <p:spTree>
+      <p:nvGrpSpPr>
+        <p:cNvPr id="1" name=""/>
+        <p:cNvGrpSpPr/>
+        <p:nvPr/>
+      </p:nvGrpSpPr>
+      <p:grpSpPr/>
+      <p:sp>
+        <p:nvSpPr>
+          <p:cNvPr id="2" name="Rectangle 1"/>
+          <p:cNvSpPr/>
+          <p:nvPr/>
+        </p:nvSpPr>
+        <p:spPr>
+          <a:xfrm>
+            <a:off x="0" y="0"/>
+            <a:ext cx="12191695" cy="6858000"/>
+          </a:xfrm>
+          <a:prstGeom prst="rect">
+            <a:avLst/>
+          </a:prstGeom>
+          <a:solidFill>
+            <a:srgbClr val="FAF8F5"/>
+          </a:solidFill>
+          <a:ln>
+            <a:noFill/>
+          </a:ln>
+          <a:effectLst/>
+        </p:spPr>
+        <p:style>
+          <a:lnRef idx="1">
+            <a:schemeClr val="accent1"/>
+          </a:lnRef>
+          <a:fillRef idx="3">
+            <a:schemeClr val="accent1"/>
+          </a:fillRef>
+          <a:effectRef idx="2">
+            <a:schemeClr val="accent1"/>
+          </a:effectRef>
+          <a:fontRef idx="minor">
+            <a:schemeClr val="lt1"/>
+          </a:fontRef>
+        </p:style>
+        <p:txBody>
+          <a:bodyPr rtlCol="0" anchor="ctr"/>
+          <a:lstStyle/>
+          <a:p>
+            <a:pPr algn="ctr"/>
+          </a:p>
+        </p:txBody>
+      </p:sp>
+      <p:sp>
+        <p:nvSpPr>
+          <p:cNvPr id="3" name="Rectangle 2"/>
+          <p:cNvSpPr/>
+          <p:nvPr/>
+        </p:nvSpPr>
+        <p:spPr>
+          <a:xfrm>
+            <a:off x="256032" y="256032"/>
+            <a:ext cx="11679631" cy="6345936"/>
+          </a:xfrm>
+          <a:prstGeom prst="rect">
+            <a:avLst/>
+          </a:prstGeom>
+          <a:noFill/>
+          <a:ln w="12700">
+            <a:solidFill>
+              <a:srgbClr val="B89A6B"/>
+            </a:solidFill>
+          </a:ln>
+          <a:effectLst/>
+        </p:spPr>
+        <p:style>
+          <a:lnRef idx="1">
+            <a:schemeClr val="accent1"/>
+          </a:lnRef>
+          <a:fillRef idx="3">
+            <a:schemeClr val="accent1"/>
+          </a:fillRef>
+          <a:effectRef idx="2">
+            <a:schemeClr val="accent1"/>
+          </a:effectRef>
+          <a:fontRef idx="minor">
+            <a:schemeClr val="lt1"/>
+          </a:fontRef>
+        </p:style>
+        <p:txBody>
+          <a:bodyPr rtlCol="0" anchor="ctr"/>
+          <a:lstStyle/>
+          <a:p>
+            <a:pPr algn="ctr"/>
+          </a:p>
+        </p:txBody>
+      </p:sp>
+      <p:pic>
+        <p:nvPicPr>
+          <p:cNvPr id="4" name="Picture 3" descr="logo.png"/>
+          <p:cNvPicPr>
+            <a:picLocks noChangeAspect="1"/>
+          </p:cNvPicPr>
+          <p:nvPr/>
+        </p:nvPicPr>
+        <p:blipFill>
+          <a:blip r:embed="rId2"/>
+          <a:stretch>
+            <a:fillRect/>
+          </a:stretch>
+        </p:blipFill>
+        <p:spPr>
+          <a:xfrm>
+            <a:off x="502920" y="411480"/>
+            <a:ext cx="457200" cy="457200"/>
+          </a:xfrm>
+          <a:prstGeom prst="rect">
+            <a:avLst/>
+          </a:prstGeom>
+        </p:spPr>
+      </p:pic>
+      <p:sp>
+        <p:nvSpPr>
+          <p:cNvPr id="5" name="TextBox 4"/>
+          <p:cNvSpPr txBox="1"/>
+          <p:nvPr/>
+        </p:nvSpPr>
+        <p:spPr>
+          <a:xfrm>
+            <a:off x="1051560" y="457200"/>
+            <a:ext cx="4572000" cy="365760"/>
+          </a:xfrm>
+          <a:prstGeom prst="rect">
+            <a:avLst/>
+          </a:prstGeom>
+          <a:noFill/>
+        </p:spPr>
+        <p:txBody>
+          <a:bodyPr wrap="square" anchor="t">
+            <a:spAutoFit/>
+          </a:bodyPr>
+          <a:lstStyle/>
+          <a:p>
+            <a:pPr algn="l">
+              <a:spcBef>
+                <a:spcPts val="0"/>
+              </a:spcBef>
+              <a:spcAft>
+                <a:spcPts val="600"/>
+              </a:spcAft>
+            </a:pPr>
+            <a:r>
+              <a:rPr sz="1500" b="1" i="0">
+                <a:solidFill>
+                  <a:srgbClr val="1A1A1A"/>
+                </a:solidFill>
+                <a:latin typeface="Georgia"/>
+              </a:rPr>
+              <a:t>JECA </a:t>
+            </a:r>
+          </a:p>
+          <a:p>
+            <a:pPr algn="l">
+              <a:spcBef>
+                <a:spcPts val="0"/>
+              </a:spcBef>
+              <a:spcAft>
+                <a:spcPts val="600"/>
+              </a:spcAft>
+            </a:pPr>
+            <a:r>
+              <a:rPr sz="1500" b="0" i="0">
+                <a:solidFill>
+                  <a:srgbClr val="9C7A4A"/>
+                </a:solidFill>
+                <a:latin typeface="Georgia"/>
+              </a:rPr>
+              <a:t>JEWELRY</a:t>
+            </a:r>
+          </a:p>
+        </p:txBody>
+      </p:sp>
+      <p:sp>
+        <p:nvSpPr>
+          <p:cNvPr id="6" name="TextBox 5"/>
+          <p:cNvSpPr txBox="1"/>
+          <p:nvPr/>
+        </p:nvSpPr>
+        <p:spPr>
+          <a:xfrm>
+            <a:off x="9082735" y="475488"/>
+            <a:ext cx="2606040" cy="365760"/>
+          </a:xfrm>
+          <a:prstGeom prst="rect">
+            <a:avLst/>
+          </a:prstGeom>
+          <a:noFill/>
+        </p:spPr>
+        <p:txBody>
+          <a:bodyPr wrap="square" anchor="t">
+            <a:spAutoFit/>
+          </a:bodyPr>
+          <a:lstStyle/>
+          <a:p>
+            <a:pPr algn="r">
+              <a:spcBef>
+                <a:spcPts val="0"/>
+              </a:spcBef>
+              <a:spcAft>
+                <a:spcPts val="600"/>
+              </a:spcAft>
+            </a:pPr>
+            <a:r>
+              <a:rPr sz="1050" b="0" i="0">
+                <a:solidFill>
+                  <a:srgbClr val="9C7A4A"/>
+                </a:solidFill>
+                <a:latin typeface="Helvetica Neue"/>
+                <a:hlinkClick r:id="rId3"/>
+              </a:rPr>
+              <a:t>jeca-site.vercel.app</a:t>
+            </a:r>
+          </a:p>
+          <a:p>
+            <a:pPr algn="r">
+              <a:spcBef>
+                <a:spcPts val="0"/>
+              </a:spcBef>
+              <a:spcAft>
+                <a:spcPts val="600"/>
+              </a:spcAft>
+            </a:pPr>
+            <a:r>
+              <a:rPr sz="1050" b="1" i="0">
+                <a:solidFill>
+                  <a:srgbClr val="6F6F6F"/>
+                </a:solidFill>
+                <a:latin typeface="Helvetica Neue"/>
+              </a:rPr>
+              <a:t>   10</a:t>
+            </a:r>
+          </a:p>
+        </p:txBody>
+      </p:sp>
+      <p:sp>
+        <p:nvSpPr>
+          <p:cNvPr id="7" name="TextBox 6"/>
+          <p:cNvSpPr txBox="1"/>
+          <p:nvPr/>
+        </p:nvSpPr>
+        <p:spPr>
+          <a:xfrm>
+            <a:off x="548640" y="1115568"/>
+            <a:ext cx="10058400" cy="320040"/>
+          </a:xfrm>
+          <a:prstGeom prst="rect">
+            <a:avLst/>
+          </a:prstGeom>
+          <a:noFill/>
+        </p:spPr>
+        <p:txBody>
+          <a:bodyPr wrap="square" anchor="t">
+            <a:spAutoFit/>
+          </a:bodyPr>
+          <a:lstStyle/>
+          <a:p>
+            <a:pPr algn="l">
+              <a:spcBef>
+                <a:spcPts val="0"/>
+              </a:spcBef>
+              <a:spcAft>
+                <a:spcPts val="600"/>
+              </a:spcAft>
+            </a:pPr>
+            <a:r>
+              <a:rPr sz="1200" b="1" i="0">
+                <a:solidFill>
+                  <a:srgbClr val="9C7A4A"/>
+                </a:solidFill>
+                <a:latin typeface="Helvetica Neue"/>
+              </a:rPr>
+              <a:t>MODÈLE ÉCONOMIQUE &amp; FINANCES</a:t>
+            </a:r>
+          </a:p>
+        </p:txBody>
+      </p:sp>
+      <p:sp>
+        <p:nvSpPr>
+          <p:cNvPr id="8" name="Rectangle 7"/>
+          <p:cNvSpPr/>
+          <p:nvPr/>
+        </p:nvSpPr>
+        <p:spPr>
+          <a:xfrm>
+            <a:off x="566928" y="1463040"/>
+            <a:ext cx="457200" cy="19050"/>
+          </a:xfrm>
+          <a:prstGeom prst="rect">
+            <a:avLst/>
+          </a:prstGeom>
+          <a:solidFill>
+            <a:srgbClr val="9C7A4A"/>
+          </a:solidFill>
+          <a:ln>
+            <a:noFill/>
+          </a:ln>
+          <a:effectLst/>
+        </p:spPr>
+        <p:style>
+          <a:lnRef idx="1">
+            <a:schemeClr val="accent1"/>
+          </a:lnRef>
+          <a:fillRef idx="3">
+            <a:schemeClr val="accent1"/>
+          </a:fillRef>
+          <a:effectRef idx="2">
+            <a:schemeClr val="accent1"/>
+          </a:effectRef>
+          <a:fontRef idx="minor">
+            <a:schemeClr val="lt1"/>
+          </a:fontRef>
+        </p:style>
+        <p:txBody>
+          <a:bodyPr rtlCol="0" anchor="ctr"/>
+          <a:lstStyle/>
+          <a:p>
+            <a:pPr algn="ctr"/>
+          </a:p>
+        </p:txBody>
+      </p:sp>
+      <p:sp>
+        <p:nvSpPr>
+          <p:cNvPr id="9" name="TextBox 8"/>
+          <p:cNvSpPr txBox="1"/>
+          <p:nvPr/>
+        </p:nvSpPr>
+        <p:spPr>
+          <a:xfrm>
+            <a:off x="640080" y="1783080"/>
+            <a:ext cx="6400800" cy="640080"/>
+          </a:xfrm>
+          <a:prstGeom prst="rect">
+            <a:avLst/>
+          </a:prstGeom>
+          <a:noFill/>
+        </p:spPr>
+        <p:txBody>
+          <a:bodyPr wrap="square" anchor="t">
+            <a:spAutoFit/>
+          </a:bodyPr>
+          <a:lstStyle/>
+          <a:p>
+            <a:pPr algn="l">
+              <a:spcBef>
+                <a:spcPts val="0"/>
+              </a:spcBef>
+              <a:spcAft>
+                <a:spcPts val="600"/>
+              </a:spcAft>
+            </a:pPr>
+            <a:r>
+              <a:rPr sz="2800" b="0" i="0">
+                <a:solidFill>
+                  <a:srgbClr val="1A1A1A"/>
+                </a:solidFill>
+                <a:latin typeface="Georgia"/>
+              </a:rPr>
+              <a:t>Rentable dès l'année 1</a:t>
+            </a:r>
+          </a:p>
+        </p:txBody>
+      </p:sp>
+      <p:sp>
+        <p:nvSpPr>
+          <p:cNvPr id="10" name="TextBox 9"/>
+          <p:cNvSpPr txBox="1"/>
+          <p:nvPr/>
+        </p:nvSpPr>
+        <p:spPr>
+          <a:xfrm>
+            <a:off x="640080" y="2514600"/>
+            <a:ext cx="5486400" cy="3840480"/>
+          </a:xfrm>
+          <a:prstGeom prst="rect">
+            <a:avLst/>
+          </a:prstGeom>
+          <a:noFill/>
+        </p:spPr>
+        <p:txBody>
+          <a:bodyPr wrap="square" anchor="t">
+            <a:spAutoFit/>
+          </a:bodyPr>
+          <a:lstStyle/>
+          <a:p>
+            <a:pPr algn="l">
+              <a:spcBef>
+                <a:spcPts val="200"/>
+              </a:spcBef>
+              <a:spcAft>
+                <a:spcPts val="100"/>
+              </a:spcAft>
+            </a:pPr>
+            <a:r>
+              <a:rPr sz="1450" b="1" i="0">
+                <a:solidFill>
+                  <a:srgbClr val="9C7A4A"/>
+                </a:solidFill>
+                <a:latin typeface="Helvetica Neue"/>
+              </a:rPr>
+              <a:t>Revenu hybride</a:t>
+            </a:r>
+          </a:p>
+          <a:p>
+            <a:pPr algn="l">
+              <a:spcBef>
+                <a:spcPts val="0"/>
+              </a:spcBef>
+              <a:spcAft>
+                <a:spcPts val="800"/>
+              </a:spcAft>
+            </a:pPr>
+            <a:r>
+              <a:rPr sz="1300" b="0" i="0">
+                <a:solidFill>
+                  <a:srgbClr val="444444"/>
+                </a:solidFill>
+                <a:latin typeface="Helvetica Neue"/>
+              </a:rPr>
+              <a:t>Vente du bijou (immédiat) + abonnement (récurrent, forte marge).</a:t>
+            </a:r>
+          </a:p>
+          <a:p>
+            <a:pPr algn="l">
+              <a:spcBef>
+                <a:spcPts val="200"/>
+              </a:spcBef>
+              <a:spcAft>
+                <a:spcPts val="100"/>
+              </a:spcAft>
+            </a:pPr>
+            <a:r>
+              <a:rPr sz="1450" b="1" i="0">
+                <a:solidFill>
+                  <a:srgbClr val="9C7A4A"/>
+                </a:solidFill>
+                <a:latin typeface="Helvetica Neue"/>
+              </a:rPr>
+              <a:t>CA année 1 : 732 000 €</a:t>
+            </a:r>
+          </a:p>
+          <a:p>
+            <a:pPr algn="l">
+              <a:spcBef>
+                <a:spcPts val="0"/>
+              </a:spcBef>
+              <a:spcAft>
+                <a:spcPts val="800"/>
+              </a:spcAft>
+            </a:pPr>
+            <a:r>
+              <a:rPr sz="1300" b="0" i="0">
+                <a:solidFill>
+                  <a:srgbClr val="444444"/>
+                </a:solidFill>
+                <a:latin typeface="Helvetica Neue"/>
+              </a:rPr>
+              <a:t>540 000 € produits  +  192 000 € abonnements.</a:t>
+            </a:r>
+          </a:p>
+          <a:p>
+            <a:pPr algn="l">
+              <a:spcBef>
+                <a:spcPts val="200"/>
+              </a:spcBef>
+              <a:spcAft>
+                <a:spcPts val="100"/>
+              </a:spcAft>
+            </a:pPr>
+            <a:r>
+              <a:rPr sz="1450" b="1" i="0">
+                <a:solidFill>
+                  <a:srgbClr val="9C7A4A"/>
+                </a:solidFill>
+                <a:latin typeface="Helvetica Neue"/>
+              </a:rPr>
+              <a:t>Seuil de rentabilité : ~700 000 €</a:t>
+            </a:r>
+          </a:p>
+          <a:p>
+            <a:pPr algn="l">
+              <a:spcBef>
+                <a:spcPts val="0"/>
+              </a:spcBef>
+              <a:spcAft>
+                <a:spcPts val="800"/>
+              </a:spcAft>
+            </a:pPr>
+            <a:r>
+              <a:rPr sz="1300" b="0" i="0">
+                <a:solidFill>
+                  <a:srgbClr val="444444"/>
+                </a:solidFill>
+                <a:latin typeface="Helvetica Neue"/>
+              </a:rPr>
+              <a:t>Atteint dès l'année 1 — rare pour un produit matériel.</a:t>
+            </a:r>
+          </a:p>
+          <a:p>
+            <a:pPr algn="l">
+              <a:spcBef>
+                <a:spcPts val="200"/>
+              </a:spcBef>
+              <a:spcAft>
+                <a:spcPts val="100"/>
+              </a:spcAft>
+            </a:pPr>
+            <a:r>
+              <a:rPr sz="1450" b="1" i="0">
+                <a:solidFill>
+                  <a:srgbClr val="9C7A4A"/>
+                </a:solidFill>
+                <a:latin typeface="Helvetica Neue"/>
+              </a:rPr>
+              <a:t>Risques surveillés</a:t>
+            </a:r>
+          </a:p>
+          <a:p>
+            <a:pPr algn="l">
+              <a:spcBef>
+                <a:spcPts val="0"/>
+              </a:spcBef>
+              <a:spcAft>
+                <a:spcPts val="600"/>
+              </a:spcAft>
+            </a:pPr>
+            <a:r>
+              <a:rPr sz="1300" b="0" i="0">
+                <a:solidFill>
+                  <a:srgbClr val="444444"/>
+                </a:solidFill>
+                <a:latin typeface="Helvetica Neue"/>
+              </a:rPr>
+              <a:t>Coût d'acquisition (CAC) · rétention des abonnés.</a:t>
+            </a:r>
+          </a:p>
+        </p:txBody>
+      </p:sp>
+      <p:sp>
+        <p:nvSpPr>
+          <p:cNvPr id="11" name="TextBox 10"/>
+          <p:cNvSpPr txBox="1"/>
+          <p:nvPr/>
+        </p:nvSpPr>
+        <p:spPr>
+          <a:xfrm>
+            <a:off x="6858000" y="2331720"/>
+            <a:ext cx="4572000" cy="365760"/>
+          </a:xfrm>
+          <a:prstGeom prst="rect">
+            <a:avLst/>
+          </a:prstGeom>
+          <a:noFill/>
+        </p:spPr>
+        <p:txBody>
+          <a:bodyPr wrap="square" anchor="t">
+            <a:spAutoFit/>
+          </a:bodyPr>
+          <a:lstStyle/>
+          <a:p>
+            <a:pPr algn="l">
+              <a:spcBef>
+                <a:spcPts val="0"/>
+              </a:spcBef>
+              <a:spcAft>
+                <a:spcPts val="600"/>
+              </a:spcAft>
+            </a:pPr>
+            <a:r>
+              <a:rPr sz="1300" b="1" i="0">
+                <a:solidFill>
+                  <a:srgbClr val="1A1A1A"/>
+                </a:solidFill>
+                <a:latin typeface="Helvetica Neue"/>
+              </a:rPr>
+              <a:t>Marge d'exploitation</a:t>
+            </a:r>
+          </a:p>
+        </p:txBody>
+      </p:sp>
+      <p:sp>
+        <p:nvSpPr>
+          <p:cNvPr id="12" name="Rectangle 11"/>
+          <p:cNvSpPr/>
+          <p:nvPr/>
+        </p:nvSpPr>
+        <p:spPr>
+          <a:xfrm>
+            <a:off x="7132320" y="5044966"/>
+            <a:ext cx="1097280" cy="624314"/>
+          </a:xfrm>
+          <a:prstGeom prst="rect">
+            <a:avLst/>
+          </a:prstGeom>
+          <a:solidFill>
+            <a:srgbClr val="9C7A4A"/>
+          </a:solidFill>
+          <a:ln>
+            <a:noFill/>
+          </a:ln>
+          <a:effectLst/>
+        </p:spPr>
+        <p:style>
+          <a:lnRef idx="1">
+            <a:schemeClr val="accent1"/>
+          </a:lnRef>
+          <a:fillRef idx="3">
+            <a:schemeClr val="accent1"/>
+          </a:fillRef>
+          <a:effectRef idx="2">
+            <a:schemeClr val="accent1"/>
+          </a:effectRef>
+          <a:fontRef idx="minor">
+            <a:schemeClr val="lt1"/>
+          </a:fontRef>
+        </p:style>
+        <p:txBody>
+          <a:bodyPr rtlCol="0" anchor="ctr"/>
+          <a:lstStyle/>
+          <a:p>
+            <a:pPr algn="ctr"/>
+          </a:p>
+        </p:txBody>
+      </p:sp>
+      <p:sp>
+        <p:nvSpPr>
+          <p:cNvPr id="13" name="TextBox 12"/>
+          <p:cNvSpPr txBox="1"/>
+          <p:nvPr/>
+        </p:nvSpPr>
+        <p:spPr>
+          <a:xfrm>
+            <a:off x="6995160" y="4679206"/>
+            <a:ext cx="1371600" cy="320040"/>
+          </a:xfrm>
+          <a:prstGeom prst="rect">
+            <a:avLst/>
+          </a:prstGeom>
+          <a:noFill/>
+        </p:spPr>
+        <p:txBody>
+          <a:bodyPr wrap="square" anchor="t">
+            <a:spAutoFit/>
+          </a:bodyPr>
+          <a:lstStyle/>
+          <a:p>
+            <a:pPr algn="ctr">
+              <a:spcBef>
+                <a:spcPts val="0"/>
+              </a:spcBef>
+              <a:spcAft>
+                <a:spcPts val="600"/>
+              </a:spcAft>
+            </a:pPr>
+            <a:r>
+              <a:rPr sz="1300" b="1" i="0">
+                <a:solidFill>
+                  <a:srgbClr val="1A1A1A"/>
+                </a:solidFill>
+                <a:latin typeface="Helvetica Neue"/>
+              </a:rPr>
+              <a:t>6,6 %</a:t>
+            </a:r>
+          </a:p>
+        </p:txBody>
+      </p:sp>
+      <p:sp>
+        <p:nvSpPr>
+          <p:cNvPr id="14" name="TextBox 13"/>
+          <p:cNvSpPr txBox="1"/>
+          <p:nvPr/>
+        </p:nvSpPr>
+        <p:spPr>
+          <a:xfrm>
+            <a:off x="6995160" y="5742432"/>
+            <a:ext cx="1371600" cy="320040"/>
+          </a:xfrm>
+          <a:prstGeom prst="rect">
+            <a:avLst/>
+          </a:prstGeom>
+          <a:noFill/>
+        </p:spPr>
+        <p:txBody>
+          <a:bodyPr wrap="square" anchor="t">
+            <a:spAutoFit/>
+          </a:bodyPr>
+          <a:lstStyle/>
+          <a:p>
+            <a:pPr algn="ctr">
+              <a:spcBef>
+                <a:spcPts val="0"/>
+              </a:spcBef>
+              <a:spcAft>
+                <a:spcPts val="600"/>
+              </a:spcAft>
+            </a:pPr>
+            <a:r>
+              <a:rPr sz="1100" b="0" i="0">
+                <a:solidFill>
+                  <a:srgbClr val="444444"/>
+                </a:solidFill>
+                <a:latin typeface="Helvetica Neue"/>
+              </a:rPr>
+              <a:t>Année 1</a:t>
+            </a:r>
+          </a:p>
+        </p:txBody>
+      </p:sp>
+      <p:sp>
+        <p:nvSpPr>
+          <p:cNvPr id="15" name="Rectangle 14"/>
+          <p:cNvSpPr/>
+          <p:nvPr/>
+        </p:nvSpPr>
+        <p:spPr>
+          <a:xfrm>
+            <a:off x="8732520" y="4061198"/>
+            <a:ext cx="1097280" cy="1608082"/>
+          </a:xfrm>
+          <a:prstGeom prst="rect">
+            <a:avLst/>
+          </a:prstGeom>
+          <a:solidFill>
+            <a:srgbClr val="9C7A4A"/>
+          </a:solidFill>
+          <a:ln>
+            <a:noFill/>
+          </a:ln>
+          <a:effectLst/>
+        </p:spPr>
+        <p:style>
+          <a:lnRef idx="1">
+            <a:schemeClr val="accent1"/>
+          </a:lnRef>
+          <a:fillRef idx="3">
+            <a:schemeClr val="accent1"/>
+          </a:fillRef>
+          <a:effectRef idx="2">
+            <a:schemeClr val="accent1"/>
+          </a:effectRef>
+          <a:fontRef idx="minor">
+            <a:schemeClr val="lt1"/>
+          </a:fontRef>
+        </p:style>
+        <p:txBody>
+          <a:bodyPr rtlCol="0" anchor="ctr"/>
+          <a:lstStyle/>
+          <a:p>
+            <a:pPr algn="ctr"/>
+          </a:p>
+        </p:txBody>
+      </p:sp>
+      <p:sp>
+        <p:nvSpPr>
+          <p:cNvPr id="16" name="TextBox 15"/>
+          <p:cNvSpPr txBox="1"/>
+          <p:nvPr/>
+        </p:nvSpPr>
+        <p:spPr>
+          <a:xfrm>
+            <a:off x="8595360" y="3695438"/>
+            <a:ext cx="1371600" cy="320040"/>
+          </a:xfrm>
+          <a:prstGeom prst="rect">
+            <a:avLst/>
+          </a:prstGeom>
+          <a:noFill/>
+        </p:spPr>
+        <p:txBody>
+          <a:bodyPr wrap="square" anchor="t">
+            <a:spAutoFit/>
+          </a:bodyPr>
+          <a:lstStyle/>
+          <a:p>
+            <a:pPr algn="ctr">
+              <a:spcBef>
+                <a:spcPts val="0"/>
+              </a:spcBef>
+              <a:spcAft>
+                <a:spcPts val="600"/>
+              </a:spcAft>
+            </a:pPr>
+            <a:r>
+              <a:rPr sz="1300" b="1" i="0">
+                <a:solidFill>
+                  <a:srgbClr val="1A1A1A"/>
+                </a:solidFill>
+                <a:latin typeface="Helvetica Neue"/>
+              </a:rPr>
+              <a:t>≈ 17 %</a:t>
+            </a:r>
+          </a:p>
+        </p:txBody>
+      </p:sp>
+      <p:sp>
+        <p:nvSpPr>
+          <p:cNvPr id="17" name="TextBox 16"/>
+          <p:cNvSpPr txBox="1"/>
+          <p:nvPr/>
+        </p:nvSpPr>
+        <p:spPr>
+          <a:xfrm>
+            <a:off x="8595360" y="5742432"/>
+            <a:ext cx="1371600" cy="320040"/>
+          </a:xfrm>
+          <a:prstGeom prst="rect">
+            <a:avLst/>
+          </a:prstGeom>
+          <a:noFill/>
+        </p:spPr>
+        <p:txBody>
+          <a:bodyPr wrap="square" anchor="t">
+            <a:spAutoFit/>
+          </a:bodyPr>
+          <a:lstStyle/>
+          <a:p>
+            <a:pPr algn="ctr">
+              <a:spcBef>
+                <a:spcPts val="0"/>
+              </a:spcBef>
+              <a:spcAft>
+                <a:spcPts val="600"/>
+              </a:spcAft>
+            </a:pPr>
+            <a:r>
+              <a:rPr sz="1100" b="0" i="0">
+                <a:solidFill>
+                  <a:srgbClr val="444444"/>
+                </a:solidFill>
+                <a:latin typeface="Helvetica Neue"/>
+              </a:rPr>
+              <a:t>Année 2</a:t>
+            </a:r>
+          </a:p>
+        </p:txBody>
+      </p:sp>
+      <p:sp>
+        <p:nvSpPr>
+          <p:cNvPr id="18" name="Rectangle 17"/>
+          <p:cNvSpPr/>
+          <p:nvPr/>
+        </p:nvSpPr>
+        <p:spPr>
+          <a:xfrm>
+            <a:off x="10332720" y="2926080"/>
+            <a:ext cx="1097280" cy="2743200"/>
+          </a:xfrm>
+          <a:prstGeom prst="rect">
+            <a:avLst/>
+          </a:prstGeom>
+          <a:solidFill>
+            <a:srgbClr val="1A1A1A"/>
+          </a:solidFill>
+          <a:ln>
+            <a:noFill/>
+          </a:ln>
+          <a:effectLst/>
+        </p:spPr>
+        <p:style>
+          <a:lnRef idx="1">
+            <a:schemeClr val="accent1"/>
+          </a:lnRef>
+          <a:fillRef idx="3">
+            <a:schemeClr val="accent1"/>
+          </a:fillRef>
+          <a:effectRef idx="2">
+            <a:schemeClr val="accent1"/>
+          </a:effectRef>
+          <a:fontRef idx="minor">
+            <a:schemeClr val="lt1"/>
+          </a:fontRef>
+        </p:style>
+        <p:txBody>
+          <a:bodyPr rtlCol="0" anchor="ctr"/>
+          <a:lstStyle/>
+          <a:p>
+            <a:pPr algn="ctr"/>
+          </a:p>
+        </p:txBody>
+      </p:sp>
+      <p:sp>
+        <p:nvSpPr>
+          <p:cNvPr id="19" name="TextBox 18"/>
+          <p:cNvSpPr txBox="1"/>
+          <p:nvPr/>
+        </p:nvSpPr>
+        <p:spPr>
+          <a:xfrm>
+            <a:off x="10195560" y="2560320"/>
+            <a:ext cx="1371600" cy="320040"/>
+          </a:xfrm>
+          <a:prstGeom prst="rect">
+            <a:avLst/>
+          </a:prstGeom>
+          <a:noFill/>
+        </p:spPr>
+        <p:txBody>
+          <a:bodyPr wrap="square" anchor="t">
+            <a:spAutoFit/>
+          </a:bodyPr>
+          <a:lstStyle/>
+          <a:p>
+            <a:pPr algn="ctr">
+              <a:spcBef>
+                <a:spcPts val="0"/>
+              </a:spcBef>
+              <a:spcAft>
+                <a:spcPts val="600"/>
+              </a:spcAft>
+            </a:pPr>
+            <a:r>
+              <a:rPr sz="1300" b="1" i="0">
+                <a:solidFill>
+                  <a:srgbClr val="1A1A1A"/>
+                </a:solidFill>
+                <a:latin typeface="Helvetica Neue"/>
+              </a:rPr>
+              <a:t>≈ 29 %</a:t>
+            </a:r>
+          </a:p>
+        </p:txBody>
+      </p:sp>
+      <p:sp>
+        <p:nvSpPr>
+          <p:cNvPr id="20" name="TextBox 19"/>
+          <p:cNvSpPr txBox="1"/>
+          <p:nvPr/>
+        </p:nvSpPr>
+        <p:spPr>
+          <a:xfrm>
+            <a:off x="10195560" y="5742432"/>
+            <a:ext cx="1371600" cy="320040"/>
+          </a:xfrm>
+          <a:prstGeom prst="rect">
+            <a:avLst/>
+          </a:prstGeom>
+          <a:noFill/>
+        </p:spPr>
+        <p:txBody>
+          <a:bodyPr wrap="square" anchor="t">
+            <a:spAutoFit/>
+          </a:bodyPr>
+          <a:lstStyle/>
+          <a:p>
+            <a:pPr algn="ctr">
+              <a:spcBef>
+                <a:spcPts val="0"/>
+              </a:spcBef>
+              <a:spcAft>
+                <a:spcPts val="600"/>
+              </a:spcAft>
+            </a:pPr>
+            <a:r>
+              <a:rPr sz="1100" b="0" i="0">
+                <a:solidFill>
+                  <a:srgbClr val="444444"/>
+                </a:solidFill>
+                <a:latin typeface="Helvetica Neue"/>
+              </a:rPr>
+              <a:t>Année 3</a:t>
+            </a:r>
+          </a:p>
+        </p:txBody>
+      </p:sp>
+      <p:sp>
+        <p:nvSpPr>
+          <p:cNvPr id="21" name="TextBox 20"/>
+          <p:cNvSpPr txBox="1"/>
+          <p:nvPr/>
+        </p:nvSpPr>
+        <p:spPr>
+          <a:xfrm>
+            <a:off x="6858000" y="6126480"/>
+            <a:ext cx="4572000" cy="365760"/>
+          </a:xfrm>
+          <a:prstGeom prst="rect">
+            <a:avLst/>
+          </a:prstGeom>
+          <a:noFill/>
+        </p:spPr>
+        <p:txBody>
+          <a:bodyPr wrap="square" anchor="t">
+            <a:spAutoFit/>
+          </a:bodyPr>
+          <a:lstStyle/>
+          <a:p>
+            <a:pPr algn="l">
+              <a:spcBef>
+                <a:spcPts val="0"/>
+              </a:spcBef>
+              <a:spcAft>
+                <a:spcPts val="600"/>
+              </a:spcAft>
+            </a:pPr>
+            <a:r>
+              <a:rPr sz="1100" b="0" i="1">
+                <a:solidFill>
+                  <a:srgbClr val="6F6F6F"/>
+                </a:solidFill>
+                <a:latin typeface="Helvetica Neue"/>
+              </a:rPr>
+              <a:t>L'effet de levier de l'abonnement ×4 la marge en 3 ans.</a:t>
+            </a:r>
+          </a:p>
+        </p:txBody>
+      </p:sp>
+    </p:spTree>
+  </p:cSld>
+  <p:clrMapOvr>
+    <a:masterClrMapping/>
+  </p:clrMapOvr>
+  <p:transition spd="med">
+    <p:fade/>
+  </p:transition>
+</p:sld>
+</file>
+
+<file path=ppt/slides/slide11.xml><?xml version="1.0" encoding="utf-8"?>
+<p:sld xmlns:a="http://schemas.openxmlformats.org/drawingml/2006/main" xmlns:p="http://schemas.openxmlformats.org/presentationml/2006/main" xmlns:r="http://schemas.openxmlformats.org/officeDocument/2006/relationships">
+  <p:cSld>
+    <p:spTree>
+      <p:nvGrpSpPr>
+        <p:cNvPr id="1" name=""/>
+        <p:cNvGrpSpPr/>
+        <p:nvPr/>
+      </p:nvGrpSpPr>
+      <p:grpSpPr/>
+      <p:sp>
+        <p:nvSpPr>
+          <p:cNvPr id="2" name="Rectangle 1"/>
+          <p:cNvSpPr/>
+          <p:nvPr/>
+        </p:nvSpPr>
+        <p:spPr>
+          <a:xfrm>
+            <a:off x="0" y="0"/>
+            <a:ext cx="12191695" cy="6858000"/>
+          </a:xfrm>
+          <a:prstGeom prst="rect">
+            <a:avLst/>
+          </a:prstGeom>
+          <a:solidFill>
+            <a:srgbClr val="1A1A1A"/>
+          </a:solidFill>
+          <a:ln>
+            <a:noFill/>
+          </a:ln>
+          <a:effectLst/>
+        </p:spPr>
+        <p:style>
+          <a:lnRef idx="1">
+            <a:schemeClr val="accent1"/>
+          </a:lnRef>
+          <a:fillRef idx="3">
+            <a:schemeClr val="accent1"/>
+          </a:fillRef>
+          <a:effectRef idx="2">
+            <a:schemeClr val="accent1"/>
+          </a:effectRef>
+          <a:fontRef idx="minor">
+            <a:schemeClr val="lt1"/>
+          </a:fontRef>
+        </p:style>
+        <p:txBody>
+          <a:bodyPr rtlCol="0" anchor="ctr"/>
+          <a:lstStyle/>
+          <a:p>
+            <a:pPr algn="ctr"/>
+          </a:p>
+        </p:txBody>
+      </p:sp>
+      <p:sp>
+        <p:nvSpPr>
+          <p:cNvPr id="3" name="Rectangle 2"/>
+          <p:cNvSpPr/>
+          <p:nvPr/>
+        </p:nvSpPr>
+        <p:spPr>
+          <a:xfrm>
+            <a:off x="256032" y="256032"/>
+            <a:ext cx="11679631" cy="6345936"/>
+          </a:xfrm>
+          <a:prstGeom prst="rect">
+            <a:avLst/>
+          </a:prstGeom>
+          <a:noFill/>
+          <a:ln w="15240">
+            <a:solidFill>
+              <a:srgbClr val="9C7A4A"/>
+            </a:solidFill>
+          </a:ln>
+          <a:effectLst/>
+        </p:spPr>
+        <p:style>
+          <a:lnRef idx="1">
+            <a:schemeClr val="accent1"/>
+          </a:lnRef>
+          <a:fillRef idx="3">
+            <a:schemeClr val="accent1"/>
+          </a:fillRef>
+          <a:effectRef idx="2">
+            <a:schemeClr val="accent1"/>
+          </a:effectRef>
+          <a:fontRef idx="minor">
+            <a:schemeClr val="lt1"/>
+          </a:fontRef>
+        </p:style>
+        <p:txBody>
+          <a:bodyPr rtlCol="0" anchor="ctr"/>
+          <a:lstStyle/>
+          <a:p>
+            <a:pPr algn="ctr"/>
+          </a:p>
+        </p:txBody>
+      </p:sp>
+      <p:pic>
+        <p:nvPicPr>
+          <p:cNvPr id="4" name="Picture 3" descr="logo.png"/>
+          <p:cNvPicPr>
+            <a:picLocks noChangeAspect="1"/>
+          </p:cNvPicPr>
+          <p:nvPr/>
+        </p:nvPicPr>
+        <p:blipFill>
+          <a:blip r:embed="rId2"/>
+          <a:stretch>
+            <a:fillRect/>
+          </a:stretch>
+        </p:blipFill>
+        <p:spPr>
+          <a:xfrm>
+            <a:off x="5547207" y="868680"/>
+            <a:ext cx="1097280" cy="1097280"/>
+          </a:xfrm>
+          <a:prstGeom prst="rect">
+            <a:avLst/>
+          </a:prstGeom>
+        </p:spPr>
+      </p:pic>
+      <p:sp>
+        <p:nvSpPr>
+          <p:cNvPr id="5" name="TextBox 4"/>
+          <p:cNvSpPr txBox="1"/>
+          <p:nvPr/>
+        </p:nvSpPr>
+        <p:spPr>
+          <a:xfrm>
+            <a:off x="914400" y="2240280"/>
+            <a:ext cx="10362895" cy="1188720"/>
+          </a:xfrm>
+          <a:prstGeom prst="rect">
+            <a:avLst/>
+          </a:prstGeom>
+          <a:noFill/>
+        </p:spPr>
+        <p:txBody>
+          <a:bodyPr wrap="square" anchor="t">
+            <a:spAutoFit/>
+          </a:bodyPr>
+          <a:lstStyle/>
+          <a:p>
+            <a:pPr algn="ctr">
+              <a:spcBef>
+                <a:spcPts val="0"/>
+              </a:spcBef>
+              <a:spcAft>
+                <a:spcPts val="200"/>
+              </a:spcAft>
+            </a:pPr>
+            <a:r>
+              <a:rPr sz="3000" b="0" i="0">
+                <a:solidFill>
+                  <a:srgbClr val="FFFFFF"/>
+                </a:solidFill>
+                <a:latin typeface="Georgia"/>
+              </a:rPr>
+              <a:t>JECA Jewelry transforme</a:t>
+            </a:r>
+          </a:p>
+          <a:p>
+            <a:pPr algn="ctr">
+              <a:spcBef>
+                <a:spcPts val="0"/>
+              </a:spcBef>
+              <a:spcAft>
+                <a:spcPts val="600"/>
+              </a:spcAft>
+            </a:pPr>
+            <a:r>
+              <a:rPr sz="3000" b="0" i="0">
+                <a:solidFill>
+                  <a:srgbClr val="FFFFFF"/>
+                </a:solidFill>
+                <a:latin typeface="Georgia"/>
+              </a:rPr>
+              <a:t>l'inquiétude en sérénité.</a:t>
+            </a:r>
+          </a:p>
+        </p:txBody>
+      </p:sp>
+      <p:sp>
+        <p:nvSpPr>
+          <p:cNvPr id="6" name="Rectangle 5"/>
+          <p:cNvSpPr/>
+          <p:nvPr/>
+        </p:nvSpPr>
+        <p:spPr>
+          <a:xfrm>
+            <a:off x="5730087" y="3611880"/>
+            <a:ext cx="731520" cy="19050"/>
+          </a:xfrm>
+          <a:prstGeom prst="rect">
+            <a:avLst/>
+          </a:prstGeom>
+          <a:solidFill>
+            <a:srgbClr val="B89A6B"/>
+          </a:solidFill>
+          <a:ln>
+            <a:noFill/>
+          </a:ln>
+          <a:effectLst/>
+        </p:spPr>
+        <p:style>
+          <a:lnRef idx="1">
+            <a:schemeClr val="accent1"/>
+          </a:lnRef>
+          <a:fillRef idx="3">
+            <a:schemeClr val="accent1"/>
+          </a:fillRef>
+          <a:effectRef idx="2">
+            <a:schemeClr val="accent1"/>
+          </a:effectRef>
+          <a:fontRef idx="minor">
+            <a:schemeClr val="lt1"/>
+          </a:fontRef>
+        </p:style>
+        <p:txBody>
+          <a:bodyPr rtlCol="0" anchor="ctr"/>
+          <a:lstStyle/>
+          <a:p>
+            <a:pPr algn="ctr"/>
+          </a:p>
+        </p:txBody>
+      </p:sp>
+      <p:sp>
+        <p:nvSpPr>
+          <p:cNvPr id="7" name="TextBox 6"/>
+          <p:cNvSpPr txBox="1"/>
+          <p:nvPr/>
+        </p:nvSpPr>
+        <p:spPr>
+          <a:xfrm>
+            <a:off x="1371600" y="3840480"/>
+            <a:ext cx="9448495" cy="914400"/>
+          </a:xfrm>
+          <a:prstGeom prst="rect">
+            <a:avLst/>
+          </a:prstGeom>
+          <a:noFill/>
+        </p:spPr>
+        <p:txBody>
+          <a:bodyPr wrap="square" anchor="t">
+            <a:spAutoFit/>
+          </a:bodyPr>
+          <a:lstStyle/>
+          <a:p>
+            <a:pPr algn="ctr">
+              <a:spcBef>
+                <a:spcPts val="0"/>
+              </a:spcBef>
+              <a:spcAft>
+                <a:spcPts val="200"/>
+              </a:spcAft>
+            </a:pPr>
+            <a:r>
+              <a:rPr sz="1500" b="0" i="1">
+                <a:solidFill>
+                  <a:srgbClr val="E8E2D6"/>
+                </a:solidFill>
+                <a:latin typeface="Helvetica Neue"/>
+              </a:rPr>
+              <a:t>« Depuis qu'elle porte son collier JECA, je n'ai plus cette boule au ventre à la sortie de l'école. »</a:t>
+            </a:r>
+          </a:p>
+          <a:p>
+            <a:pPr algn="ctr">
+              <a:spcBef>
+                <a:spcPts val="0"/>
+              </a:spcBef>
+              <a:spcAft>
+                <a:spcPts val="600"/>
+              </a:spcAft>
+            </a:pPr>
+            <a:r>
+              <a:rPr sz="1100" b="0" i="0">
+                <a:solidFill>
+                  <a:srgbClr val="B89A6B"/>
+                </a:solidFill>
+                <a:latin typeface="Helvetica Neue"/>
+              </a:rPr>
+              <a:t>— Sophie, maman de deux enfants</a:t>
+            </a:r>
+          </a:p>
+        </p:txBody>
+      </p:sp>
+      <p:sp>
+        <p:nvSpPr>
+          <p:cNvPr id="8" name="TextBox 7"/>
+          <p:cNvSpPr txBox="1"/>
+          <p:nvPr/>
+        </p:nvSpPr>
+        <p:spPr>
+          <a:xfrm>
+            <a:off x="914400" y="5166360"/>
+            <a:ext cx="10362895" cy="914400"/>
+          </a:xfrm>
+          <a:prstGeom prst="rect">
+            <a:avLst/>
+          </a:prstGeom>
+          <a:noFill/>
+        </p:spPr>
+        <p:txBody>
+          <a:bodyPr wrap="square" anchor="t">
+            <a:spAutoFit/>
+          </a:bodyPr>
+          <a:lstStyle/>
+          <a:p>
+            <a:pPr algn="ctr">
+              <a:spcBef>
+                <a:spcPts val="0"/>
+              </a:spcBef>
+              <a:spcAft>
+                <a:spcPts val="600"/>
+              </a:spcAft>
+            </a:pPr>
+            <a:r>
+              <a:rPr sz="1600" b="1" i="0">
+                <a:solidFill>
+                  <a:srgbClr val="FFFFFF"/>
+                </a:solidFill>
+                <a:latin typeface="Helvetica Neue"/>
+                <a:hlinkClick r:id="rId3"/>
+              </a:rPr>
+              <a:t>▸  jeca-site.vercel.app</a:t>
+            </a:r>
+          </a:p>
+          <a:p>
+            <a:pPr algn="ctr">
+              <a:spcBef>
+                <a:spcPts val="0"/>
+              </a:spcBef>
+              <a:spcAft>
+                <a:spcPts val="600"/>
+              </a:spcAft>
+            </a:pPr>
+            <a:r>
+              <a:rPr sz="1300" b="0" i="0">
+                <a:solidFill>
+                  <a:srgbClr val="C9C4BA"/>
+                </a:solidFill>
+                <a:latin typeface="Helvetica Neue"/>
+              </a:rPr>
+              <a:t>Merci de votre attention.</a:t>
+            </a:r>
+          </a:p>
+        </p:txBody>
+      </p:sp>
+    </p:spTree>
+  </p:cSld>
+  <p:clrMapOvr>
+    <a:masterClrMapping/>
+  </p:clrMapOvr>
+  <p:transition spd="med">
+    <p:fade/>
+  </p:transition>
 </p:sld>
 </file>
 
@@ -3615,8 +5009,8 @@
         </p:nvSpPr>
         <p:spPr>
           <a:xfrm>
-            <a:off x="10362895" y="457200"/>
-            <a:ext cx="1325880" cy="365760"/>
+            <a:off x="9082735" y="475488"/>
+            <a:ext cx="2606040" cy="365760"/>
           </a:xfrm>
           <a:prstGeom prst="rect">
             <a:avLst/>
@@ -3638,13 +5032,33 @@
               </a:spcAft>
             </a:pPr>
             <a:r>
-              <a:rPr sz="1300" b="1" i="0">
+              <a:rPr sz="1050" b="0" i="0">
                 <a:solidFill>
                   <a:srgbClr val="9C7A4A"/>
                 </a:solidFill>
                 <a:latin typeface="Helvetica Neue"/>
-              </a:rPr>
-              <a:t>02</a:t>
+                <a:hlinkClick r:id="rId3"/>
+              </a:rPr>
+              <a:t>jeca-site.vercel.app</a:t>
+            </a:r>
+          </a:p>
+          <a:p>
+            <a:pPr algn="r">
+              <a:spcBef>
+                <a:spcPts val="0"/>
+              </a:spcBef>
+              <a:spcAft>
+                <a:spcPts val="600"/>
+              </a:spcAft>
+            </a:pPr>
+            <a:r>
+              <a:rPr sz="1050" b="1" i="0">
+                <a:solidFill>
+                  <a:srgbClr val="6F6F6F"/>
+                </a:solidFill>
+                <a:latin typeface="Helvetica Neue"/>
+              </a:rPr>
+              <a:t>   02</a:t>
             </a:r>
           </a:p>
         </p:txBody>
@@ -3657,7 +5071,7 @@
         </p:nvSpPr>
         <p:spPr>
           <a:xfrm>
-            <a:off x="548640" y="1143000"/>
+            <a:off x="548640" y="1115568"/>
             <a:ext cx="10058400" cy="320040"/>
           </a:xfrm>
           <a:prstGeom prst="rect">
@@ -3699,7 +5113,7 @@
         </p:nvSpPr>
         <p:spPr>
           <a:xfrm>
-            <a:off x="566928" y="1481328"/>
+            <a:off x="566928" y="1463040"/>
             <a:ext cx="457200" cy="19050"/>
           </a:xfrm>
           <a:prstGeom prst="rect">
@@ -3744,7 +5158,7 @@
           <p:nvPr/>
         </p:nvPicPr>
         <p:blipFill>
-          <a:blip r:embed="rId3"/>
+          <a:blip r:embed="rId4"/>
           <a:stretch>
             <a:fillRect/>
           </a:stretch>
@@ -3768,7 +5182,7 @@
         <p:spPr>
           <a:xfrm>
             <a:off x="640080" y="1828800"/>
-            <a:ext cx="5760720" cy="4297680"/>
+            <a:ext cx="5760720" cy="4389120"/>
           </a:xfrm>
           <a:prstGeom prst="rect">
             <a:avLst/>
@@ -3790,13 +5204,13 @@
               </a:spcAft>
             </a:pPr>
             <a:r>
-              <a:rPr sz="3000" b="0" i="0">
+              <a:rPr sz="2900" b="0" i="0">
                 <a:solidFill>
                   <a:srgbClr val="1A1A1A"/>
                 </a:solidFill>
                 <a:latin typeface="Georgia"/>
               </a:rPr>
-              <a:t>Pourquoi un bijou GPS ?</a:t>
+              <a:t>À l'intersection de deux échecs</a:t>
             </a:r>
           </a:p>
           <a:p>
@@ -3809,13 +5223,13 @@
               </a:spcAft>
             </a:pPr>
             <a:r>
-              <a:rPr sz="1500" b="1" i="0">
+              <a:rPr sz="1450" b="1" i="0">
                 <a:solidFill>
                   <a:srgbClr val="9C7A4A"/>
                 </a:solidFill>
                 <a:latin typeface="Helvetica Neue"/>
               </a:rPr>
-              <a:t>Le problème</a:t>
+              <a:t>Le déclic</a:t>
             </a:r>
           </a:p>
           <a:p>
@@ -3828,13 +5242,13 @@
               </a:spcAft>
             </a:pPr>
             <a:r>
-              <a:rPr sz="1400" b="0" i="0">
+              <a:rPr sz="1350" b="0" i="0">
                 <a:solidFill>
                   <a:srgbClr val="444444"/>
                 </a:solidFill>
                 <a:latin typeface="Helvetica Neue"/>
               </a:rPr>
-              <a:t>Chaque parent connaît la peur de perdre son enfant de vue. Balises et montres GPS ne sont pas portées : trop moches, trop chères.</a:t>
+              <a:t>« Quand un enfant disparaît dans une grande surface, les premières minutes décident de tout. »</a:t>
             </a:r>
           </a:p>
           <a:p>
@@ -3847,13 +5261,13 @@
               </a:spcAft>
             </a:pPr>
             <a:r>
-              <a:rPr sz="1500" b="1" i="0">
+              <a:rPr sz="1450" b="1" i="0">
                 <a:solidFill>
                   <a:srgbClr val="9C7A4A"/>
                 </a:solidFill>
                 <a:latin typeface="Helvetica Neue"/>
               </a:rPr>
-              <a:t>Notre intuition</a:t>
+              <a:t>Marché clivé</a:t>
             </a:r>
           </a:p>
           <a:p>
@@ -3866,13 +5280,13 @@
               </a:spcAft>
             </a:pPr>
             <a:r>
-              <a:rPr sz="1400" b="0" i="0">
+              <a:rPr sz="1350" b="0" i="0">
                 <a:solidFill>
                   <a:srgbClr val="444444"/>
                 </a:solidFill>
                 <a:latin typeface="Helvetica Neue"/>
               </a:rPr>
-              <a:t>Un dispositif n'est efficace que s'il est porté — donc s'il est désirable.</a:t>
+              <a:t>les balises GPS sont fiables mais personne ne les porte ; les bijoux/montres sont beaux mais sans vraie sécurité.</a:t>
             </a:r>
           </a:p>
           <a:p>
@@ -3885,13 +5299,13 @@
               </a:spcAft>
             </a:pPr>
             <a:r>
-              <a:rPr sz="1500" b="1" i="0">
+              <a:rPr sz="1450" b="1" i="0">
                 <a:solidFill>
                   <a:srgbClr val="9C7A4A"/>
                 </a:solidFill>
                 <a:latin typeface="Helvetica Neue"/>
               </a:rPr>
-              <a:t>Le choix</a:t>
+              <a:t>Notre place</a:t>
             </a:r>
           </a:p>
           <a:p>
@@ -3904,13 +5318,13 @@
               </a:spcAft>
             </a:pPr>
             <a:r>
-              <a:rPr sz="1400" b="0" i="0">
+              <a:rPr sz="1350" b="0" i="0">
                 <a:solidFill>
                   <a:srgbClr val="444444"/>
                 </a:solidFill>
                 <a:latin typeface="Helvetica Neue"/>
               </a:rPr>
-              <a:t>Un vrai bijou qui cache la technologie. Marché porteur, peu sensible au prix.</a:t>
+              <a:t>un bijou que l'enfant porte par envie, qui rassure sans qu'on y pense. Un dispositif n'est efficace que s'il est porté.</a:t>
             </a:r>
           </a:p>
         </p:txBody>
@@ -3920,6 +5334,9 @@
   <p:clrMapOvr>
     <a:masterClrMapping/>
   </p:clrMapOvr>
+  <p:transition spd="med">
+    <p:fade/>
+  </p:transition>
 </p:sld>
 </file>
 
@@ -4114,8 +5531,8 @@
         </p:nvSpPr>
         <p:spPr>
           <a:xfrm>
-            <a:off x="10362895" y="457200"/>
-            <a:ext cx="1325880" cy="365760"/>
+            <a:off x="9082735" y="475488"/>
+            <a:ext cx="2606040" cy="365760"/>
           </a:xfrm>
           <a:prstGeom prst="rect">
             <a:avLst/>
@@ -4137,13 +5554,33 @@
               </a:spcAft>
             </a:pPr>
             <a:r>
-              <a:rPr sz="1300" b="1" i="0">
+              <a:rPr sz="1050" b="0" i="0">
                 <a:solidFill>
                   <a:srgbClr val="9C7A4A"/>
                 </a:solidFill>
                 <a:latin typeface="Helvetica Neue"/>
-              </a:rPr>
-              <a:t>03</a:t>
+                <a:hlinkClick r:id="rId3"/>
+              </a:rPr>
+              <a:t>jeca-site.vercel.app</a:t>
+            </a:r>
+          </a:p>
+          <a:p>
+            <a:pPr algn="r">
+              <a:spcBef>
+                <a:spcPts val="0"/>
+              </a:spcBef>
+              <a:spcAft>
+                <a:spcPts val="600"/>
+              </a:spcAft>
+            </a:pPr>
+            <a:r>
+              <a:rPr sz="1050" b="1" i="0">
+                <a:solidFill>
+                  <a:srgbClr val="6F6F6F"/>
+                </a:solidFill>
+                <a:latin typeface="Helvetica Neue"/>
+              </a:rPr>
+              <a:t>   03</a:t>
             </a:r>
           </a:p>
         </p:txBody>
@@ -4156,7 +5593,7 @@
         </p:nvSpPr>
         <p:spPr>
           <a:xfrm>
-            <a:off x="548640" y="1143000"/>
+            <a:off x="548640" y="1115568"/>
             <a:ext cx="10058400" cy="320040"/>
           </a:xfrm>
           <a:prstGeom prst="rect">
@@ -4185,7 +5622,7 @@
                 </a:solidFill>
                 <a:latin typeface="Helvetica Neue"/>
               </a:rPr>
-              <a:t>POUR QUI</a:t>
+              <a:t>LE MARCHÉ — UN POTENTIEL CHIFFRÉ</a:t>
             </a:r>
           </a:p>
         </p:txBody>
@@ -4198,7 +5635,7 @@
         </p:nvSpPr>
         <p:spPr>
           <a:xfrm>
-            <a:off x="566928" y="1481328"/>
+            <a:off x="566928" y="1463040"/>
             <a:ext cx="457200" cy="19050"/>
           </a:xfrm>
           <a:prstGeom prst="rect">
@@ -4234,40 +5671,16 @@
           </a:p>
         </p:txBody>
       </p:sp>
-      <p:pic>
-        <p:nvPicPr>
-          <p:cNvPr id="9" name="Picture 8" descr="i1.jpg"/>
-          <p:cNvPicPr>
-            <a:picLocks noChangeAspect="1"/>
-          </p:cNvPicPr>
-          <p:nvPr/>
-        </p:nvPicPr>
-        <p:blipFill>
-          <a:blip r:embed="rId3"/>
-          <a:stretch>
-            <a:fillRect/>
-          </a:stretch>
-        </p:blipFill>
-        <p:spPr>
-          <a:xfrm>
-            <a:off x="548640" y="1874519"/>
-            <a:ext cx="4572000" cy="4160520"/>
-          </a:xfrm>
-          <a:prstGeom prst="rect">
-            <a:avLst/>
-          </a:prstGeom>
-        </p:spPr>
-      </p:pic>
-      <p:sp>
-        <p:nvSpPr>
-          <p:cNvPr id="10" name="TextBox 9"/>
+      <p:sp>
+        <p:nvSpPr>
+          <p:cNvPr id="9" name="TextBox 8"/>
           <p:cNvSpPr txBox="1"/>
           <p:nvPr/>
         </p:nvSpPr>
         <p:spPr>
           <a:xfrm>
-            <a:off x="5486400" y="1828800"/>
-            <a:ext cx="5760720" cy="4297680"/>
+            <a:off x="640080" y="1783080"/>
+            <a:ext cx="6583680" cy="640080"/>
           </a:xfrm>
           <a:prstGeom prst="rect">
             <a:avLst/>
@@ -4285,131 +5698,618 @@
                 <a:spcPts val="0"/>
               </a:spcBef>
               <a:spcAft>
-                <a:spcPts val="1200"/>
-              </a:spcAft>
-            </a:pPr>
-            <a:r>
-              <a:rPr sz="3000" b="0" i="0">
+                <a:spcPts val="600"/>
+              </a:spcAft>
+            </a:pPr>
+            <a:r>
+              <a:rPr sz="2800" b="0" i="0">
                 <a:solidFill>
                   <a:srgbClr val="1A1A1A"/>
                 </a:solidFill>
                 <a:latin typeface="Georgia"/>
               </a:rPr>
-              <a:t>Trois parents, une même attente</a:t>
-            </a:r>
-          </a:p>
-          <a:p>
-            <a:pPr algn="l">
-              <a:spcBef>
+              <a:t>Un marché porteur, peu sensible au prix</a:t>
+            </a:r>
+          </a:p>
+        </p:txBody>
+      </p:sp>
+      <p:sp>
+        <p:nvSpPr>
+          <p:cNvPr id="10" name="TextBox 9"/>
+          <p:cNvSpPr txBox="1"/>
+          <p:nvPr/>
+        </p:nvSpPr>
+        <p:spPr>
+          <a:xfrm>
+            <a:off x="685800" y="2697480"/>
+            <a:ext cx="2468880" cy="1371600"/>
+          </a:xfrm>
+          <a:prstGeom prst="rect">
+            <a:avLst/>
+          </a:prstGeom>
+          <a:noFill/>
+        </p:spPr>
+        <p:txBody>
+          <a:bodyPr wrap="square" anchor="t">
+            <a:spAutoFit/>
+          </a:bodyPr>
+          <a:lstStyle/>
+          <a:p>
+            <a:pPr algn="l">
+              <a:spcBef>
+                <a:spcPts val="0"/>
+              </a:spcBef>
+              <a:spcAft>
+                <a:spcPts val="300"/>
+              </a:spcAft>
+            </a:pPr>
+            <a:r>
+              <a:rPr sz="3400" b="1" i="0">
+                <a:solidFill>
+                  <a:srgbClr val="9C7A4A"/>
+                </a:solidFill>
+                <a:latin typeface="Georgia"/>
+              </a:rPr>
+              <a:t>60 Md$</a:t>
+            </a:r>
+          </a:p>
+          <a:p>
+            <a:pPr algn="l">
+              <a:spcBef>
+                <a:spcPts val="0"/>
+              </a:spcBef>
+              <a:spcAft>
                 <a:spcPts val="600"/>
+              </a:spcAft>
+            </a:pPr>
+            <a:r>
+              <a:rPr sz="1200" b="0" i="0">
+                <a:solidFill>
+                  <a:srgbClr val="444444"/>
+                </a:solidFill>
+                <a:latin typeface="Helvetica Neue"/>
+              </a:rPr>
+              <a:t>wearables dans le monde (2023), +12 %/an</a:t>
+            </a:r>
+          </a:p>
+        </p:txBody>
+      </p:sp>
+      <p:sp>
+        <p:nvSpPr>
+          <p:cNvPr id="11" name="TextBox 10"/>
+          <p:cNvSpPr txBox="1"/>
+          <p:nvPr/>
+        </p:nvSpPr>
+        <p:spPr>
+          <a:xfrm>
+            <a:off x="3383280" y="2697480"/>
+            <a:ext cx="2468880" cy="1371600"/>
+          </a:xfrm>
+          <a:prstGeom prst="rect">
+            <a:avLst/>
+          </a:prstGeom>
+          <a:noFill/>
+        </p:spPr>
+        <p:txBody>
+          <a:bodyPr wrap="square" anchor="t">
+            <a:spAutoFit/>
+          </a:bodyPr>
+          <a:lstStyle/>
+          <a:p>
+            <a:pPr algn="l">
+              <a:spcBef>
+                <a:spcPts val="0"/>
+              </a:spcBef>
+              <a:spcAft>
+                <a:spcPts val="300"/>
+              </a:spcAft>
+            </a:pPr>
+            <a:r>
+              <a:rPr sz="3400" b="1" i="0">
+                <a:solidFill>
+                  <a:srgbClr val="9C7A4A"/>
+                </a:solidFill>
+                <a:latin typeface="Georgia"/>
+              </a:rPr>
+              <a:t>12 M</a:t>
+            </a:r>
+          </a:p>
+          <a:p>
+            <a:pPr algn="l">
+              <a:spcBef>
+                <a:spcPts val="0"/>
+              </a:spcBef>
+              <a:spcAft>
+                <a:spcPts val="600"/>
+              </a:spcAft>
+            </a:pPr>
+            <a:r>
+              <a:rPr sz="1200" b="0" i="0">
+                <a:solidFill>
+                  <a:srgbClr val="444444"/>
+                </a:solidFill>
+                <a:latin typeface="Helvetica Neue"/>
+              </a:rPr>
+              <a:t>enfants de –15 ans en France (cible 4–12)</a:t>
+            </a:r>
+          </a:p>
+        </p:txBody>
+      </p:sp>
+      <p:sp>
+        <p:nvSpPr>
+          <p:cNvPr id="12" name="TextBox 11"/>
+          <p:cNvSpPr txBox="1"/>
+          <p:nvPr/>
+        </p:nvSpPr>
+        <p:spPr>
+          <a:xfrm>
+            <a:off x="685800" y="4297680"/>
+            <a:ext cx="2468880" cy="1371600"/>
+          </a:xfrm>
+          <a:prstGeom prst="rect">
+            <a:avLst/>
+          </a:prstGeom>
+          <a:noFill/>
+        </p:spPr>
+        <p:txBody>
+          <a:bodyPr wrap="square" anchor="t">
+            <a:spAutoFit/>
+          </a:bodyPr>
+          <a:lstStyle/>
+          <a:p>
+            <a:pPr algn="l">
+              <a:spcBef>
+                <a:spcPts val="0"/>
+              </a:spcBef>
+              <a:spcAft>
+                <a:spcPts val="300"/>
+              </a:spcAft>
+            </a:pPr>
+            <a:r>
+              <a:rPr sz="3400" b="1" i="0">
+                <a:solidFill>
+                  <a:srgbClr val="9C7A4A"/>
+                </a:solidFill>
+                <a:latin typeface="Georgia"/>
+              </a:rPr>
+              <a:t>100–130 M€</a:t>
+            </a:r>
+          </a:p>
+          <a:p>
+            <a:pPr algn="l">
+              <a:spcBef>
+                <a:spcPts val="0"/>
+              </a:spcBef>
+              <a:spcAft>
+                <a:spcPts val="600"/>
+              </a:spcAft>
+            </a:pPr>
+            <a:r>
+              <a:rPr sz="1200" b="0" i="0">
+                <a:solidFill>
+                  <a:srgbClr val="444444"/>
+                </a:solidFill>
+                <a:latin typeface="Helvetica Neue"/>
+              </a:rPr>
+              <a:t>marché adressable / an (SAM)</a:t>
+            </a:r>
+          </a:p>
+        </p:txBody>
+      </p:sp>
+      <p:sp>
+        <p:nvSpPr>
+          <p:cNvPr id="13" name="TextBox 12"/>
+          <p:cNvSpPr txBox="1"/>
+          <p:nvPr/>
+        </p:nvSpPr>
+        <p:spPr>
+          <a:xfrm>
+            <a:off x="3383280" y="4297680"/>
+            <a:ext cx="2468880" cy="1371600"/>
+          </a:xfrm>
+          <a:prstGeom prst="rect">
+            <a:avLst/>
+          </a:prstGeom>
+          <a:noFill/>
+        </p:spPr>
+        <p:txBody>
+          <a:bodyPr wrap="square" anchor="t">
+            <a:spAutoFit/>
+          </a:bodyPr>
+          <a:lstStyle/>
+          <a:p>
+            <a:pPr algn="l">
+              <a:spcBef>
+                <a:spcPts val="0"/>
+              </a:spcBef>
+              <a:spcAft>
+                <a:spcPts val="300"/>
+              </a:spcAft>
+            </a:pPr>
+            <a:r>
+              <a:rPr sz="3400" b="1" i="0">
+                <a:solidFill>
+                  <a:srgbClr val="9C7A4A"/>
+                </a:solidFill>
+                <a:latin typeface="Georgia"/>
+              </a:rPr>
+              <a:t>&lt; 5 %</a:t>
+            </a:r>
+          </a:p>
+          <a:p>
+            <a:pPr algn="l">
+              <a:spcBef>
+                <a:spcPts val="0"/>
+              </a:spcBef>
+              <a:spcAft>
+                <a:spcPts val="600"/>
+              </a:spcAft>
+            </a:pPr>
+            <a:r>
+              <a:rPr sz="1200" b="0" i="0">
+                <a:solidFill>
+                  <a:srgbClr val="444444"/>
+                </a:solidFill>
+                <a:latin typeface="Helvetica Neue"/>
+              </a:rPr>
+              <a:t>du SAM visé en 3 ans (SOM) — marge de croissance</a:t>
+            </a:r>
+          </a:p>
+        </p:txBody>
+      </p:sp>
+      <p:sp>
+        <p:nvSpPr>
+          <p:cNvPr id="14" name="Rectangle 13"/>
+          <p:cNvSpPr/>
+          <p:nvPr/>
+        </p:nvSpPr>
+        <p:spPr>
+          <a:xfrm>
+            <a:off x="6766560" y="2331720"/>
+            <a:ext cx="4572000" cy="868680"/>
+          </a:xfrm>
+          <a:prstGeom prst="rect">
+            <a:avLst/>
+          </a:prstGeom>
+          <a:solidFill>
+            <a:srgbClr val="B89A6B"/>
+          </a:solidFill>
+          <a:ln>
+            <a:noFill/>
+          </a:ln>
+          <a:effectLst/>
+        </p:spPr>
+        <p:style>
+          <a:lnRef idx="1">
+            <a:schemeClr val="accent1"/>
+          </a:lnRef>
+          <a:fillRef idx="3">
+            <a:schemeClr val="accent1"/>
+          </a:fillRef>
+          <a:effectRef idx="2">
+            <a:schemeClr val="accent1"/>
+          </a:effectRef>
+          <a:fontRef idx="minor">
+            <a:schemeClr val="lt1"/>
+          </a:fontRef>
+        </p:style>
+        <p:txBody>
+          <a:bodyPr rtlCol="0" anchor="ctr"/>
+          <a:lstStyle/>
+          <a:p>
+            <a:pPr algn="ctr"/>
+          </a:p>
+        </p:txBody>
+      </p:sp>
+      <p:sp>
+        <p:nvSpPr>
+          <p:cNvPr id="15" name="TextBox 14"/>
+          <p:cNvSpPr txBox="1"/>
+          <p:nvPr/>
+        </p:nvSpPr>
+        <p:spPr>
+          <a:xfrm>
+            <a:off x="6766560" y="2459736"/>
+            <a:ext cx="4572000" cy="640080"/>
+          </a:xfrm>
+          <a:prstGeom prst="rect">
+            <a:avLst/>
+          </a:prstGeom>
+          <a:noFill/>
+        </p:spPr>
+        <p:txBody>
+          <a:bodyPr wrap="square" anchor="t">
+            <a:spAutoFit/>
+          </a:bodyPr>
+          <a:lstStyle/>
+          <a:p>
+            <a:pPr algn="ctr">
+              <a:spcBef>
+                <a:spcPts val="0"/>
               </a:spcBef>
               <a:spcAft>
                 <a:spcPts val="100"/>
               </a:spcAft>
             </a:pPr>
             <a:r>
-              <a:rPr sz="1500" b="1" i="0">
-                <a:solidFill>
-                  <a:srgbClr val="9C7A4A"/>
-                </a:solidFill>
-                <a:latin typeface="Helvetica Neue"/>
-              </a:rPr>
-              <a:t>Sophie, 38 ans</a:t>
-            </a:r>
-          </a:p>
-          <a:p>
-            <a:pPr algn="l">
-              <a:spcBef>
-                <a:spcPts val="0"/>
-              </a:spcBef>
-              <a:spcAft>
-                <a:spcPts val="400"/>
-              </a:spcAft>
-            </a:pPr>
-            <a:r>
-              <a:rPr sz="1400" b="0" i="0">
-                <a:solidFill>
-                  <a:srgbClr val="444444"/>
-                </a:solidFill>
-                <a:latin typeface="Helvetica Neue"/>
-              </a:rPr>
-              <a:t>mère active : savoir où sont ses enfants sans culpabiliser.</a:t>
-            </a:r>
-          </a:p>
-          <a:p>
-            <a:pPr algn="l">
-              <a:spcBef>
+              <a:rPr sz="1400" b="1" i="0">
+                <a:solidFill>
+                  <a:srgbClr val="FFFFFF"/>
+                </a:solidFill>
+                <a:latin typeface="Helvetica Neue"/>
+              </a:rPr>
+              <a:t>TAM</a:t>
+            </a:r>
+          </a:p>
+          <a:p>
+            <a:pPr algn="ctr">
+              <a:spcBef>
+                <a:spcPts val="0"/>
+              </a:spcBef>
+              <a:spcAft>
                 <a:spcPts val="600"/>
+              </a:spcAft>
+            </a:pPr>
+            <a:r>
+              <a:rPr sz="1050" b="0" i="0">
+                <a:solidFill>
+                  <a:srgbClr val="F0E9DA"/>
+                </a:solidFill>
+                <a:latin typeface="Helvetica Neue"/>
+              </a:rPr>
+              <a:t>5 M foyers · panier ~90 €</a:t>
+            </a:r>
+          </a:p>
+        </p:txBody>
+      </p:sp>
+      <p:sp>
+        <p:nvSpPr>
+          <p:cNvPr id="16" name="Rectangle 15"/>
+          <p:cNvSpPr/>
+          <p:nvPr/>
+        </p:nvSpPr>
+        <p:spPr>
+          <a:xfrm>
+            <a:off x="7315200" y="3337560"/>
+            <a:ext cx="3474720" cy="868680"/>
+          </a:xfrm>
+          <a:prstGeom prst="rect">
+            <a:avLst/>
+          </a:prstGeom>
+          <a:solidFill>
+            <a:srgbClr val="9C7A4A"/>
+          </a:solidFill>
+          <a:ln>
+            <a:noFill/>
+          </a:ln>
+          <a:effectLst/>
+        </p:spPr>
+        <p:style>
+          <a:lnRef idx="1">
+            <a:schemeClr val="accent1"/>
+          </a:lnRef>
+          <a:fillRef idx="3">
+            <a:schemeClr val="accent1"/>
+          </a:fillRef>
+          <a:effectRef idx="2">
+            <a:schemeClr val="accent1"/>
+          </a:effectRef>
+          <a:fontRef idx="minor">
+            <a:schemeClr val="lt1"/>
+          </a:fontRef>
+        </p:style>
+        <p:txBody>
+          <a:bodyPr rtlCol="0" anchor="ctr"/>
+          <a:lstStyle/>
+          <a:p>
+            <a:pPr algn="ctr"/>
+          </a:p>
+        </p:txBody>
+      </p:sp>
+      <p:sp>
+        <p:nvSpPr>
+          <p:cNvPr id="17" name="TextBox 16"/>
+          <p:cNvSpPr txBox="1"/>
+          <p:nvPr/>
+        </p:nvSpPr>
+        <p:spPr>
+          <a:xfrm>
+            <a:off x="7315200" y="3465576"/>
+            <a:ext cx="3474720" cy="640080"/>
+          </a:xfrm>
+          <a:prstGeom prst="rect">
+            <a:avLst/>
+          </a:prstGeom>
+          <a:noFill/>
+        </p:spPr>
+        <p:txBody>
+          <a:bodyPr wrap="square" anchor="t">
+            <a:spAutoFit/>
+          </a:bodyPr>
+          <a:lstStyle/>
+          <a:p>
+            <a:pPr algn="ctr">
+              <a:spcBef>
+                <a:spcPts val="0"/>
               </a:spcBef>
               <a:spcAft>
                 <a:spcPts val="100"/>
               </a:spcAft>
             </a:pPr>
             <a:r>
-              <a:rPr sz="1500" b="1" i="0">
-                <a:solidFill>
-                  <a:srgbClr val="9C7A4A"/>
-                </a:solidFill>
-                <a:latin typeface="Helvetica Neue"/>
-              </a:rPr>
-              <a:t>Karim, 42 ans</a:t>
-            </a:r>
-          </a:p>
-          <a:p>
-            <a:pPr algn="l">
-              <a:spcBef>
-                <a:spcPts val="0"/>
-              </a:spcBef>
-              <a:spcAft>
-                <a:spcPts val="400"/>
-              </a:spcAft>
-            </a:pPr>
-            <a:r>
-              <a:rPr sz="1400" b="0" i="0">
-                <a:solidFill>
-                  <a:srgbClr val="444444"/>
-                </a:solidFill>
-                <a:latin typeface="Helvetica Neue"/>
-              </a:rPr>
-              <a:t>parent célibataire : le SOS et le paiement en 3× le rassurent.</a:t>
-            </a:r>
-          </a:p>
-          <a:p>
-            <a:pPr algn="l">
-              <a:spcBef>
+              <a:rPr sz="1400" b="1" i="0">
+                <a:solidFill>
+                  <a:srgbClr val="FFFFFF"/>
+                </a:solidFill>
+                <a:latin typeface="Helvetica Neue"/>
+              </a:rPr>
+              <a:t>SAM · 100–130 M€</a:t>
+            </a:r>
+          </a:p>
+          <a:p>
+            <a:pPr algn="ctr">
+              <a:spcBef>
+                <a:spcPts val="0"/>
+              </a:spcBef>
+              <a:spcAft>
                 <a:spcPts val="600"/>
+              </a:spcAft>
+            </a:pPr>
+            <a:r>
+              <a:rPr sz="1050" b="0" i="0">
+                <a:solidFill>
+                  <a:srgbClr val="F0E9DA"/>
+                </a:solidFill>
+                <a:latin typeface="Helvetica Neue"/>
+              </a:rPr>
+              <a:t>500 000 foyers premium + abo ~100 €/an</a:t>
+            </a:r>
+          </a:p>
+        </p:txBody>
+      </p:sp>
+      <p:sp>
+        <p:nvSpPr>
+          <p:cNvPr id="18" name="Rectangle 17"/>
+          <p:cNvSpPr/>
+          <p:nvPr/>
+        </p:nvSpPr>
+        <p:spPr>
+          <a:xfrm>
+            <a:off x="7955280" y="4343400"/>
+            <a:ext cx="2194560" cy="868680"/>
+          </a:xfrm>
+          <a:prstGeom prst="rect">
+            <a:avLst/>
+          </a:prstGeom>
+          <a:solidFill>
+            <a:srgbClr val="1A1A1A"/>
+          </a:solidFill>
+          <a:ln>
+            <a:noFill/>
+          </a:ln>
+          <a:effectLst/>
+        </p:spPr>
+        <p:style>
+          <a:lnRef idx="1">
+            <a:schemeClr val="accent1"/>
+          </a:lnRef>
+          <a:fillRef idx="3">
+            <a:schemeClr val="accent1"/>
+          </a:fillRef>
+          <a:effectRef idx="2">
+            <a:schemeClr val="accent1"/>
+          </a:effectRef>
+          <a:fontRef idx="minor">
+            <a:schemeClr val="lt1"/>
+          </a:fontRef>
+        </p:style>
+        <p:txBody>
+          <a:bodyPr rtlCol="0" anchor="ctr"/>
+          <a:lstStyle/>
+          <a:p>
+            <a:pPr algn="ctr"/>
+          </a:p>
+        </p:txBody>
+      </p:sp>
+      <p:sp>
+        <p:nvSpPr>
+          <p:cNvPr id="19" name="TextBox 18"/>
+          <p:cNvSpPr txBox="1"/>
+          <p:nvPr/>
+        </p:nvSpPr>
+        <p:spPr>
+          <a:xfrm>
+            <a:off x="7955280" y="4471416"/>
+            <a:ext cx="2194560" cy="640080"/>
+          </a:xfrm>
+          <a:prstGeom prst="rect">
+            <a:avLst/>
+          </a:prstGeom>
+          <a:noFill/>
+        </p:spPr>
+        <p:txBody>
+          <a:bodyPr wrap="square" anchor="t">
+            <a:spAutoFit/>
+          </a:bodyPr>
+          <a:lstStyle/>
+          <a:p>
+            <a:pPr algn="ctr">
+              <a:spcBef>
+                <a:spcPts val="0"/>
               </a:spcBef>
               <a:spcAft>
                 <a:spcPts val="100"/>
               </a:spcAft>
             </a:pPr>
             <a:r>
-              <a:rPr sz="1500" b="1" i="0">
-                <a:solidFill>
-                  <a:srgbClr val="9C7A4A"/>
-                </a:solidFill>
-                <a:latin typeface="Helvetica Neue"/>
-              </a:rPr>
-              <a:t>Inès, 36 ans</a:t>
-            </a:r>
-          </a:p>
-          <a:p>
-            <a:pPr algn="l">
-              <a:spcBef>
-                <a:spcPts val="0"/>
-              </a:spcBef>
-              <a:spcAft>
-                <a:spcPts val="400"/>
-              </a:spcAft>
-            </a:pPr>
-            <a:r>
-              <a:rPr sz="1400" b="0" i="0">
-                <a:solidFill>
-                  <a:srgbClr val="444444"/>
-                </a:solidFill>
-                <a:latin typeface="Helvetica Neue"/>
-              </a:rPr>
-              <a:t>sensible au style : un vrai bijou, pas un gadget.</a:t>
+              <a:rPr sz="1400" b="1" i="0">
+                <a:solidFill>
+                  <a:srgbClr val="FFFFFF"/>
+                </a:solidFill>
+                <a:latin typeface="Helvetica Neue"/>
+              </a:rPr>
+              <a:t>SOM</a:t>
+            </a:r>
+          </a:p>
+          <a:p>
+            <a:pPr algn="ctr">
+              <a:spcBef>
+                <a:spcPts val="0"/>
+              </a:spcBef>
+              <a:spcAft>
+                <a:spcPts val="600"/>
+              </a:spcAft>
+            </a:pPr>
+            <a:r>
+              <a:rPr sz="1050" b="0" i="0">
+                <a:solidFill>
+                  <a:srgbClr val="F0E9DA"/>
+                </a:solidFill>
+                <a:latin typeface="Helvetica Neue"/>
+              </a:rPr>
+              <a:t>dizaines de milliers de clients</a:t>
+            </a:r>
+          </a:p>
+        </p:txBody>
+      </p:sp>
+      <p:sp>
+        <p:nvSpPr>
+          <p:cNvPr id="20" name="TextBox 19"/>
+          <p:cNvSpPr txBox="1"/>
+          <p:nvPr/>
+        </p:nvSpPr>
+        <p:spPr>
+          <a:xfrm>
+            <a:off x="6766560" y="5440680"/>
+            <a:ext cx="4572000" cy="365760"/>
+          </a:xfrm>
+          <a:prstGeom prst="rect">
+            <a:avLst/>
+          </a:prstGeom>
+          <a:noFill/>
+        </p:spPr>
+        <p:txBody>
+          <a:bodyPr wrap="square" anchor="t">
+            <a:spAutoFit/>
+          </a:bodyPr>
+          <a:lstStyle/>
+          <a:p>
+            <a:pPr algn="ctr">
+              <a:spcBef>
+                <a:spcPts val="0"/>
+              </a:spcBef>
+              <a:spcAft>
+                <a:spcPts val="600"/>
+              </a:spcAft>
+            </a:pPr>
+            <a:r>
+              <a:rPr sz="1050" b="0" i="1">
+                <a:solidFill>
+                  <a:srgbClr val="6F6F6F"/>
+                </a:solidFill>
+                <a:latin typeface="Helvetica Neue"/>
+              </a:rPr>
+              <a:t>Approche en entonnoir (dossier, partie 2)</a:t>
             </a:r>
           </a:p>
         </p:txBody>
@@ -4419,6 +6319,9 @@
   <p:clrMapOvr>
     <a:masterClrMapping/>
   </p:clrMapOvr>
+  <p:transition spd="med">
+    <p:fade/>
+  </p:transition>
 </p:sld>
 </file>
 
@@ -4613,8 +6516,8 @@
         </p:nvSpPr>
         <p:spPr>
           <a:xfrm>
-            <a:off x="10362895" y="457200"/>
-            <a:ext cx="1325880" cy="365760"/>
+            <a:off x="9082735" y="475488"/>
+            <a:ext cx="2606040" cy="365760"/>
           </a:xfrm>
           <a:prstGeom prst="rect">
             <a:avLst/>
@@ -4636,13 +6539,33 @@
               </a:spcAft>
             </a:pPr>
             <a:r>
-              <a:rPr sz="1300" b="1" i="0">
+              <a:rPr sz="1050" b="0" i="0">
                 <a:solidFill>
                   <a:srgbClr val="9C7A4A"/>
                 </a:solidFill>
                 <a:latin typeface="Helvetica Neue"/>
-              </a:rPr>
-              <a:t>04</a:t>
+                <a:hlinkClick r:id="rId3"/>
+              </a:rPr>
+              <a:t>jeca-site.vercel.app</a:t>
+            </a:r>
+          </a:p>
+          <a:p>
+            <a:pPr algn="r">
+              <a:spcBef>
+                <a:spcPts val="0"/>
+              </a:spcBef>
+              <a:spcAft>
+                <a:spcPts val="600"/>
+              </a:spcAft>
+            </a:pPr>
+            <a:r>
+              <a:rPr sz="1050" b="1" i="0">
+                <a:solidFill>
+                  <a:srgbClr val="6F6F6F"/>
+                </a:solidFill>
+                <a:latin typeface="Helvetica Neue"/>
+              </a:rPr>
+              <a:t>   04</a:t>
             </a:r>
           </a:p>
         </p:txBody>
@@ -4655,7 +6578,7 @@
         </p:nvSpPr>
         <p:spPr>
           <a:xfrm>
-            <a:off x="548640" y="1143000"/>
+            <a:off x="548640" y="1115568"/>
             <a:ext cx="10058400" cy="320040"/>
           </a:xfrm>
           <a:prstGeom prst="rect">
@@ -4684,7 +6607,7 @@
                 </a:solidFill>
                 <a:latin typeface="Helvetica Neue"/>
               </a:rPr>
-              <a:t>COMMENT — LA TECHNOLOGIE</a:t>
+              <a:t>POUR QUI — 3 PERSONAS</a:t>
             </a:r>
           </a:p>
         </p:txBody>
@@ -4697,7 +6620,7 @@
         </p:nvSpPr>
         <p:spPr>
           <a:xfrm>
-            <a:off x="566928" y="1481328"/>
+            <a:off x="566928" y="1463040"/>
             <a:ext cx="457200" cy="19050"/>
           </a:xfrm>
           <a:prstGeom prst="rect">
@@ -4735,21 +6658,21 @@
       </p:sp>
       <p:pic>
         <p:nvPicPr>
-          <p:cNvPr id="9" name="Picture 8" descr="i2.jpg"/>
+          <p:cNvPr id="9" name="Picture 8" descr="i1.jpg"/>
           <p:cNvPicPr>
             <a:picLocks noChangeAspect="1"/>
           </p:cNvPicPr>
           <p:nvPr/>
         </p:nvPicPr>
         <p:blipFill>
-          <a:blip r:embed="rId3"/>
+          <a:blip r:embed="rId4"/>
           <a:stretch>
             <a:fillRect/>
           </a:stretch>
         </p:blipFill>
         <p:spPr>
           <a:xfrm>
-            <a:off x="7071055" y="1874519"/>
+            <a:off x="548640" y="1874519"/>
             <a:ext cx="4572000" cy="4160520"/>
           </a:xfrm>
           <a:prstGeom prst="rect">
@@ -4765,8 +6688,8 @@
         </p:nvSpPr>
         <p:spPr>
           <a:xfrm>
-            <a:off x="640080" y="1828800"/>
-            <a:ext cx="5760720" cy="4297680"/>
+            <a:off x="5486400" y="1828800"/>
+            <a:ext cx="5760720" cy="4389120"/>
           </a:xfrm>
           <a:prstGeom prst="rect">
             <a:avLst/>
@@ -4788,13 +6711,13 @@
               </a:spcAft>
             </a:pPr>
             <a:r>
-              <a:rPr sz="3000" b="0" i="0">
+              <a:rPr sz="2900" b="0" i="0">
                 <a:solidFill>
                   <a:srgbClr val="1A1A1A"/>
                 </a:solidFill>
                 <a:latin typeface="Georgia"/>
               </a:rPr>
-              <a:t>Un GPS caché dans un vrai bijou</a:t>
+              <a:t>Trois profils, une même attente</a:t>
             </a:r>
           </a:p>
           <a:p>
@@ -4807,13 +6730,13 @@
               </a:spcAft>
             </a:pPr>
             <a:r>
-              <a:rPr sz="1500" b="1" i="0">
+              <a:rPr sz="1450" b="1" i="0">
                 <a:solidFill>
                   <a:srgbClr val="9C7A4A"/>
                 </a:solidFill>
                 <a:latin typeface="Helvetica Neue"/>
               </a:rPr>
-              <a:t>Géolocalisation</a:t>
+              <a:t>Sophie, 38 ans</a:t>
             </a:r>
           </a:p>
           <a:p>
@@ -4826,13 +6749,13 @@
               </a:spcAft>
             </a:pPr>
             <a:r>
-              <a:rPr sz="1400" b="0" i="0">
+              <a:rPr sz="1350" b="0" i="0">
                 <a:solidFill>
                   <a:srgbClr val="444444"/>
                 </a:solidFill>
                 <a:latin typeface="Helvetica Neue"/>
               </a:rPr>
-              <a:t>position en temps réel, précision 5 m, mise à jour 30 s.</a:t>
+              <a:t>mère active, deux enfants : savoir où ils sont sans culpabiliser de travailler.</a:t>
             </a:r>
           </a:p>
           <a:p>
@@ -4845,13 +6768,13 @@
               </a:spcAft>
             </a:pPr>
             <a:r>
-              <a:rPr sz="1500" b="1" i="0">
+              <a:rPr sz="1450" b="1" i="0">
                 <a:solidFill>
                   <a:srgbClr val="9C7A4A"/>
                 </a:solidFill>
                 <a:latin typeface="Helvetica Neue"/>
               </a:rPr>
-              <a:t>Bouton SOS</a:t>
+              <a:t>Karim, 42 ans</a:t>
             </a:r>
           </a:p>
           <a:p>
@@ -4864,13 +6787,13 @@
               </a:spcAft>
             </a:pPr>
             <a:r>
-              <a:rPr sz="1400" b="0" i="0">
+              <a:rPr sz="1350" b="0" i="0">
                 <a:solidFill>
                   <a:srgbClr val="444444"/>
                 </a:solidFill>
                 <a:latin typeface="Helvetica Neue"/>
               </a:rPr>
-              <a:t>l'enfant alerte ses parents d'une simple pression.</a:t>
+              <a:t>parent célibataire, mobile : pub Insta → avis → compare Weenect → achète le Bracelet Étoile → s'abonne à l'installation de l'app.</a:t>
             </a:r>
           </a:p>
           <a:p>
@@ -4883,13 +6806,13 @@
               </a:spcAft>
             </a:pPr>
             <a:r>
-              <a:rPr sz="1500" b="1" i="0">
+              <a:rPr sz="1450" b="1" i="0">
                 <a:solidFill>
                   <a:srgbClr val="9C7A4A"/>
                 </a:solidFill>
                 <a:latin typeface="Helvetica Neue"/>
               </a:rPr>
-              <a:t>Zones de sécurité</a:t>
+              <a:t>Inès, 36 ans</a:t>
             </a:r>
           </a:p>
           <a:p>
@@ -4902,51 +6825,13 @@
               </a:spcAft>
             </a:pPr>
             <a:r>
-              <a:rPr sz="1400" b="0" i="0">
+              <a:rPr sz="1350" b="0" i="0">
                 <a:solidFill>
                   <a:srgbClr val="444444"/>
                 </a:solidFill>
                 <a:latin typeface="Helvetica Neue"/>
               </a:rPr>
-              <a:t>alerte dès qu'il quitte l'école.</a:t>
-            </a:r>
-          </a:p>
-          <a:p>
-            <a:pPr algn="l">
-              <a:spcBef>
-                <a:spcPts val="600"/>
-              </a:spcBef>
-              <a:spcAft>
-                <a:spcPts val="100"/>
-              </a:spcAft>
-            </a:pPr>
-            <a:r>
-              <a:rPr sz="1500" b="1" i="0">
-                <a:solidFill>
-                  <a:srgbClr val="9C7A4A"/>
-                </a:solidFill>
-                <a:latin typeface="Helvetica Neue"/>
-              </a:rPr>
-              <a:t>Données en France</a:t>
-            </a:r>
-          </a:p>
-          <a:p>
-            <a:pPr algn="l">
-              <a:spcBef>
-                <a:spcPts val="0"/>
-              </a:spcBef>
-              <a:spcAft>
-                <a:spcPts val="400"/>
-              </a:spcAft>
-            </a:pPr>
-            <a:r>
-              <a:rPr sz="1400" b="0" i="0">
-                <a:solidFill>
-                  <a:srgbClr val="444444"/>
-                </a:solidFill>
-                <a:latin typeface="Helvetica Neue"/>
-              </a:rPr>
-              <a:t>conçu, assemblé et hébergé en France — RGPD.</a:t>
+              <a:t>sensible au style : refuse les montres « gadget », choisit le Collier JECA Lune en or.</a:t>
             </a:r>
           </a:p>
         </p:txBody>
@@ -4956,6 +6841,9 @@
   <p:clrMapOvr>
     <a:masterClrMapping/>
   </p:clrMapOvr>
+  <p:transition spd="med">
+    <p:fade/>
+  </p:transition>
 </p:sld>
 </file>
 
@@ -5150,8 +7038,8 @@
         </p:nvSpPr>
         <p:spPr>
           <a:xfrm>
-            <a:off x="10362895" y="457200"/>
-            <a:ext cx="1325880" cy="365760"/>
+            <a:off x="9082735" y="475488"/>
+            <a:ext cx="2606040" cy="365760"/>
           </a:xfrm>
           <a:prstGeom prst="rect">
             <a:avLst/>
@@ -5173,13 +7061,33 @@
               </a:spcAft>
             </a:pPr>
             <a:r>
-              <a:rPr sz="1300" b="1" i="0">
+              <a:rPr sz="1050" b="0" i="0">
                 <a:solidFill>
                   <a:srgbClr val="9C7A4A"/>
                 </a:solidFill>
                 <a:latin typeface="Helvetica Neue"/>
-              </a:rPr>
-              <a:t>05</a:t>
+                <a:hlinkClick r:id="rId3"/>
+              </a:rPr>
+              <a:t>jeca-site.vercel.app</a:t>
+            </a:r>
+          </a:p>
+          <a:p>
+            <a:pPr algn="r">
+              <a:spcBef>
+                <a:spcPts val="0"/>
+              </a:spcBef>
+              <a:spcAft>
+                <a:spcPts val="600"/>
+              </a:spcAft>
+            </a:pPr>
+            <a:r>
+              <a:rPr sz="1050" b="1" i="0">
+                <a:solidFill>
+                  <a:srgbClr val="6F6F6F"/>
+                </a:solidFill>
+                <a:latin typeface="Helvetica Neue"/>
+              </a:rPr>
+              <a:t>   05</a:t>
             </a:r>
           </a:p>
         </p:txBody>
@@ -5192,7 +7100,7 @@
         </p:nvSpPr>
         <p:spPr>
           <a:xfrm>
-            <a:off x="548640" y="1143000"/>
+            <a:off x="548640" y="1115568"/>
             <a:ext cx="10058400" cy="320040"/>
           </a:xfrm>
           <a:prstGeom prst="rect">
@@ -5221,7 +7129,7 @@
                 </a:solidFill>
                 <a:latin typeface="Helvetica Neue"/>
               </a:rPr>
-              <a:t>DIAGNOSTIC — SWOT</a:t>
+              <a:t>COMMENT — LA TECHNOLOGIE</a:t>
             </a:r>
           </a:p>
         </p:txBody>
@@ -5234,7 +7142,7 @@
         </p:nvSpPr>
         <p:spPr>
           <a:xfrm>
-            <a:off x="566928" y="1481328"/>
+            <a:off x="566928" y="1463040"/>
             <a:ext cx="457200" cy="19050"/>
           </a:xfrm>
           <a:prstGeom prst="rect">
@@ -5270,52 +7178,30 @@
           </a:p>
         </p:txBody>
       </p:sp>
-      <p:sp>
-        <p:nvSpPr>
-          <p:cNvPr id="9" name="Rectangle 8"/>
-          <p:cNvSpPr/>
-          <p:nvPr/>
-        </p:nvSpPr>
-        <p:spPr>
-          <a:xfrm>
-            <a:off x="640080" y="1828800"/>
-            <a:ext cx="5257800" cy="2148840"/>
-          </a:xfrm>
-          <a:prstGeom prst="rect">
-            <a:avLst/>
-          </a:prstGeom>
-          <a:solidFill>
-            <a:srgbClr val="F3EFE8"/>
-          </a:solidFill>
-          <a:ln w="12700">
-            <a:solidFill>
-              <a:srgbClr val="E7E1D6"/>
-            </a:solidFill>
-          </a:ln>
-          <a:effectLst/>
-        </p:spPr>
-        <p:style>
-          <a:lnRef idx="1">
-            <a:schemeClr val="accent1"/>
-          </a:lnRef>
-          <a:fillRef idx="3">
-            <a:schemeClr val="accent1"/>
-          </a:fillRef>
-          <a:effectRef idx="2">
-            <a:schemeClr val="accent1"/>
-          </a:effectRef>
-          <a:fontRef idx="minor">
-            <a:schemeClr val="lt1"/>
-          </a:fontRef>
-        </p:style>
-        <p:txBody>
-          <a:bodyPr rtlCol="0" anchor="ctr"/>
-          <a:lstStyle/>
-          <a:p>
-            <a:pPr algn="ctr"/>
-          </a:p>
-        </p:txBody>
-      </p:sp>
+      <p:pic>
+        <p:nvPicPr>
+          <p:cNvPr id="9" name="Picture 8" descr="i2.jpg"/>
+          <p:cNvPicPr>
+            <a:picLocks noChangeAspect="1"/>
+          </p:cNvPicPr>
+          <p:nvPr/>
+        </p:nvPicPr>
+        <p:blipFill>
+          <a:blip r:embed="rId4"/>
+          <a:stretch>
+            <a:fillRect/>
+          </a:stretch>
+        </p:blipFill>
+        <p:spPr>
+          <a:xfrm>
+            <a:off x="7071055" y="1874519"/>
+            <a:ext cx="4572000" cy="4160520"/>
+          </a:xfrm>
+          <a:prstGeom prst="rect">
+            <a:avLst/>
+          </a:prstGeom>
+        </p:spPr>
+      </p:pic>
       <p:sp>
         <p:nvSpPr>
           <p:cNvPr id="10" name="TextBox 9"/>
@@ -5324,8 +7210,8 @@
         </p:nvSpPr>
         <p:spPr>
           <a:xfrm>
-            <a:off x="868680" y="1993392"/>
-            <a:ext cx="4800600" cy="1874520"/>
+            <a:off x="640080" y="1828800"/>
+            <a:ext cx="5760720" cy="4389120"/>
           </a:xfrm>
           <a:prstGeom prst="rect">
             <a:avLst/>
@@ -5343,17 +7229,36 @@
                 <a:spcPts val="0"/>
               </a:spcBef>
               <a:spcAft>
-                <a:spcPts val="800"/>
-              </a:spcAft>
-            </a:pPr>
-            <a:r>
-              <a:rPr sz="1700" b="1" i="0">
+                <a:spcPts val="1200"/>
+              </a:spcAft>
+            </a:pPr>
+            <a:r>
+              <a:rPr sz="2900" b="0" i="0">
+                <a:solidFill>
+                  <a:srgbClr val="1A1A1A"/>
+                </a:solidFill>
+                <a:latin typeface="Georgia"/>
+              </a:rPr>
+              <a:t>Un GPS invisible dans un vrai bijou</a:t>
+            </a:r>
+          </a:p>
+          <a:p>
+            <a:pPr algn="l">
+              <a:spcBef>
+                <a:spcPts val="600"/>
+              </a:spcBef>
+              <a:spcAft>
+                <a:spcPts val="100"/>
+              </a:spcAft>
+            </a:pPr>
+            <a:r>
+              <a:rPr sz="1450" b="1" i="0">
                 <a:solidFill>
                   <a:srgbClr val="9C7A4A"/>
                 </a:solidFill>
                 <a:latin typeface="Helvetica Neue"/>
               </a:rPr>
-              <a:t>Forces</a:t>
+              <a:t>GPS temps réel + SOS</a:t>
             </a:r>
           </a:p>
           <a:p>
@@ -5366,13 +7271,32 @@
               </a:spcAft>
             </a:pPr>
             <a:r>
-              <a:rPr sz="1250" b="0" i="0">
-                <a:solidFill>
-                  <a:srgbClr val="1A1A1A"/>
-                </a:solidFill>
-                <a:latin typeface="Helvetica Neue"/>
-              </a:rPr>
-              <a:t>·  Bijou + GPS réunis</a:t>
+              <a:rPr sz="1350" b="0" i="0">
+                <a:solidFill>
+                  <a:srgbClr val="444444"/>
+                </a:solidFill>
+                <a:latin typeface="Helvetica Neue"/>
+              </a:rPr>
+              <a:t>module miniaturisé dans le fermoir de sécurité ; bouton SOS qui alerte les parents.</a:t>
+            </a:r>
+          </a:p>
+          <a:p>
+            <a:pPr algn="l">
+              <a:spcBef>
+                <a:spcPts val="600"/>
+              </a:spcBef>
+              <a:spcAft>
+                <a:spcPts val="100"/>
+              </a:spcAft>
+            </a:pPr>
+            <a:r>
+              <a:rPr sz="1450" b="1" i="0">
+                <a:solidFill>
+                  <a:srgbClr val="9C7A4A"/>
+                </a:solidFill>
+                <a:latin typeface="Helvetica Neue"/>
+              </a:rPr>
+              <a:t>Pensé pour l'enfant</a:t>
             </a:r>
           </a:p>
           <a:p>
@@ -5385,13 +7309,32 @@
               </a:spcAft>
             </a:pPr>
             <a:r>
-              <a:rPr sz="1250" b="0" i="0">
-                <a:solidFill>
-                  <a:srgbClr val="1A1A1A"/>
-                </a:solidFill>
-                <a:latin typeface="Helvetica Neue"/>
-              </a:rPr>
-              <a:t>·  Données 100% France</a:t>
+              <a:rPr sz="1350" b="0" i="0">
+                <a:solidFill>
+                  <a:srgbClr val="444444"/>
+                </a:solidFill>
+                <a:latin typeface="Helvetica Neue"/>
+              </a:rPr>
+              <a:t>fermoir magnétique anti-étranglement (collier), étanche IP67, hypoallergénique.</a:t>
+            </a:r>
+          </a:p>
+          <a:p>
+            <a:pPr algn="l">
+              <a:spcBef>
+                <a:spcPts val="600"/>
+              </a:spcBef>
+              <a:spcAft>
+                <a:spcPts val="100"/>
+              </a:spcAft>
+            </a:pPr>
+            <a:r>
+              <a:rPr sz="1450" b="1" i="0">
+                <a:solidFill>
+                  <a:srgbClr val="9C7A4A"/>
+                </a:solidFill>
+                <a:latin typeface="Helvetica Neue"/>
+              </a:rPr>
+              <a:t>Autonomie</a:t>
             </a:r>
           </a:p>
           <a:p>
@@ -5404,101 +7347,32 @@
               </a:spcAft>
             </a:pPr>
             <a:r>
-              <a:rPr sz="1250" b="0" i="0">
-                <a:solidFill>
-                  <a:srgbClr val="1A1A1A"/>
-                </a:solidFill>
-                <a:latin typeface="Helvetica Neue"/>
-              </a:rPr>
-              <a:t>·  Revenu récurrent (abonnement)</a:t>
-            </a:r>
-          </a:p>
-        </p:txBody>
-      </p:sp>
-      <p:sp>
-        <p:nvSpPr>
-          <p:cNvPr id="11" name="Rectangle 10"/>
-          <p:cNvSpPr/>
-          <p:nvPr/>
-        </p:nvSpPr>
-        <p:spPr>
-          <a:xfrm>
-            <a:off x="6263640" y="1828800"/>
-            <a:ext cx="5257800" cy="2148840"/>
-          </a:xfrm>
-          <a:prstGeom prst="rect">
-            <a:avLst/>
-          </a:prstGeom>
-          <a:solidFill>
-            <a:srgbClr val="F3EFE8"/>
-          </a:solidFill>
-          <a:ln w="12700">
-            <a:solidFill>
-              <a:srgbClr val="E7E1D6"/>
-            </a:solidFill>
-          </a:ln>
-          <a:effectLst/>
-        </p:spPr>
-        <p:style>
-          <a:lnRef idx="1">
-            <a:schemeClr val="accent1"/>
-          </a:lnRef>
-          <a:fillRef idx="3">
-            <a:schemeClr val="accent1"/>
-          </a:fillRef>
-          <a:effectRef idx="2">
-            <a:schemeClr val="accent1"/>
-          </a:effectRef>
-          <a:fontRef idx="minor">
-            <a:schemeClr val="lt1"/>
-          </a:fontRef>
-        </p:style>
-        <p:txBody>
-          <a:bodyPr rtlCol="0" anchor="ctr"/>
-          <a:lstStyle/>
-          <a:p>
-            <a:pPr algn="ctr"/>
-          </a:p>
-        </p:txBody>
-      </p:sp>
-      <p:sp>
-        <p:nvSpPr>
-          <p:cNvPr id="12" name="TextBox 11"/>
-          <p:cNvSpPr txBox="1"/>
-          <p:nvPr/>
-        </p:nvSpPr>
-        <p:spPr>
-          <a:xfrm>
-            <a:off x="6492240" y="1993392"/>
-            <a:ext cx="4800600" cy="1874520"/>
-          </a:xfrm>
-          <a:prstGeom prst="rect">
-            <a:avLst/>
-          </a:prstGeom>
-          <a:noFill/>
-        </p:spPr>
-        <p:txBody>
-          <a:bodyPr wrap="square" anchor="t">
-            <a:spAutoFit/>
-          </a:bodyPr>
-          <a:lstStyle/>
-          <a:p>
-            <a:pPr algn="l">
-              <a:spcBef>
-                <a:spcPts val="0"/>
-              </a:spcBef>
-              <a:spcAft>
-                <a:spcPts val="800"/>
-              </a:spcAft>
-            </a:pPr>
-            <a:r>
-              <a:rPr sz="1700" b="1" i="0">
+              <a:rPr sz="1350" b="0" i="0">
+                <a:solidFill>
+                  <a:srgbClr val="444444"/>
+                </a:solidFill>
+                <a:latin typeface="Helvetica Neue"/>
+              </a:rPr>
+              <a:t>48 à 72 h (bracelet), jusqu'à 4 jours (collier) ; charge magnétique.</a:t>
+            </a:r>
+          </a:p>
+          <a:p>
+            <a:pPr algn="l">
+              <a:spcBef>
+                <a:spcPts val="600"/>
+              </a:spcBef>
+              <a:spcAft>
+                <a:spcPts val="100"/>
+              </a:spcAft>
+            </a:pPr>
+            <a:r>
+              <a:rPr sz="1450" b="1" i="0">
                 <a:solidFill>
                   <a:srgbClr val="9C7A4A"/>
                 </a:solidFill>
                 <a:latin typeface="Helvetica Neue"/>
               </a:rPr>
-              <a:t>Opportunités</a:t>
+              <a:t>Données en France</a:t>
             </a:r>
           </a:p>
           <a:p>
@@ -5511,341 +7385,13 @@
               </a:spcAft>
             </a:pPr>
             <a:r>
-              <a:rPr sz="1250" b="0" i="0">
-                <a:solidFill>
-                  <a:srgbClr val="1A1A1A"/>
-                </a:solidFill>
-                <a:latin typeface="Helvetica Neue"/>
-              </a:rPr>
-              <a:t>·  Marché wearables +12 %/an</a:t>
-            </a:r>
-          </a:p>
-          <a:p>
-            <a:pPr algn="l">
-              <a:spcBef>
-                <a:spcPts val="0"/>
-              </a:spcBef>
-              <a:spcAft>
-                <a:spcPts val="400"/>
-              </a:spcAft>
-            </a:pPr>
-            <a:r>
-              <a:rPr sz="1250" b="0" i="0">
-                <a:solidFill>
-                  <a:srgbClr val="1A1A1A"/>
-                </a:solidFill>
-                <a:latin typeface="Helvetica Neue"/>
-              </a:rPr>
-              <a:t>·  Souveraineté des données</a:t>
-            </a:r>
-          </a:p>
-          <a:p>
-            <a:pPr algn="l">
-              <a:spcBef>
-                <a:spcPts val="0"/>
-              </a:spcBef>
-              <a:spcAft>
-                <a:spcPts val="400"/>
-              </a:spcAft>
-            </a:pPr>
-            <a:r>
-              <a:rPr sz="1250" b="0" i="0">
-                <a:solidFill>
-                  <a:srgbClr val="1A1A1A"/>
-                </a:solidFill>
-                <a:latin typeface="Helvetica Neue"/>
-              </a:rPr>
-              <a:t>·  Cadeau (anniv, rentrée, Noël)</a:t>
-            </a:r>
-          </a:p>
-        </p:txBody>
-      </p:sp>
-      <p:sp>
-        <p:nvSpPr>
-          <p:cNvPr id="13" name="Rectangle 12"/>
-          <p:cNvSpPr/>
-          <p:nvPr/>
-        </p:nvSpPr>
-        <p:spPr>
-          <a:xfrm>
-            <a:off x="640080" y="4114800"/>
-            <a:ext cx="5257800" cy="2148840"/>
-          </a:xfrm>
-          <a:prstGeom prst="rect">
-            <a:avLst/>
-          </a:prstGeom>
-          <a:solidFill>
-            <a:srgbClr val="FFFFFF"/>
-          </a:solidFill>
-          <a:ln w="12700">
-            <a:solidFill>
-              <a:srgbClr val="E7E1D6"/>
-            </a:solidFill>
-          </a:ln>
-          <a:effectLst/>
-        </p:spPr>
-        <p:style>
-          <a:lnRef idx="1">
-            <a:schemeClr val="accent1"/>
-          </a:lnRef>
-          <a:fillRef idx="3">
-            <a:schemeClr val="accent1"/>
-          </a:fillRef>
-          <a:effectRef idx="2">
-            <a:schemeClr val="accent1"/>
-          </a:effectRef>
-          <a:fontRef idx="minor">
-            <a:schemeClr val="lt1"/>
-          </a:fontRef>
-        </p:style>
-        <p:txBody>
-          <a:bodyPr rtlCol="0" anchor="ctr"/>
-          <a:lstStyle/>
-          <a:p>
-            <a:pPr algn="ctr"/>
-          </a:p>
-        </p:txBody>
-      </p:sp>
-      <p:sp>
-        <p:nvSpPr>
-          <p:cNvPr id="14" name="TextBox 13"/>
-          <p:cNvSpPr txBox="1"/>
-          <p:nvPr/>
-        </p:nvSpPr>
-        <p:spPr>
-          <a:xfrm>
-            <a:off x="868680" y="4279392"/>
-            <a:ext cx="4800600" cy="1874520"/>
-          </a:xfrm>
-          <a:prstGeom prst="rect">
-            <a:avLst/>
-          </a:prstGeom>
-          <a:noFill/>
-        </p:spPr>
-        <p:txBody>
-          <a:bodyPr wrap="square" anchor="t">
-            <a:spAutoFit/>
-          </a:bodyPr>
-          <a:lstStyle/>
-          <a:p>
-            <a:pPr algn="l">
-              <a:spcBef>
-                <a:spcPts val="0"/>
-              </a:spcBef>
-              <a:spcAft>
-                <a:spcPts val="800"/>
-              </a:spcAft>
-            </a:pPr>
-            <a:r>
-              <a:rPr sz="1700" b="1" i="0">
-                <a:solidFill>
-                  <a:srgbClr val="9C7A4A"/>
-                </a:solidFill>
-                <a:latin typeface="Helvetica Neue"/>
-              </a:rPr>
-              <a:t>Faiblesses</a:t>
-            </a:r>
-          </a:p>
-          <a:p>
-            <a:pPr algn="l">
-              <a:spcBef>
-                <a:spcPts val="0"/>
-              </a:spcBef>
-              <a:spcAft>
-                <a:spcPts val="400"/>
-              </a:spcAft>
-            </a:pPr>
-            <a:r>
-              <a:rPr sz="1250" b="0" i="0">
-                <a:solidFill>
-                  <a:srgbClr val="1A1A1A"/>
-                </a:solidFill>
-                <a:latin typeface="Helvetica Neue"/>
-              </a:rPr>
-              <a:t>·  Marque nouvelle à faire connaître</a:t>
-            </a:r>
-          </a:p>
-          <a:p>
-            <a:pPr algn="l">
-              <a:spcBef>
-                <a:spcPts val="0"/>
-              </a:spcBef>
-              <a:spcAft>
-                <a:spcPts val="400"/>
-              </a:spcAft>
-            </a:pPr>
-            <a:r>
-              <a:rPr sz="1250" b="0" i="0">
-                <a:solidFill>
-                  <a:srgbClr val="1A1A1A"/>
-                </a:solidFill>
-                <a:latin typeface="Helvetica Neue"/>
-              </a:rPr>
-              <a:t>·  Coût d'acquisition à maîtriser</a:t>
-            </a:r>
-          </a:p>
-          <a:p>
-            <a:pPr algn="l">
-              <a:spcBef>
-                <a:spcPts val="0"/>
-              </a:spcBef>
-              <a:spcAft>
-                <a:spcPts val="400"/>
-              </a:spcAft>
-            </a:pPr>
-            <a:r>
-              <a:rPr sz="1250" b="0" i="0">
-                <a:solidFill>
-                  <a:srgbClr val="1A1A1A"/>
-                </a:solidFill>
-                <a:latin typeface="Helvetica Neue"/>
-              </a:rPr>
-              <a:t>·  Prix bijou + abonnement</a:t>
-            </a:r>
-          </a:p>
-        </p:txBody>
-      </p:sp>
-      <p:sp>
-        <p:nvSpPr>
-          <p:cNvPr id="15" name="Rectangle 14"/>
-          <p:cNvSpPr/>
-          <p:nvPr/>
-        </p:nvSpPr>
-        <p:spPr>
-          <a:xfrm>
-            <a:off x="6263640" y="4114800"/>
-            <a:ext cx="5257800" cy="2148840"/>
-          </a:xfrm>
-          <a:prstGeom prst="rect">
-            <a:avLst/>
-          </a:prstGeom>
-          <a:solidFill>
-            <a:srgbClr val="FFFFFF"/>
-          </a:solidFill>
-          <a:ln w="12700">
-            <a:solidFill>
-              <a:srgbClr val="E7E1D6"/>
-            </a:solidFill>
-          </a:ln>
-          <a:effectLst/>
-        </p:spPr>
-        <p:style>
-          <a:lnRef idx="1">
-            <a:schemeClr val="accent1"/>
-          </a:lnRef>
-          <a:fillRef idx="3">
-            <a:schemeClr val="accent1"/>
-          </a:fillRef>
-          <a:effectRef idx="2">
-            <a:schemeClr val="accent1"/>
-          </a:effectRef>
-          <a:fontRef idx="minor">
-            <a:schemeClr val="lt1"/>
-          </a:fontRef>
-        </p:style>
-        <p:txBody>
-          <a:bodyPr rtlCol="0" anchor="ctr"/>
-          <a:lstStyle/>
-          <a:p>
-            <a:pPr algn="ctr"/>
-          </a:p>
-        </p:txBody>
-      </p:sp>
-      <p:sp>
-        <p:nvSpPr>
-          <p:cNvPr id="16" name="TextBox 15"/>
-          <p:cNvSpPr txBox="1"/>
-          <p:nvPr/>
-        </p:nvSpPr>
-        <p:spPr>
-          <a:xfrm>
-            <a:off x="6492240" y="4279392"/>
-            <a:ext cx="4800600" cy="1874520"/>
-          </a:xfrm>
-          <a:prstGeom prst="rect">
-            <a:avLst/>
-          </a:prstGeom>
-          <a:noFill/>
-        </p:spPr>
-        <p:txBody>
-          <a:bodyPr wrap="square" anchor="t">
-            <a:spAutoFit/>
-          </a:bodyPr>
-          <a:lstStyle/>
-          <a:p>
-            <a:pPr algn="l">
-              <a:spcBef>
-                <a:spcPts val="0"/>
-              </a:spcBef>
-              <a:spcAft>
-                <a:spcPts val="800"/>
-              </a:spcAft>
-            </a:pPr>
-            <a:r>
-              <a:rPr sz="1700" b="1" i="0">
-                <a:solidFill>
-                  <a:srgbClr val="9C7A4A"/>
-                </a:solidFill>
-                <a:latin typeface="Helvetica Neue"/>
-              </a:rPr>
-              <a:t>Menaces</a:t>
-            </a:r>
-          </a:p>
-          <a:p>
-            <a:pPr algn="l">
-              <a:spcBef>
-                <a:spcPts val="0"/>
-              </a:spcBef>
-              <a:spcAft>
-                <a:spcPts val="400"/>
-              </a:spcAft>
-            </a:pPr>
-            <a:r>
-              <a:rPr sz="1250" b="0" i="0">
-                <a:solidFill>
-                  <a:srgbClr val="1A1A1A"/>
-                </a:solidFill>
-                <a:latin typeface="Helvetica Neue"/>
-              </a:rPr>
-              <a:t>·  Weenect · Xplora · AngelSense</a:t>
-            </a:r>
-          </a:p>
-          <a:p>
-            <a:pPr algn="l">
-              <a:spcBef>
-                <a:spcPts val="0"/>
-              </a:spcBef>
-              <a:spcAft>
-                <a:spcPts val="400"/>
-              </a:spcAft>
-            </a:pPr>
-            <a:r>
-              <a:rPr sz="1250" b="0" i="0">
-                <a:solidFill>
-                  <a:srgbClr val="1A1A1A"/>
-                </a:solidFill>
-                <a:latin typeface="Helvetica Neue"/>
-              </a:rPr>
-              <a:t>·  Géants tech (AirTag détourné)</a:t>
-            </a:r>
-          </a:p>
-          <a:p>
-            <a:pPr algn="l">
-              <a:spcBef>
-                <a:spcPts val="0"/>
-              </a:spcBef>
-              <a:spcAft>
-                <a:spcPts val="400"/>
-              </a:spcAft>
-            </a:pPr>
-            <a:r>
-              <a:rPr sz="1250" b="0" i="0">
-                <a:solidFill>
-                  <a:srgbClr val="1A1A1A"/>
-                </a:solidFill>
-                <a:latin typeface="Helvetica Neue"/>
-              </a:rPr>
-              <a:t>·  Sensibilité RGPD / vie privée</a:t>
+              <a:rPr sz="1350" b="0" i="0">
+                <a:solidFill>
+                  <a:srgbClr val="444444"/>
+                </a:solidFill>
+                <a:latin typeface="Helvetica Neue"/>
+              </a:rPr>
+              <a:t>zones de sécurité, hébergement &amp; RGPD — la confiance n'est pas négociable.</a:t>
             </a:r>
           </a:p>
         </p:txBody>
@@ -5855,6 +7401,9 @@
   <p:clrMapOvr>
     <a:masterClrMapping/>
   </p:clrMapOvr>
+  <p:transition spd="med">
+    <p:fade/>
+  </p:transition>
 </p:sld>
 </file>
 
@@ -6049,8 +7598,8 @@
         </p:nvSpPr>
         <p:spPr>
           <a:xfrm>
-            <a:off x="10362895" y="457200"/>
-            <a:ext cx="1325880" cy="365760"/>
+            <a:off x="9082735" y="475488"/>
+            <a:ext cx="2606040" cy="365760"/>
           </a:xfrm>
           <a:prstGeom prst="rect">
             <a:avLst/>
@@ -6072,13 +7621,33 @@
               </a:spcAft>
             </a:pPr>
             <a:r>
-              <a:rPr sz="1300" b="1" i="0">
+              <a:rPr sz="1050" b="0" i="0">
                 <a:solidFill>
                   <a:srgbClr val="9C7A4A"/>
                 </a:solidFill>
                 <a:latin typeface="Helvetica Neue"/>
-              </a:rPr>
-              <a:t>06</a:t>
+                <a:hlinkClick r:id="rId3"/>
+              </a:rPr>
+              <a:t>jeca-site.vercel.app</a:t>
+            </a:r>
+          </a:p>
+          <a:p>
+            <a:pPr algn="r">
+              <a:spcBef>
+                <a:spcPts val="0"/>
+              </a:spcBef>
+              <a:spcAft>
+                <a:spcPts val="600"/>
+              </a:spcAft>
+            </a:pPr>
+            <a:r>
+              <a:rPr sz="1050" b="1" i="0">
+                <a:solidFill>
+                  <a:srgbClr val="6F6F6F"/>
+                </a:solidFill>
+                <a:latin typeface="Helvetica Neue"/>
+              </a:rPr>
+              <a:t>   06</a:t>
             </a:r>
           </a:p>
         </p:txBody>
@@ -6091,7 +7660,7 @@
         </p:nvSpPr>
         <p:spPr>
           <a:xfrm>
-            <a:off x="548640" y="1143000"/>
+            <a:off x="548640" y="1115568"/>
             <a:ext cx="10058400" cy="320040"/>
           </a:xfrm>
           <a:prstGeom prst="rect">
@@ -6120,7 +7689,7 @@
                 </a:solidFill>
                 <a:latin typeface="Helvetica Neue"/>
               </a:rPr>
-              <a:t>CONSTRUCTION E-COMMERCE</a:t>
+              <a:t>DIAGNOSTIC — SWOT</a:t>
             </a:r>
           </a:p>
         </p:txBody>
@@ -6133,7 +7702,7 @@
         </p:nvSpPr>
         <p:spPr>
           <a:xfrm>
-            <a:off x="566928" y="1481328"/>
+            <a:off x="566928" y="1463040"/>
             <a:ext cx="457200" cy="19050"/>
           </a:xfrm>
           <a:prstGeom prst="rect">
@@ -6178,7 +7747,7 @@
         <p:spPr>
           <a:xfrm>
             <a:off x="640080" y="1783080"/>
-            <a:ext cx="5760720" cy="731520"/>
+            <a:ext cx="10058400" cy="548640"/>
           </a:xfrm>
           <a:prstGeom prst="rect">
             <a:avLst/>
@@ -6200,235 +7769,38 @@
               </a:spcAft>
             </a:pPr>
             <a:r>
-              <a:rPr sz="3000" b="0" i="0">
+              <a:rPr sz="2400" b="0" i="0">
                 <a:solidFill>
                   <a:srgbClr val="1A1A1A"/>
                 </a:solidFill>
                 <a:latin typeface="Georgia"/>
               </a:rPr>
-              <a:t>Notre boutique, en ligne</a:t>
-            </a:r>
-          </a:p>
-        </p:txBody>
-      </p:sp>
-      <p:sp>
-        <p:nvSpPr>
-          <p:cNvPr id="10" name="TextBox 9"/>
-          <p:cNvSpPr txBox="1"/>
+              <a:t>Forces, faiblesses, opportunités, menaces</a:t>
+            </a:r>
+          </a:p>
+        </p:txBody>
+      </p:sp>
+      <p:sp>
+        <p:nvSpPr>
+          <p:cNvPr id="10" name="Rectangle 9"/>
+          <p:cNvSpPr/>
           <p:nvPr/>
         </p:nvSpPr>
         <p:spPr>
           <a:xfrm>
             <a:off x="640080" y="2514600"/>
-            <a:ext cx="5669280" cy="3291840"/>
-          </a:xfrm>
-          <a:prstGeom prst="rect">
-            <a:avLst/>
-          </a:prstGeom>
-          <a:noFill/>
-        </p:spPr>
-        <p:txBody>
-          <a:bodyPr wrap="square" anchor="t">
-            <a:spAutoFit/>
-          </a:bodyPr>
-          <a:lstStyle/>
-          <a:p>
-            <a:pPr algn="l">
-              <a:spcBef>
-                <a:spcPts val="700"/>
-              </a:spcBef>
-              <a:spcAft>
-                <a:spcPts val="100"/>
-              </a:spcAft>
-            </a:pPr>
-            <a:r>
-              <a:rPr sz="1500" b="1" i="0">
-                <a:solidFill>
-                  <a:srgbClr val="9C7A4A"/>
-                </a:solidFill>
-                <a:latin typeface="Helvetica Neue"/>
-              </a:rPr>
-              <a:t>Plateforme</a:t>
-            </a:r>
-          </a:p>
-          <a:p>
-            <a:pPr algn="l">
-              <a:spcBef>
-                <a:spcPts val="0"/>
-              </a:spcBef>
-              <a:spcAft>
-                <a:spcPts val="300"/>
-              </a:spcAft>
-            </a:pPr>
-            <a:r>
-              <a:rPr sz="1350" b="0" i="0">
-                <a:solidFill>
-                  <a:srgbClr val="444444"/>
-                </a:solidFill>
-                <a:latin typeface="Helvetica Neue"/>
-              </a:rPr>
-              <a:t>site codé sur-mesure (HTML/CSS/JS), 14 pages, déployé sur Vercel, hébergé en France.</a:t>
-            </a:r>
-          </a:p>
-          <a:p>
-            <a:pPr algn="l">
-              <a:spcBef>
-                <a:spcPts val="700"/>
-              </a:spcBef>
-              <a:spcAft>
-                <a:spcPts val="100"/>
-              </a:spcAft>
-            </a:pPr>
-            <a:r>
-              <a:rPr sz="1500" b="1" i="0">
-                <a:solidFill>
-                  <a:srgbClr val="9C7A4A"/>
-                </a:solidFill>
-                <a:latin typeface="Helvetica Neue"/>
-              </a:rPr>
-              <a:t>Paiement</a:t>
-            </a:r>
-          </a:p>
-          <a:p>
-            <a:pPr algn="l">
-              <a:spcBef>
-                <a:spcPts val="0"/>
-              </a:spcBef>
-              <a:spcAft>
-                <a:spcPts val="300"/>
-              </a:spcAft>
-            </a:pPr>
-            <a:r>
-              <a:rPr sz="1350" b="0" i="0">
-                <a:solidFill>
-                  <a:srgbClr val="444444"/>
-                </a:solidFill>
-                <a:latin typeface="Helvetica Neue"/>
-              </a:rPr>
-              <a:t>Stripe sécurisé, CB + paiement 3× sans frais, HTTPS.</a:t>
-            </a:r>
-          </a:p>
-          <a:p>
-            <a:pPr algn="l">
-              <a:spcBef>
-                <a:spcPts val="700"/>
-              </a:spcBef>
-              <a:spcAft>
-                <a:spcPts val="100"/>
-              </a:spcAft>
-            </a:pPr>
-            <a:r>
-              <a:rPr sz="1500" b="1" i="0">
-                <a:solidFill>
-                  <a:srgbClr val="9C7A4A"/>
-                </a:solidFill>
-                <a:latin typeface="Helvetica Neue"/>
-              </a:rPr>
-              <a:t>Livraison</a:t>
-            </a:r>
-          </a:p>
-          <a:p>
-            <a:pPr algn="l">
-              <a:spcBef>
-                <a:spcPts val="0"/>
-              </a:spcBef>
-              <a:spcAft>
-                <a:spcPts val="300"/>
-              </a:spcAft>
-            </a:pPr>
-            <a:r>
-              <a:rPr sz="1350" b="0" i="0">
-                <a:solidFill>
-                  <a:srgbClr val="444444"/>
-                </a:solidFill>
-                <a:latin typeface="Helvetica Neue"/>
-              </a:rPr>
-              <a:t>72 h, offerte dès 79 €, suivi du colis.</a:t>
-            </a:r>
-          </a:p>
-          <a:p>
-            <a:pPr algn="l">
-              <a:spcBef>
-                <a:spcPts val="700"/>
-              </a:spcBef>
-              <a:spcAft>
-                <a:spcPts val="100"/>
-              </a:spcAft>
-            </a:pPr>
-            <a:r>
-              <a:rPr sz="1500" b="1" i="0">
-                <a:solidFill>
-                  <a:srgbClr val="9C7A4A"/>
-                </a:solidFill>
-                <a:latin typeface="Helvetica Neue"/>
-              </a:rPr>
-              <a:t>CGV &amp; RGPD</a:t>
-            </a:r>
-          </a:p>
-          <a:p>
-            <a:pPr algn="l">
-              <a:spcBef>
-                <a:spcPts val="0"/>
-              </a:spcBef>
-              <a:spcAft>
-                <a:spcPts val="300"/>
-              </a:spcAft>
-            </a:pPr>
-            <a:r>
-              <a:rPr sz="1350" b="0" i="0">
-                <a:solidFill>
-                  <a:srgbClr val="444444"/>
-                </a:solidFill>
-                <a:latin typeface="Helvetica Neue"/>
-              </a:rPr>
-              <a:t>rétractation 14 j (loi Hamon), garantie 2 ans, cookies, mentions légales.</a:t>
-            </a:r>
-          </a:p>
-        </p:txBody>
-      </p:sp>
-      <p:pic>
-        <p:nvPicPr>
-          <p:cNvPr id="11" name="Picture 10" descr="i3.jpg"/>
-          <p:cNvPicPr>
-            <a:picLocks noChangeAspect="1"/>
-          </p:cNvPicPr>
-          <p:nvPr/>
-        </p:nvPicPr>
-        <p:blipFill>
-          <a:blip r:embed="rId3"/>
-          <a:stretch>
-            <a:fillRect/>
-          </a:stretch>
-        </p:blipFill>
-        <p:spPr>
-          <a:xfrm>
-            <a:off x="6613855" y="1828800"/>
-            <a:ext cx="5029200" cy="3200400"/>
-          </a:xfrm>
-          <a:prstGeom prst="rect">
-            <a:avLst/>
-          </a:prstGeom>
-        </p:spPr>
-      </p:pic>
-      <p:sp>
-        <p:nvSpPr>
-          <p:cNvPr id="12" name="Rectangle 11"/>
-          <p:cNvSpPr/>
-          <p:nvPr/>
-        </p:nvSpPr>
-        <p:spPr>
-          <a:xfrm>
-            <a:off x="6613855" y="5166360"/>
-            <a:ext cx="5029200" cy="640080"/>
+            <a:ext cx="5257800" cy="1828800"/>
           </a:xfrm>
           <a:prstGeom prst="rect">
             <a:avLst/>
           </a:prstGeom>
           <a:solidFill>
-            <a:srgbClr val="1A1A1A"/>
+            <a:srgbClr val="F3EFE8"/>
           </a:solidFill>
-          <a:ln>
-            <a:noFill/>
+          <a:ln w="12700">
+            <a:solidFill>
+              <a:srgbClr val="E7E1D6"/>
+            </a:solidFill>
           </a:ln>
           <a:effectLst/>
         </p:spPr>
@@ -6456,14 +7828,14 @@
       </p:sp>
       <p:sp>
         <p:nvSpPr>
-          <p:cNvPr id="13" name="TextBox 12"/>
+          <p:cNvPr id="11" name="TextBox 10"/>
           <p:cNvSpPr txBox="1"/>
           <p:nvPr/>
         </p:nvSpPr>
         <p:spPr>
           <a:xfrm>
-            <a:off x="6613855" y="5257800"/>
-            <a:ext cx="5029200" cy="457200"/>
+            <a:off x="841248" y="2660904"/>
+            <a:ext cx="4855464" cy="1554480"/>
           </a:xfrm>
           <a:prstGeom prst="rect">
             <a:avLst/>
@@ -6476,22 +7848,514 @@
           </a:bodyPr>
           <a:lstStyle/>
           <a:p>
-            <a:pPr algn="ctr">
-              <a:spcBef>
-                <a:spcPts val="0"/>
-              </a:spcBef>
-              <a:spcAft>
-                <a:spcPts val="600"/>
-              </a:spcAft>
-            </a:pPr>
-            <a:r>
-              <a:rPr sz="1500" b="1" i="0">
-                <a:solidFill>
-                  <a:srgbClr val="B89A6B"/>
-                </a:solidFill>
-                <a:latin typeface="Helvetica Neue"/>
-              </a:rPr>
-              <a:t>▸  Visitez la boutique : jeca-site.vercel.app</a:t>
+            <a:pPr algn="l">
+              <a:spcBef>
+                <a:spcPts val="0"/>
+              </a:spcBef>
+              <a:spcAft>
+                <a:spcPts val="700"/>
+              </a:spcAft>
+            </a:pPr>
+            <a:r>
+              <a:rPr sz="1600" b="1" i="0">
+                <a:solidFill>
+                  <a:srgbClr val="9C7A4A"/>
+                </a:solidFill>
+                <a:latin typeface="Helvetica Neue"/>
+              </a:rPr>
+              <a:t>Forces</a:t>
+            </a:r>
+          </a:p>
+          <a:p>
+            <a:pPr algn="l">
+              <a:spcBef>
+                <a:spcPts val="0"/>
+              </a:spcBef>
+              <a:spcAft>
+                <a:spcPts val="400"/>
+              </a:spcAft>
+            </a:pPr>
+            <a:r>
+              <a:rPr sz="1150" b="0" i="0">
+                <a:solidFill>
+                  <a:srgbClr val="1A1A1A"/>
+                </a:solidFill>
+                <a:latin typeface="Helvetica Neue"/>
+              </a:rPr>
+              <a:t>·  Bijou + GPS réunis (unique en France)</a:t>
+            </a:r>
+          </a:p>
+          <a:p>
+            <a:pPr algn="l">
+              <a:spcBef>
+                <a:spcPts val="0"/>
+              </a:spcBef>
+              <a:spcAft>
+                <a:spcPts val="400"/>
+              </a:spcAft>
+            </a:pPr>
+            <a:r>
+              <a:rPr sz="1150" b="0" i="0">
+                <a:solidFill>
+                  <a:srgbClr val="1A1A1A"/>
+                </a:solidFill>
+                <a:latin typeface="Helvetica Neue"/>
+              </a:rPr>
+              <a:t>·  Données 100 % France</a:t>
+            </a:r>
+          </a:p>
+          <a:p>
+            <a:pPr algn="l">
+              <a:spcBef>
+                <a:spcPts val="0"/>
+              </a:spcBef>
+              <a:spcAft>
+                <a:spcPts val="400"/>
+              </a:spcAft>
+            </a:pPr>
+            <a:r>
+              <a:rPr sz="1150" b="0" i="0">
+                <a:solidFill>
+                  <a:srgbClr val="1A1A1A"/>
+                </a:solidFill>
+                <a:latin typeface="Helvetica Neue"/>
+              </a:rPr>
+              <a:t>·  Revenu récurrent (abonnement)</a:t>
+            </a:r>
+          </a:p>
+        </p:txBody>
+      </p:sp>
+      <p:sp>
+        <p:nvSpPr>
+          <p:cNvPr id="12" name="Rectangle 11"/>
+          <p:cNvSpPr/>
+          <p:nvPr/>
+        </p:nvSpPr>
+        <p:spPr>
+          <a:xfrm>
+            <a:off x="6263640" y="2514600"/>
+            <a:ext cx="5257800" cy="1828800"/>
+          </a:xfrm>
+          <a:prstGeom prst="rect">
+            <a:avLst/>
+          </a:prstGeom>
+          <a:solidFill>
+            <a:srgbClr val="F3EFE8"/>
+          </a:solidFill>
+          <a:ln w="12700">
+            <a:solidFill>
+              <a:srgbClr val="E7E1D6"/>
+            </a:solidFill>
+          </a:ln>
+          <a:effectLst/>
+        </p:spPr>
+        <p:style>
+          <a:lnRef idx="1">
+            <a:schemeClr val="accent1"/>
+          </a:lnRef>
+          <a:fillRef idx="3">
+            <a:schemeClr val="accent1"/>
+          </a:fillRef>
+          <a:effectRef idx="2">
+            <a:schemeClr val="accent1"/>
+          </a:effectRef>
+          <a:fontRef idx="minor">
+            <a:schemeClr val="lt1"/>
+          </a:fontRef>
+        </p:style>
+        <p:txBody>
+          <a:bodyPr rtlCol="0" anchor="ctr"/>
+          <a:lstStyle/>
+          <a:p>
+            <a:pPr algn="ctr"/>
+          </a:p>
+        </p:txBody>
+      </p:sp>
+      <p:sp>
+        <p:nvSpPr>
+          <p:cNvPr id="13" name="TextBox 12"/>
+          <p:cNvSpPr txBox="1"/>
+          <p:nvPr/>
+        </p:nvSpPr>
+        <p:spPr>
+          <a:xfrm>
+            <a:off x="6464808" y="2660904"/>
+            <a:ext cx="4855464" cy="1554480"/>
+          </a:xfrm>
+          <a:prstGeom prst="rect">
+            <a:avLst/>
+          </a:prstGeom>
+          <a:noFill/>
+        </p:spPr>
+        <p:txBody>
+          <a:bodyPr wrap="square" anchor="t">
+            <a:spAutoFit/>
+          </a:bodyPr>
+          <a:lstStyle/>
+          <a:p>
+            <a:pPr algn="l">
+              <a:spcBef>
+                <a:spcPts val="0"/>
+              </a:spcBef>
+              <a:spcAft>
+                <a:spcPts val="700"/>
+              </a:spcAft>
+            </a:pPr>
+            <a:r>
+              <a:rPr sz="1600" b="1" i="0">
+                <a:solidFill>
+                  <a:srgbClr val="9C7A4A"/>
+                </a:solidFill>
+                <a:latin typeface="Helvetica Neue"/>
+              </a:rPr>
+              <a:t>Opportunités</a:t>
+            </a:r>
+          </a:p>
+          <a:p>
+            <a:pPr algn="l">
+              <a:spcBef>
+                <a:spcPts val="0"/>
+              </a:spcBef>
+              <a:spcAft>
+                <a:spcPts val="400"/>
+              </a:spcAft>
+            </a:pPr>
+            <a:r>
+              <a:rPr sz="1150" b="0" i="0">
+                <a:solidFill>
+                  <a:srgbClr val="1A1A1A"/>
+                </a:solidFill>
+                <a:latin typeface="Helvetica Neue"/>
+              </a:rPr>
+              <a:t>·  Wearables +12 %/an</a:t>
+            </a:r>
+          </a:p>
+          <a:p>
+            <a:pPr algn="l">
+              <a:spcBef>
+                <a:spcPts val="0"/>
+              </a:spcBef>
+              <a:spcAft>
+                <a:spcPts val="400"/>
+              </a:spcAft>
+            </a:pPr>
+            <a:r>
+              <a:rPr sz="1150" b="0" i="0">
+                <a:solidFill>
+                  <a:srgbClr val="1A1A1A"/>
+                </a:solidFill>
+                <a:latin typeface="Helvetica Neue"/>
+              </a:rPr>
+              <a:t>·  Souveraineté des données</a:t>
+            </a:r>
+          </a:p>
+          <a:p>
+            <a:pPr algn="l">
+              <a:spcBef>
+                <a:spcPts val="0"/>
+              </a:spcBef>
+              <a:spcAft>
+                <a:spcPts val="400"/>
+              </a:spcAft>
+            </a:pPr>
+            <a:r>
+              <a:rPr sz="1150" b="0" i="0">
+                <a:solidFill>
+                  <a:srgbClr val="1A1A1A"/>
+                </a:solidFill>
+                <a:latin typeface="Helvetica Neue"/>
+              </a:rPr>
+              <a:t>·  Cadeau : rentrée, Noël, anniversaire</a:t>
+            </a:r>
+          </a:p>
+        </p:txBody>
+      </p:sp>
+      <p:sp>
+        <p:nvSpPr>
+          <p:cNvPr id="14" name="Rectangle 13"/>
+          <p:cNvSpPr/>
+          <p:nvPr/>
+        </p:nvSpPr>
+        <p:spPr>
+          <a:xfrm>
+            <a:off x="640080" y="4526280"/>
+            <a:ext cx="5257800" cy="1828800"/>
+          </a:xfrm>
+          <a:prstGeom prst="rect">
+            <a:avLst/>
+          </a:prstGeom>
+          <a:solidFill>
+            <a:srgbClr val="FFFFFF"/>
+          </a:solidFill>
+          <a:ln w="12700">
+            <a:solidFill>
+              <a:srgbClr val="E7E1D6"/>
+            </a:solidFill>
+          </a:ln>
+          <a:effectLst/>
+        </p:spPr>
+        <p:style>
+          <a:lnRef idx="1">
+            <a:schemeClr val="accent1"/>
+          </a:lnRef>
+          <a:fillRef idx="3">
+            <a:schemeClr val="accent1"/>
+          </a:fillRef>
+          <a:effectRef idx="2">
+            <a:schemeClr val="accent1"/>
+          </a:effectRef>
+          <a:fontRef idx="minor">
+            <a:schemeClr val="lt1"/>
+          </a:fontRef>
+        </p:style>
+        <p:txBody>
+          <a:bodyPr rtlCol="0" anchor="ctr"/>
+          <a:lstStyle/>
+          <a:p>
+            <a:pPr algn="ctr"/>
+          </a:p>
+        </p:txBody>
+      </p:sp>
+      <p:sp>
+        <p:nvSpPr>
+          <p:cNvPr id="15" name="TextBox 14"/>
+          <p:cNvSpPr txBox="1"/>
+          <p:nvPr/>
+        </p:nvSpPr>
+        <p:spPr>
+          <a:xfrm>
+            <a:off x="841248" y="4672584"/>
+            <a:ext cx="4855464" cy="1554480"/>
+          </a:xfrm>
+          <a:prstGeom prst="rect">
+            <a:avLst/>
+          </a:prstGeom>
+          <a:noFill/>
+        </p:spPr>
+        <p:txBody>
+          <a:bodyPr wrap="square" anchor="t">
+            <a:spAutoFit/>
+          </a:bodyPr>
+          <a:lstStyle/>
+          <a:p>
+            <a:pPr algn="l">
+              <a:spcBef>
+                <a:spcPts val="0"/>
+              </a:spcBef>
+              <a:spcAft>
+                <a:spcPts val="700"/>
+              </a:spcAft>
+            </a:pPr>
+            <a:r>
+              <a:rPr sz="1600" b="1" i="0">
+                <a:solidFill>
+                  <a:srgbClr val="9C7A4A"/>
+                </a:solidFill>
+                <a:latin typeface="Helvetica Neue"/>
+              </a:rPr>
+              <a:t>Faiblesses</a:t>
+            </a:r>
+          </a:p>
+          <a:p>
+            <a:pPr algn="l">
+              <a:spcBef>
+                <a:spcPts val="0"/>
+              </a:spcBef>
+              <a:spcAft>
+                <a:spcPts val="400"/>
+              </a:spcAft>
+            </a:pPr>
+            <a:r>
+              <a:rPr sz="1150" b="0" i="0">
+                <a:solidFill>
+                  <a:srgbClr val="1A1A1A"/>
+                </a:solidFill>
+                <a:latin typeface="Helvetica Neue"/>
+              </a:rPr>
+              <a:t>·  Marque nouvelle à faire connaître</a:t>
+            </a:r>
+          </a:p>
+          <a:p>
+            <a:pPr algn="l">
+              <a:spcBef>
+                <a:spcPts val="0"/>
+              </a:spcBef>
+              <a:spcAft>
+                <a:spcPts val="400"/>
+              </a:spcAft>
+            </a:pPr>
+            <a:r>
+              <a:rPr sz="1150" b="0" i="0">
+                <a:solidFill>
+                  <a:srgbClr val="1A1A1A"/>
+                </a:solidFill>
+                <a:latin typeface="Helvetica Neue"/>
+              </a:rPr>
+              <a:t>·  CAC à maîtriser</a:t>
+            </a:r>
+          </a:p>
+          <a:p>
+            <a:pPr algn="l">
+              <a:spcBef>
+                <a:spcPts val="0"/>
+              </a:spcBef>
+              <a:spcAft>
+                <a:spcPts val="400"/>
+              </a:spcAft>
+            </a:pPr>
+            <a:r>
+              <a:rPr sz="1150" b="0" i="0">
+                <a:solidFill>
+                  <a:srgbClr val="1A1A1A"/>
+                </a:solidFill>
+                <a:latin typeface="Helvetica Neue"/>
+              </a:rPr>
+              <a:t>·  Prix bijou + abonnement</a:t>
+            </a:r>
+          </a:p>
+        </p:txBody>
+      </p:sp>
+      <p:sp>
+        <p:nvSpPr>
+          <p:cNvPr id="16" name="Rectangle 15"/>
+          <p:cNvSpPr/>
+          <p:nvPr/>
+        </p:nvSpPr>
+        <p:spPr>
+          <a:xfrm>
+            <a:off x="6263640" y="4526280"/>
+            <a:ext cx="5257800" cy="1828800"/>
+          </a:xfrm>
+          <a:prstGeom prst="rect">
+            <a:avLst/>
+          </a:prstGeom>
+          <a:solidFill>
+            <a:srgbClr val="FFFFFF"/>
+          </a:solidFill>
+          <a:ln w="12700">
+            <a:solidFill>
+              <a:srgbClr val="E7E1D6"/>
+            </a:solidFill>
+          </a:ln>
+          <a:effectLst/>
+        </p:spPr>
+        <p:style>
+          <a:lnRef idx="1">
+            <a:schemeClr val="accent1"/>
+          </a:lnRef>
+          <a:fillRef idx="3">
+            <a:schemeClr val="accent1"/>
+          </a:fillRef>
+          <a:effectRef idx="2">
+            <a:schemeClr val="accent1"/>
+          </a:effectRef>
+          <a:fontRef idx="minor">
+            <a:schemeClr val="lt1"/>
+          </a:fontRef>
+        </p:style>
+        <p:txBody>
+          <a:bodyPr rtlCol="0" anchor="ctr"/>
+          <a:lstStyle/>
+          <a:p>
+            <a:pPr algn="ctr"/>
+          </a:p>
+        </p:txBody>
+      </p:sp>
+      <p:sp>
+        <p:nvSpPr>
+          <p:cNvPr id="17" name="TextBox 16"/>
+          <p:cNvSpPr txBox="1"/>
+          <p:nvPr/>
+        </p:nvSpPr>
+        <p:spPr>
+          <a:xfrm>
+            <a:off x="6464808" y="4672584"/>
+            <a:ext cx="4855464" cy="1554480"/>
+          </a:xfrm>
+          <a:prstGeom prst="rect">
+            <a:avLst/>
+          </a:prstGeom>
+          <a:noFill/>
+        </p:spPr>
+        <p:txBody>
+          <a:bodyPr wrap="square" anchor="t">
+            <a:spAutoFit/>
+          </a:bodyPr>
+          <a:lstStyle/>
+          <a:p>
+            <a:pPr algn="l">
+              <a:spcBef>
+                <a:spcPts val="0"/>
+              </a:spcBef>
+              <a:spcAft>
+                <a:spcPts val="700"/>
+              </a:spcAft>
+            </a:pPr>
+            <a:r>
+              <a:rPr sz="1600" b="1" i="0">
+                <a:solidFill>
+                  <a:srgbClr val="9C7A4A"/>
+                </a:solidFill>
+                <a:latin typeface="Helvetica Neue"/>
+              </a:rPr>
+              <a:t>Menaces</a:t>
+            </a:r>
+          </a:p>
+          <a:p>
+            <a:pPr algn="l">
+              <a:spcBef>
+                <a:spcPts val="0"/>
+              </a:spcBef>
+              <a:spcAft>
+                <a:spcPts val="400"/>
+              </a:spcAft>
+            </a:pPr>
+            <a:r>
+              <a:rPr sz="1150" b="0" i="0">
+                <a:solidFill>
+                  <a:srgbClr val="1A1A1A"/>
+                </a:solidFill>
+                <a:latin typeface="Helvetica Neue"/>
+              </a:rPr>
+              <a:t>·  Weenect · Xplora · AngelSense (stigmatisant)</a:t>
+            </a:r>
+          </a:p>
+          <a:p>
+            <a:pPr algn="l">
+              <a:spcBef>
+                <a:spcPts val="0"/>
+              </a:spcBef>
+              <a:spcAft>
+                <a:spcPts val="400"/>
+              </a:spcAft>
+            </a:pPr>
+            <a:r>
+              <a:rPr sz="1150" b="0" i="0">
+                <a:solidFill>
+                  <a:srgbClr val="1A1A1A"/>
+                </a:solidFill>
+                <a:latin typeface="Helvetica Neue"/>
+              </a:rPr>
+              <a:t>·  AirTag ~30 € détourné</a:t>
+            </a:r>
+          </a:p>
+          <a:p>
+            <a:pPr algn="l">
+              <a:spcBef>
+                <a:spcPts val="0"/>
+              </a:spcBef>
+              <a:spcAft>
+                <a:spcPts val="400"/>
+              </a:spcAft>
+            </a:pPr>
+            <a:r>
+              <a:rPr sz="1150" b="0" i="0">
+                <a:solidFill>
+                  <a:srgbClr val="1A1A1A"/>
+                </a:solidFill>
+                <a:latin typeface="Helvetica Neue"/>
+              </a:rPr>
+              <a:t>·  Entrée d'un géant (Apple/Samsung)</a:t>
             </a:r>
           </a:p>
         </p:txBody>
@@ -6501,6 +8365,9 @@
   <p:clrMapOvr>
     <a:masterClrMapping/>
   </p:clrMapOvr>
+  <p:transition spd="med">
+    <p:fade/>
+  </p:transition>
 </p:sld>
 </file>
 
@@ -6695,8 +8562,8 @@
         </p:nvSpPr>
         <p:spPr>
           <a:xfrm>
-            <a:off x="10362895" y="457200"/>
-            <a:ext cx="1325880" cy="365760"/>
+            <a:off x="9082735" y="475488"/>
+            <a:ext cx="2606040" cy="365760"/>
           </a:xfrm>
           <a:prstGeom prst="rect">
             <a:avLst/>
@@ -6718,13 +8585,33 @@
               </a:spcAft>
             </a:pPr>
             <a:r>
-              <a:rPr sz="1300" b="1" i="0">
+              <a:rPr sz="1050" b="0" i="0">
                 <a:solidFill>
                   <a:srgbClr val="9C7A4A"/>
                 </a:solidFill>
                 <a:latin typeface="Helvetica Neue"/>
-              </a:rPr>
-              <a:t>07</a:t>
+                <a:hlinkClick r:id="rId3"/>
+              </a:rPr>
+              <a:t>jeca-site.vercel.app</a:t>
+            </a:r>
+          </a:p>
+          <a:p>
+            <a:pPr algn="r">
+              <a:spcBef>
+                <a:spcPts val="0"/>
+              </a:spcBef>
+              <a:spcAft>
+                <a:spcPts val="600"/>
+              </a:spcAft>
+            </a:pPr>
+            <a:r>
+              <a:rPr sz="1050" b="1" i="0">
+                <a:solidFill>
+                  <a:srgbClr val="6F6F6F"/>
+                </a:solidFill>
+                <a:latin typeface="Helvetica Neue"/>
+              </a:rPr>
+              <a:t>   07</a:t>
             </a:r>
           </a:p>
         </p:txBody>
@@ -6737,7 +8624,7 @@
         </p:nvSpPr>
         <p:spPr>
           <a:xfrm>
-            <a:off x="548640" y="1143000"/>
+            <a:off x="548640" y="1115568"/>
             <a:ext cx="10058400" cy="320040"/>
           </a:xfrm>
           <a:prstGeom prst="rect">
@@ -6766,7 +8653,7 @@
                 </a:solidFill>
                 <a:latin typeface="Helvetica Neue"/>
               </a:rPr>
-              <a:t>LE PRODUIT — LA GAMME</a:t>
+              <a:t>CONSTRUCTION E-COMMERCE</a:t>
             </a:r>
           </a:p>
         </p:txBody>
@@ -6779,7 +8666,7 @@
         </p:nvSpPr>
         <p:spPr>
           <a:xfrm>
-            <a:off x="566928" y="1481328"/>
+            <a:off x="566928" y="1463040"/>
             <a:ext cx="457200" cy="19050"/>
           </a:xfrm>
           <a:prstGeom prst="rect">
@@ -6824,7 +8711,7 @@
         <p:spPr>
           <a:xfrm>
             <a:off x="640080" y="1783080"/>
-            <a:ext cx="10881360" cy="640080"/>
+            <a:ext cx="5760720" cy="731520"/>
           </a:xfrm>
           <a:prstGeom prst="rect">
             <a:avLst/>
@@ -6846,51 +8733,27 @@
               </a:spcAft>
             </a:pPr>
             <a:r>
-              <a:rPr sz="3000" b="0" i="0">
+              <a:rPr sz="2900" b="0" i="0">
                 <a:solidFill>
                   <a:srgbClr val="1A1A1A"/>
                 </a:solidFill>
                 <a:latin typeface="Georgia"/>
               </a:rPr>
-              <a:t>Trois familles · or &amp; argent</a:t>
-            </a:r>
-          </a:p>
-        </p:txBody>
-      </p:sp>
-      <p:pic>
-        <p:nvPicPr>
-          <p:cNvPr id="10" name="Picture 9" descr="i4.jpg"/>
-          <p:cNvPicPr>
-            <a:picLocks noChangeAspect="1"/>
-          </p:cNvPicPr>
-          <p:nvPr/>
-        </p:nvPicPr>
-        <p:blipFill>
-          <a:blip r:embed="rId3"/>
-          <a:stretch>
-            <a:fillRect/>
-          </a:stretch>
-        </p:blipFill>
-        <p:spPr>
-          <a:xfrm>
-            <a:off x="822960" y="2606040"/>
-            <a:ext cx="3291840" cy="2697480"/>
-          </a:xfrm>
-          <a:prstGeom prst="rect">
-            <a:avLst/>
-          </a:prstGeom>
-        </p:spPr>
-      </p:pic>
-      <p:sp>
-        <p:nvSpPr>
-          <p:cNvPr id="11" name="TextBox 10"/>
+              <a:t>Notre boutique, en ligne</a:t>
+            </a:r>
+          </a:p>
+        </p:txBody>
+      </p:sp>
+      <p:sp>
+        <p:nvSpPr>
+          <p:cNvPr id="10" name="TextBox 9"/>
           <p:cNvSpPr txBox="1"/>
           <p:nvPr/>
         </p:nvSpPr>
         <p:spPr>
           <a:xfrm>
-            <a:off x="822960" y="5394960"/>
-            <a:ext cx="3291840" cy="822960"/>
+            <a:off x="640080" y="2514600"/>
+            <a:ext cx="5669280" cy="3291840"/>
           </a:xfrm>
           <a:prstGeom prst="rect">
             <a:avLst/>
@@ -6903,48 +8766,162 @@
           </a:bodyPr>
           <a:lstStyle/>
           <a:p>
-            <a:pPr algn="ctr">
-              <a:spcBef>
-                <a:spcPts val="0"/>
-              </a:spcBef>
-              <a:spcAft>
-                <a:spcPts val="200"/>
-              </a:spcAft>
-            </a:pPr>
-            <a:r>
-              <a:rPr sz="1600" b="1" i="0">
-                <a:solidFill>
-                  <a:srgbClr val="1A1A1A"/>
-                </a:solidFill>
-                <a:latin typeface="Georgia"/>
-              </a:rPr>
-              <a:t>Bracelets</a:t>
-            </a:r>
-          </a:p>
-          <a:p>
-            <a:pPr algn="ctr">
-              <a:spcBef>
-                <a:spcPts val="0"/>
-              </a:spcBef>
-              <a:spcAft>
-                <a:spcPts val="600"/>
+            <a:pPr algn="l">
+              <a:spcBef>
+                <a:spcPts val="700"/>
+              </a:spcBef>
+              <a:spcAft>
+                <a:spcPts val="100"/>
+              </a:spcAft>
+            </a:pPr>
+            <a:r>
+              <a:rPr sz="1450" b="1" i="0">
+                <a:solidFill>
+                  <a:srgbClr val="9C7A4A"/>
+                </a:solidFill>
+                <a:latin typeface="Helvetica Neue"/>
+              </a:rPr>
+              <a:t>Plateforme</a:t>
+            </a:r>
+          </a:p>
+          <a:p>
+            <a:pPr algn="l">
+              <a:spcBef>
+                <a:spcPts val="0"/>
+              </a:spcBef>
+              <a:spcAft>
+                <a:spcPts val="300"/>
               </a:spcAft>
             </a:pPr>
             <a:r>
               <a:rPr sz="1300" b="0" i="0">
                 <a:solidFill>
+                  <a:srgbClr val="444444"/>
+                </a:solidFill>
+                <a:latin typeface="Helvetica Neue"/>
+              </a:rPr>
+              <a:t>site codé sur-mesure (HTML/CSS/JS), 14 pages, déployé sur Vercel, hébergé en France.</a:t>
+            </a:r>
+          </a:p>
+          <a:p>
+            <a:pPr algn="l">
+              <a:spcBef>
+                <a:spcPts val="700"/>
+              </a:spcBef>
+              <a:spcAft>
+                <a:spcPts val="100"/>
+              </a:spcAft>
+            </a:pPr>
+            <a:r>
+              <a:rPr sz="1450" b="1" i="0">
+                <a:solidFill>
                   <a:srgbClr val="9C7A4A"/>
                 </a:solidFill>
                 <a:latin typeface="Helvetica Neue"/>
               </a:rPr>
-              <a:t>79 – 99 €</a:t>
+              <a:t>Paiement</a:t>
+            </a:r>
+          </a:p>
+          <a:p>
+            <a:pPr algn="l">
+              <a:spcBef>
+                <a:spcPts val="0"/>
+              </a:spcBef>
+              <a:spcAft>
+                <a:spcPts val="300"/>
+              </a:spcAft>
+            </a:pPr>
+            <a:r>
+              <a:rPr sz="1300" b="0" i="0">
+                <a:solidFill>
+                  <a:srgbClr val="444444"/>
+                </a:solidFill>
+                <a:latin typeface="Helvetica Neue"/>
+              </a:rPr>
+              <a:t>Stripe sécurisé, CB + paiement 3× sans frais, HTTPS.</a:t>
+            </a:r>
+          </a:p>
+          <a:p>
+            <a:pPr algn="l">
+              <a:spcBef>
+                <a:spcPts val="700"/>
+              </a:spcBef>
+              <a:spcAft>
+                <a:spcPts val="100"/>
+              </a:spcAft>
+            </a:pPr>
+            <a:r>
+              <a:rPr sz="1450" b="1" i="0">
+                <a:solidFill>
+                  <a:srgbClr val="9C7A4A"/>
+                </a:solidFill>
+                <a:latin typeface="Helvetica Neue"/>
+              </a:rPr>
+              <a:t>Livraison</a:t>
+            </a:r>
+          </a:p>
+          <a:p>
+            <a:pPr algn="l">
+              <a:spcBef>
+                <a:spcPts val="0"/>
+              </a:spcBef>
+              <a:spcAft>
+                <a:spcPts val="300"/>
+              </a:spcAft>
+            </a:pPr>
+            <a:r>
+              <a:rPr sz="1300" b="0" i="0">
+                <a:solidFill>
+                  <a:srgbClr val="444444"/>
+                </a:solidFill>
+                <a:latin typeface="Helvetica Neue"/>
+              </a:rPr>
+              <a:t>72 h, offerte dès 79 €, suivi du colis.</a:t>
+            </a:r>
+          </a:p>
+          <a:p>
+            <a:pPr algn="l">
+              <a:spcBef>
+                <a:spcPts val="700"/>
+              </a:spcBef>
+              <a:spcAft>
+                <a:spcPts val="100"/>
+              </a:spcAft>
+            </a:pPr>
+            <a:r>
+              <a:rPr sz="1450" b="1" i="0">
+                <a:solidFill>
+                  <a:srgbClr val="9C7A4A"/>
+                </a:solidFill>
+                <a:latin typeface="Helvetica Neue"/>
+              </a:rPr>
+              <a:t>CGV &amp; RGPD</a:t>
+            </a:r>
+          </a:p>
+          <a:p>
+            <a:pPr algn="l">
+              <a:spcBef>
+                <a:spcPts val="0"/>
+              </a:spcBef>
+              <a:spcAft>
+                <a:spcPts val="300"/>
+              </a:spcAft>
+            </a:pPr>
+            <a:r>
+              <a:rPr sz="1300" b="0" i="0">
+                <a:solidFill>
+                  <a:srgbClr val="444444"/>
+                </a:solidFill>
+                <a:latin typeface="Helvetica Neue"/>
+              </a:rPr>
+              <a:t>rétractation 14 j (loi Hamon), garantie 2 ans, cookies, mentions légales.</a:t>
             </a:r>
           </a:p>
         </p:txBody>
       </p:sp>
       <p:pic>
         <p:nvPicPr>
-          <p:cNvPr id="12" name="Picture 11" descr="i5.jpg"/>
+          <p:cNvPr id="11" name="Picture 10" descr="i3.jpg"/>
           <p:cNvPicPr>
             <a:picLocks noChangeAspect="1"/>
           </p:cNvPicPr>
@@ -6958,14 +8935,58 @@
         </p:blipFill>
         <p:spPr>
           <a:xfrm>
-            <a:off x="4572000" y="2606040"/>
-            <a:ext cx="3291840" cy="2697480"/>
+            <a:off x="6613855" y="1828800"/>
+            <a:ext cx="5029200" cy="3200400"/>
           </a:xfrm>
           <a:prstGeom prst="rect">
             <a:avLst/>
           </a:prstGeom>
         </p:spPr>
       </p:pic>
+      <p:sp>
+        <p:nvSpPr>
+          <p:cNvPr id="12" name="Rectangle 11"/>
+          <p:cNvSpPr/>
+          <p:nvPr/>
+        </p:nvSpPr>
+        <p:spPr>
+          <a:xfrm>
+            <a:off x="6613855" y="5166360"/>
+            <a:ext cx="5029200" cy="640080"/>
+          </a:xfrm>
+          <a:prstGeom prst="rect">
+            <a:avLst/>
+          </a:prstGeom>
+          <a:solidFill>
+            <a:srgbClr val="1A1A1A"/>
+          </a:solidFill>
+          <a:ln>
+            <a:noFill/>
+          </a:ln>
+          <a:effectLst/>
+        </p:spPr>
+        <p:style>
+          <a:lnRef idx="1">
+            <a:schemeClr val="accent1"/>
+          </a:lnRef>
+          <a:fillRef idx="3">
+            <a:schemeClr val="accent1"/>
+          </a:fillRef>
+          <a:effectRef idx="2">
+            <a:schemeClr val="accent1"/>
+          </a:effectRef>
+          <a:fontRef idx="minor">
+            <a:schemeClr val="lt1"/>
+          </a:fontRef>
+        </p:style>
+        <p:txBody>
+          <a:bodyPr rtlCol="0" anchor="ctr"/>
+          <a:lstStyle/>
+          <a:p>
+            <a:pPr algn="ctr"/>
+          </a:p>
+        </p:txBody>
+      </p:sp>
       <p:sp>
         <p:nvSpPr>
           <p:cNvPr id="13" name="TextBox 12"/>
@@ -6974,8 +8995,8 @@
         </p:nvSpPr>
         <p:spPr>
           <a:xfrm>
-            <a:off x="4572000" y="5394960"/>
-            <a:ext cx="3291840" cy="822960"/>
+            <a:off x="6613855" y="5266944"/>
+            <a:ext cx="5029200" cy="457200"/>
           </a:xfrm>
           <a:prstGeom prst="rect">
             <a:avLst/>
@@ -6993,163 +9014,18 @@
                 <a:spcPts val="0"/>
               </a:spcBef>
               <a:spcAft>
-                <a:spcPts val="200"/>
-              </a:spcAft>
-            </a:pPr>
-            <a:r>
-              <a:rPr sz="1600" b="1" i="0">
-                <a:solidFill>
-                  <a:srgbClr val="1A1A1A"/>
-                </a:solidFill>
-                <a:latin typeface="Georgia"/>
-              </a:rPr>
-              <a:t>Colliers</a:t>
-            </a:r>
-          </a:p>
-          <a:p>
-            <a:pPr algn="ctr">
-              <a:spcBef>
-                <a:spcPts val="0"/>
-              </a:spcBef>
-              <a:spcAft>
                 <a:spcPts val="600"/>
               </a:spcAft>
             </a:pPr>
             <a:r>
-              <a:rPr sz="1300" b="0" i="0">
-                <a:solidFill>
-                  <a:srgbClr val="9C7A4A"/>
-                </a:solidFill>
-                <a:latin typeface="Helvetica Neue"/>
-              </a:rPr>
-              <a:t>89 – 109 €</a:t>
-            </a:r>
-          </a:p>
-        </p:txBody>
-      </p:sp>
-      <p:pic>
-        <p:nvPicPr>
-          <p:cNvPr id="14" name="Picture 13" descr="i6.jpg"/>
-          <p:cNvPicPr>
-            <a:picLocks noChangeAspect="1"/>
-          </p:cNvPicPr>
-          <p:nvPr/>
-        </p:nvPicPr>
-        <p:blipFill>
-          <a:blip r:embed="rId5"/>
-          <a:stretch>
-            <a:fillRect/>
-          </a:stretch>
-        </p:blipFill>
-        <p:spPr>
-          <a:xfrm>
-            <a:off x="8321040" y="2606040"/>
-            <a:ext cx="3291840" cy="2697480"/>
-          </a:xfrm>
-          <a:prstGeom prst="rect">
-            <a:avLst/>
-          </a:prstGeom>
-        </p:spPr>
-      </p:pic>
-      <p:sp>
-        <p:nvSpPr>
-          <p:cNvPr id="15" name="TextBox 14"/>
-          <p:cNvSpPr txBox="1"/>
-          <p:nvPr/>
-        </p:nvSpPr>
-        <p:spPr>
-          <a:xfrm>
-            <a:off x="8321040" y="5394960"/>
-            <a:ext cx="3291840" cy="822960"/>
-          </a:xfrm>
-          <a:prstGeom prst="rect">
-            <a:avLst/>
-          </a:prstGeom>
-          <a:noFill/>
-        </p:spPr>
-        <p:txBody>
-          <a:bodyPr wrap="square" anchor="t">
-            <a:spAutoFit/>
-          </a:bodyPr>
-          <a:lstStyle/>
-          <a:p>
-            <a:pPr algn="ctr">
-              <a:spcBef>
-                <a:spcPts val="0"/>
-              </a:spcBef>
-              <a:spcAft>
-                <a:spcPts val="200"/>
-              </a:spcAft>
-            </a:pPr>
-            <a:r>
-              <a:rPr sz="1600" b="1" i="0">
-                <a:solidFill>
-                  <a:srgbClr val="1A1A1A"/>
-                </a:solidFill>
-                <a:latin typeface="Georgia"/>
-              </a:rPr>
-              <a:t>Boucles</a:t>
-            </a:r>
-          </a:p>
-          <a:p>
-            <a:pPr algn="ctr">
-              <a:spcBef>
-                <a:spcPts val="0"/>
-              </a:spcBef>
-              <a:spcAft>
-                <a:spcPts val="600"/>
-              </a:spcAft>
-            </a:pPr>
-            <a:r>
-              <a:rPr sz="1300" b="0" i="0">
-                <a:solidFill>
-                  <a:srgbClr val="9C7A4A"/>
-                </a:solidFill>
-                <a:latin typeface="Helvetica Neue"/>
-              </a:rPr>
-              <a:t>69 – 89 €</a:t>
-            </a:r>
-          </a:p>
-        </p:txBody>
-      </p:sp>
-      <p:sp>
-        <p:nvSpPr>
-          <p:cNvPr id="16" name="TextBox 15"/>
-          <p:cNvSpPr txBox="1"/>
-          <p:nvPr/>
-        </p:nvSpPr>
-        <p:spPr>
-          <a:xfrm>
-            <a:off x="640080" y="5989320"/>
-            <a:ext cx="10881360" cy="365760"/>
-          </a:xfrm>
-          <a:prstGeom prst="rect">
-            <a:avLst/>
-          </a:prstGeom>
-          <a:noFill/>
-        </p:spPr>
-        <p:txBody>
-          <a:bodyPr wrap="square" anchor="t">
-            <a:spAutoFit/>
-          </a:bodyPr>
-          <a:lstStyle/>
-          <a:p>
-            <a:pPr algn="ctr">
-              <a:spcBef>
-                <a:spcPts val="0"/>
-              </a:spcBef>
-              <a:spcAft>
-                <a:spcPts val="600"/>
-              </a:spcAft>
-            </a:pPr>
-            <a:r>
-              <a:rPr sz="1250" b="0" i="1">
-                <a:solidFill>
-                  <a:srgbClr val="6F6F6F"/>
-                </a:solidFill>
-                <a:latin typeface="Helvetica Neue"/>
-              </a:rPr>
-              <a:t>Même technologie dans chaque bijou · abonnement 6,99 – 9,99 €/mois, sans engagement</a:t>
+              <a:rPr sz="1500" b="1" i="0">
+                <a:solidFill>
+                  <a:srgbClr val="B89A6B"/>
+                </a:solidFill>
+                <a:latin typeface="Helvetica Neue"/>
+                <a:hlinkClick r:id="rId3"/>
+              </a:rPr>
+              <a:t>▸  Cliquez : jeca-site.vercel.app</a:t>
             </a:r>
           </a:p>
         </p:txBody>
@@ -7159,6 +9035,9 @@
   <p:clrMapOvr>
     <a:masterClrMapping/>
   </p:clrMapOvr>
+  <p:transition spd="med">
+    <p:fade/>
+  </p:transition>
 </p:sld>
 </file>
 
@@ -7353,8 +9232,8 @@
         </p:nvSpPr>
         <p:spPr>
           <a:xfrm>
-            <a:off x="10362895" y="457200"/>
-            <a:ext cx="1325880" cy="365760"/>
+            <a:off x="9082735" y="475488"/>
+            <a:ext cx="2606040" cy="365760"/>
           </a:xfrm>
           <a:prstGeom prst="rect">
             <a:avLst/>
@@ -7376,13 +9255,33 @@
               </a:spcAft>
             </a:pPr>
             <a:r>
-              <a:rPr sz="1300" b="1" i="0">
+              <a:rPr sz="1050" b="0" i="0">
                 <a:solidFill>
                   <a:srgbClr val="9C7A4A"/>
                 </a:solidFill>
                 <a:latin typeface="Helvetica Neue"/>
-              </a:rPr>
-              <a:t>08</a:t>
+                <a:hlinkClick r:id="rId3"/>
+              </a:rPr>
+              <a:t>jeca-site.vercel.app</a:t>
+            </a:r>
+          </a:p>
+          <a:p>
+            <a:pPr algn="r">
+              <a:spcBef>
+                <a:spcPts val="0"/>
+              </a:spcBef>
+              <a:spcAft>
+                <a:spcPts val="600"/>
+              </a:spcAft>
+            </a:pPr>
+            <a:r>
+              <a:rPr sz="1050" b="1" i="0">
+                <a:solidFill>
+                  <a:srgbClr val="6F6F6F"/>
+                </a:solidFill>
+                <a:latin typeface="Helvetica Neue"/>
+              </a:rPr>
+              <a:t>   08</a:t>
             </a:r>
           </a:p>
         </p:txBody>
@@ -7395,7 +9294,7 @@
         </p:nvSpPr>
         <p:spPr>
           <a:xfrm>
-            <a:off x="548640" y="1143000"/>
+            <a:off x="548640" y="1115568"/>
             <a:ext cx="10058400" cy="320040"/>
           </a:xfrm>
           <a:prstGeom prst="rect">
@@ -7424,7 +9323,7 @@
                 </a:solidFill>
                 <a:latin typeface="Helvetica Neue"/>
               </a:rPr>
-              <a:t>STRATÉGIE — IA · SEO · KPI</a:t>
+              <a:t>LE PRODUIT — LA GAMME</a:t>
             </a:r>
           </a:p>
         </p:txBody>
@@ -7437,7 +9336,7 @@
         </p:nvSpPr>
         <p:spPr>
           <a:xfrm>
-            <a:off x="566928" y="1481328"/>
+            <a:off x="566928" y="1463040"/>
             <a:ext cx="457200" cy="19050"/>
           </a:xfrm>
           <a:prstGeom prst="rect">
@@ -7475,60 +9374,14 @@
       </p:sp>
       <p:sp>
         <p:nvSpPr>
-          <p:cNvPr id="9" name="Rectangle 8"/>
-          <p:cNvSpPr/>
-          <p:nvPr/>
-        </p:nvSpPr>
-        <p:spPr>
-          <a:xfrm>
-            <a:off x="640080" y="1874519"/>
-            <a:ext cx="3520440" cy="4023360"/>
-          </a:xfrm>
-          <a:prstGeom prst="rect">
-            <a:avLst/>
-          </a:prstGeom>
-          <a:solidFill>
-            <a:srgbClr val="F3EFE8"/>
-          </a:solidFill>
-          <a:ln w="12700">
-            <a:solidFill>
-              <a:srgbClr val="E7E1D6"/>
-            </a:solidFill>
-          </a:ln>
-          <a:effectLst/>
-        </p:spPr>
-        <p:style>
-          <a:lnRef idx="1">
-            <a:schemeClr val="accent1"/>
-          </a:lnRef>
-          <a:fillRef idx="3">
-            <a:schemeClr val="accent1"/>
-          </a:fillRef>
-          <a:effectRef idx="2">
-            <a:schemeClr val="accent1"/>
-          </a:effectRef>
-          <a:fontRef idx="minor">
-            <a:schemeClr val="lt1"/>
-          </a:fontRef>
-        </p:style>
-        <p:txBody>
-          <a:bodyPr rtlCol="0" anchor="ctr"/>
-          <a:lstStyle/>
-          <a:p>
-            <a:pPr algn="ctr"/>
-          </a:p>
-        </p:txBody>
-      </p:sp>
-      <p:sp>
-        <p:nvSpPr>
-          <p:cNvPr id="10" name="TextBox 9"/>
+          <p:cNvPr id="9" name="TextBox 8"/>
           <p:cNvSpPr txBox="1"/>
           <p:nvPr/>
         </p:nvSpPr>
         <p:spPr>
           <a:xfrm>
-            <a:off x="914400" y="2148839"/>
-            <a:ext cx="2971800" cy="3566160"/>
+            <a:off x="640080" y="1783080"/>
+            <a:ext cx="10881360" cy="640080"/>
           </a:xfrm>
           <a:prstGeom prst="rect">
             <a:avLst/>
@@ -7546,172 +9399,55 @@
                 <a:spcPts val="0"/>
               </a:spcBef>
               <a:spcAft>
-                <a:spcPts val="1000"/>
-              </a:spcAft>
-            </a:pPr>
-            <a:r>
-              <a:rPr sz="1600" b="1" i="0">
-                <a:solidFill>
-                  <a:srgbClr val="9C7A4A"/>
+                <a:spcPts val="600"/>
+              </a:spcAft>
+            </a:pPr>
+            <a:r>
+              <a:rPr sz="2900" b="0" i="0">
+                <a:solidFill>
+                  <a:srgbClr val="1A1A1A"/>
                 </a:solidFill>
                 <a:latin typeface="Georgia"/>
               </a:rPr>
-              <a:t>Les IA utilisées</a:t>
-            </a:r>
-          </a:p>
-          <a:p>
-            <a:pPr algn="l">
-              <a:spcBef>
-                <a:spcPts val="0"/>
-              </a:spcBef>
-              <a:spcAft>
-                <a:spcPts val="600"/>
-              </a:spcAft>
-            </a:pPr>
-            <a:r>
-              <a:rPr sz="1300" b="0" i="0">
-                <a:solidFill>
-                  <a:srgbClr val="1A1A1A"/>
-                </a:solidFill>
-                <a:latin typeface="Helvetica Neue"/>
-              </a:rPr>
-              <a:t>Claude — site &amp; code</a:t>
-            </a:r>
-          </a:p>
-          <a:p>
-            <a:pPr algn="l">
-              <a:spcBef>
-                <a:spcPts val="0"/>
-              </a:spcBef>
-              <a:spcAft>
-                <a:spcPts val="600"/>
-              </a:spcAft>
-            </a:pPr>
-            <a:r>
-              <a:rPr sz="1300" b="0" i="0">
-                <a:solidFill>
-                  <a:srgbClr val="1A1A1A"/>
-                </a:solidFill>
-                <a:latin typeface="Helvetica Neue"/>
-              </a:rPr>
-              <a:t>Canva — logo, visuels, film</a:t>
-            </a:r>
-          </a:p>
-          <a:p>
-            <a:pPr algn="l">
-              <a:spcBef>
-                <a:spcPts val="0"/>
-              </a:spcBef>
-              <a:spcAft>
-                <a:spcPts val="600"/>
-              </a:spcAft>
-            </a:pPr>
-            <a:r>
-              <a:rPr sz="1300" b="0" i="0">
-                <a:solidFill>
-                  <a:srgbClr val="1A1A1A"/>
-                </a:solidFill>
-                <a:latin typeface="Helvetica Neue"/>
-              </a:rPr>
-              <a:t>ChatGPT — fiches &amp; SEO</a:t>
-            </a:r>
-          </a:p>
-          <a:p>
-            <a:pPr algn="l">
-              <a:spcBef>
-                <a:spcPts val="0"/>
-              </a:spcBef>
-              <a:spcAft>
-                <a:spcPts val="600"/>
-              </a:spcAft>
-            </a:pPr>
-            <a:r>
-              <a:rPr sz="1300" b="0" i="0">
-                <a:solidFill>
-                  <a:srgbClr val="1A1A1A"/>
-                </a:solidFill>
-                <a:latin typeface="Helvetica Neue"/>
-              </a:rPr>
-              <a:t>Python — automatisation</a:t>
-            </a:r>
-          </a:p>
-          <a:p>
-            <a:pPr algn="l">
-              <a:spcBef>
-                <a:spcPts val="0"/>
-              </a:spcBef>
-              <a:spcAft>
-                <a:spcPts val="600"/>
-              </a:spcAft>
-            </a:pPr>
-            <a:r>
-              <a:rPr sz="1300" b="0" i="0">
-                <a:solidFill>
-                  <a:srgbClr val="1A1A1A"/>
-                </a:solidFill>
-                <a:latin typeface="Helvetica Neue"/>
-              </a:rPr>
-              <a:t>→ vitesse ×10, zéro agence</a:t>
-            </a:r>
-          </a:p>
-        </p:txBody>
-      </p:sp>
-      <p:sp>
-        <p:nvSpPr>
-          <p:cNvPr id="11" name="Rectangle 10"/>
-          <p:cNvSpPr/>
-          <p:nvPr/>
-        </p:nvSpPr>
-        <p:spPr>
-          <a:xfrm>
-            <a:off x="4434840" y="1874519"/>
-            <a:ext cx="3520440" cy="4023360"/>
-          </a:xfrm>
-          <a:prstGeom prst="rect">
-            <a:avLst/>
-          </a:prstGeom>
-          <a:solidFill>
-            <a:srgbClr val="F3EFE8"/>
-          </a:solidFill>
-          <a:ln w="12700">
-            <a:solidFill>
-              <a:srgbClr val="E7E1D6"/>
-            </a:solidFill>
-          </a:ln>
-          <a:effectLst/>
-        </p:spPr>
-        <p:style>
-          <a:lnRef idx="1">
-            <a:schemeClr val="accent1"/>
-          </a:lnRef>
-          <a:fillRef idx="3">
-            <a:schemeClr val="accent1"/>
-          </a:fillRef>
-          <a:effectRef idx="2">
-            <a:schemeClr val="accent1"/>
-          </a:effectRef>
-          <a:fontRef idx="minor">
-            <a:schemeClr val="lt1"/>
-          </a:fontRef>
-        </p:style>
-        <p:txBody>
-          <a:bodyPr rtlCol="0" anchor="ctr"/>
-          <a:lstStyle/>
-          <a:p>
-            <a:pPr algn="ctr"/>
-          </a:p>
-        </p:txBody>
-      </p:sp>
-      <p:sp>
-        <p:nvSpPr>
-          <p:cNvPr id="12" name="TextBox 11"/>
+              <a:t>Trois familles · or &amp; argent</a:t>
+            </a:r>
+          </a:p>
+        </p:txBody>
+      </p:sp>
+      <p:pic>
+        <p:nvPicPr>
+          <p:cNvPr id="10" name="Picture 9" descr="i4.jpg"/>
+          <p:cNvPicPr>
+            <a:picLocks noChangeAspect="1"/>
+          </p:cNvPicPr>
+          <p:nvPr/>
+        </p:nvPicPr>
+        <p:blipFill>
+          <a:blip r:embed="rId4"/>
+          <a:stretch>
+            <a:fillRect/>
+          </a:stretch>
+        </p:blipFill>
+        <p:spPr>
+          <a:xfrm>
+            <a:off x="822960" y="2560320"/>
+            <a:ext cx="3291840" cy="2468880"/>
+          </a:xfrm>
+          <a:prstGeom prst="rect">
+            <a:avLst/>
+          </a:prstGeom>
+        </p:spPr>
+      </p:pic>
+      <p:sp>
+        <p:nvSpPr>
+          <p:cNvPr id="11" name="TextBox 10"/>
           <p:cNvSpPr txBox="1"/>
           <p:nvPr/>
         </p:nvSpPr>
         <p:spPr>
           <a:xfrm>
-            <a:off x="4709160" y="2148839"/>
-            <a:ext cx="2971800" cy="3566160"/>
+            <a:off x="822960" y="5102352"/>
+            <a:ext cx="3291840" cy="1005840"/>
           </a:xfrm>
           <a:prstGeom prst="rect">
             <a:avLst/>
@@ -7724,158 +9460,98 @@
           </a:bodyPr>
           <a:lstStyle/>
           <a:p>
-            <a:pPr algn="l">
-              <a:spcBef>
-                <a:spcPts val="0"/>
-              </a:spcBef>
-              <a:spcAft>
-                <a:spcPts val="1000"/>
+            <a:pPr algn="ctr">
+              <a:spcBef>
+                <a:spcPts val="0"/>
+              </a:spcBef>
+              <a:spcAft>
+                <a:spcPts val="100"/>
               </a:spcAft>
             </a:pPr>
             <a:r>
               <a:rPr sz="1600" b="1" i="0">
                 <a:solidFill>
+                  <a:srgbClr val="1A1A1A"/>
+                </a:solidFill>
+                <a:latin typeface="Georgia"/>
+              </a:rPr>
+              <a:t>Bracelets</a:t>
+            </a:r>
+          </a:p>
+          <a:p>
+            <a:pPr algn="ctr">
+              <a:spcBef>
+                <a:spcPts val="0"/>
+              </a:spcBef>
+              <a:spcAft>
+                <a:spcPts val="200"/>
+              </a:spcAft>
+            </a:pPr>
+            <a:r>
+              <a:rPr sz="1100" b="0" i="0">
+                <a:solidFill>
+                  <a:srgbClr val="6F6F6F"/>
+                </a:solidFill>
+                <a:latin typeface="Helvetica Neue"/>
+              </a:rPr>
+              <a:t>Étoile · Cœur · Infini</a:t>
+            </a:r>
+          </a:p>
+          <a:p>
+            <a:pPr algn="ctr">
+              <a:spcBef>
+                <a:spcPts val="0"/>
+              </a:spcBef>
+              <a:spcAft>
+                <a:spcPts val="600"/>
+              </a:spcAft>
+            </a:pPr>
+            <a:r>
+              <a:rPr sz="1250" b="1" i="0">
+                <a:solidFill>
                   <a:srgbClr val="9C7A4A"/>
                 </a:solidFill>
-                <a:latin typeface="Georgia"/>
-              </a:rPr>
-              <a:t>SEO &amp; calendrier éditorial</a:t>
-            </a:r>
-          </a:p>
-          <a:p>
-            <a:pPr algn="l">
-              <a:spcBef>
-                <a:spcPts val="0"/>
-              </a:spcBef>
-              <a:spcAft>
-                <a:spcPts val="600"/>
-              </a:spcAft>
-            </a:pPr>
-            <a:r>
-              <a:rPr sz="1300" b="0" i="0">
-                <a:solidFill>
-                  <a:srgbClr val="1A1A1A"/>
-                </a:solidFill>
-                <a:latin typeface="Helvetica Neue"/>
-              </a:rPr>
-              <a:t>Mots-clés « bracelet GPS enfant »</a:t>
-            </a:r>
-          </a:p>
-          <a:p>
-            <a:pPr algn="l">
-              <a:spcBef>
-                <a:spcPts val="0"/>
-              </a:spcBef>
-              <a:spcAft>
-                <a:spcPts val="600"/>
-              </a:spcAft>
-            </a:pPr>
-            <a:r>
-              <a:rPr sz="1300" b="0" i="0">
-                <a:solidFill>
-                  <a:srgbClr val="1A1A1A"/>
-                </a:solidFill>
-                <a:latin typeface="Helvetica Neue"/>
-              </a:rPr>
-              <a:t>Balises meta optimisées</a:t>
-            </a:r>
-          </a:p>
-          <a:p>
-            <a:pPr algn="l">
-              <a:spcBef>
-                <a:spcPts val="0"/>
-              </a:spcBef>
-              <a:spcAft>
-                <a:spcPts val="600"/>
-              </a:spcAft>
-            </a:pPr>
-            <a:r>
-              <a:rPr sz="1300" b="0" i="0">
-                <a:solidFill>
-                  <a:srgbClr val="1A1A1A"/>
-                </a:solidFill>
-                <a:latin typeface="Helvetica Neue"/>
-              </a:rPr>
-              <a:t>Blog : 1 article / semaine</a:t>
-            </a:r>
-          </a:p>
-          <a:p>
-            <a:pPr algn="l">
-              <a:spcBef>
-                <a:spcPts val="0"/>
-              </a:spcBef>
-              <a:spcAft>
-                <a:spcPts val="600"/>
-              </a:spcAft>
-            </a:pPr>
-            <a:r>
-              <a:rPr sz="1300" b="0" i="0">
-                <a:solidFill>
-                  <a:srgbClr val="1A1A1A"/>
-                </a:solidFill>
-                <a:latin typeface="Helvetica Neue"/>
-              </a:rPr>
-              <a:t>Posts : rentrée, Noël, fêtes</a:t>
-            </a:r>
-          </a:p>
-        </p:txBody>
-      </p:sp>
-      <p:sp>
-        <p:nvSpPr>
-          <p:cNvPr id="13" name="Rectangle 12"/>
-          <p:cNvSpPr/>
-          <p:nvPr/>
-        </p:nvSpPr>
-        <p:spPr>
-          <a:xfrm>
-            <a:off x="8229600" y="1874519"/>
-            <a:ext cx="3520440" cy="4023360"/>
-          </a:xfrm>
-          <a:prstGeom prst="rect">
-            <a:avLst/>
-          </a:prstGeom>
-          <a:solidFill>
-            <a:srgbClr val="F3EFE8"/>
-          </a:solidFill>
-          <a:ln w="12700">
-            <a:solidFill>
-              <a:srgbClr val="E7E1D6"/>
-            </a:solidFill>
-          </a:ln>
-          <a:effectLst/>
-        </p:spPr>
-        <p:style>
-          <a:lnRef idx="1">
-            <a:schemeClr val="accent1"/>
-          </a:lnRef>
-          <a:fillRef idx="3">
-            <a:schemeClr val="accent1"/>
-          </a:fillRef>
-          <a:effectRef idx="2">
-            <a:schemeClr val="accent1"/>
-          </a:effectRef>
-          <a:fontRef idx="minor">
-            <a:schemeClr val="lt1"/>
-          </a:fontRef>
-        </p:style>
-        <p:txBody>
-          <a:bodyPr rtlCol="0" anchor="ctr"/>
-          <a:lstStyle/>
-          <a:p>
-            <a:pPr algn="ctr"/>
-          </a:p>
-        </p:txBody>
-      </p:sp>
-      <p:sp>
-        <p:nvSpPr>
-          <p:cNvPr id="14" name="TextBox 13"/>
+                <a:latin typeface="Helvetica Neue"/>
+              </a:rPr>
+              <a:t>Argent 79 € · Or 99 €</a:t>
+            </a:r>
+          </a:p>
+        </p:txBody>
+      </p:sp>
+      <p:pic>
+        <p:nvPicPr>
+          <p:cNvPr id="12" name="Picture 11" descr="i5.jpg"/>
+          <p:cNvPicPr>
+            <a:picLocks noChangeAspect="1"/>
+          </p:cNvPicPr>
+          <p:nvPr/>
+        </p:nvPicPr>
+        <p:blipFill>
+          <a:blip r:embed="rId5"/>
+          <a:stretch>
+            <a:fillRect/>
+          </a:stretch>
+        </p:blipFill>
+        <p:spPr>
+          <a:xfrm>
+            <a:off x="4572000" y="2560320"/>
+            <a:ext cx="3291840" cy="2468880"/>
+          </a:xfrm>
+          <a:prstGeom prst="rect">
+            <a:avLst/>
+          </a:prstGeom>
+        </p:spPr>
+      </p:pic>
+      <p:sp>
+        <p:nvSpPr>
+          <p:cNvPr id="13" name="TextBox 12"/>
           <p:cNvSpPr txBox="1"/>
           <p:nvPr/>
         </p:nvSpPr>
         <p:spPr>
           <a:xfrm>
-            <a:off x="8503920" y="2148839"/>
-            <a:ext cx="2971800" cy="3566160"/>
+            <a:off x="4572000" y="5102352"/>
+            <a:ext cx="3291840" cy="1005840"/>
           </a:xfrm>
           <a:prstGeom prst="rect">
             <a:avLst/>
@@ -7888,26 +9564,149 @@
           </a:bodyPr>
           <a:lstStyle/>
           <a:p>
-            <a:pPr algn="l">
-              <a:spcBef>
-                <a:spcPts val="0"/>
-              </a:spcBef>
-              <a:spcAft>
-                <a:spcPts val="1000"/>
+            <a:pPr algn="ctr">
+              <a:spcBef>
+                <a:spcPts val="0"/>
+              </a:spcBef>
+              <a:spcAft>
+                <a:spcPts val="100"/>
               </a:spcAft>
             </a:pPr>
             <a:r>
               <a:rPr sz="1600" b="1" i="0">
                 <a:solidFill>
+                  <a:srgbClr val="1A1A1A"/>
+                </a:solidFill>
+                <a:latin typeface="Georgia"/>
+              </a:rPr>
+              <a:t>Colliers</a:t>
+            </a:r>
+          </a:p>
+          <a:p>
+            <a:pPr algn="ctr">
+              <a:spcBef>
+                <a:spcPts val="0"/>
+              </a:spcBef>
+              <a:spcAft>
+                <a:spcPts val="200"/>
+              </a:spcAft>
+            </a:pPr>
+            <a:r>
+              <a:rPr sz="1100" b="0" i="0">
+                <a:solidFill>
+                  <a:srgbClr val="6F6F6F"/>
+                </a:solidFill>
+                <a:latin typeface="Helvetica Neue"/>
+              </a:rPr>
+              <a:t>Médaillon · Lune · Trèfle</a:t>
+            </a:r>
+          </a:p>
+          <a:p>
+            <a:pPr algn="ctr">
+              <a:spcBef>
+                <a:spcPts val="0"/>
+              </a:spcBef>
+              <a:spcAft>
+                <a:spcPts val="600"/>
+              </a:spcAft>
+            </a:pPr>
+            <a:r>
+              <a:rPr sz="1250" b="1" i="0">
+                <a:solidFill>
                   <a:srgbClr val="9C7A4A"/>
                 </a:solidFill>
+                <a:latin typeface="Helvetica Neue"/>
+              </a:rPr>
+              <a:t>Argent 89 € · Or 109 €</a:t>
+            </a:r>
+          </a:p>
+        </p:txBody>
+      </p:sp>
+      <p:pic>
+        <p:nvPicPr>
+          <p:cNvPr id="14" name="Picture 13" descr="i6.jpg"/>
+          <p:cNvPicPr>
+            <a:picLocks noChangeAspect="1"/>
+          </p:cNvPicPr>
+          <p:nvPr/>
+        </p:nvPicPr>
+        <p:blipFill>
+          <a:blip r:embed="rId6"/>
+          <a:stretch>
+            <a:fillRect/>
+          </a:stretch>
+        </p:blipFill>
+        <p:spPr>
+          <a:xfrm>
+            <a:off x="8321040" y="2560320"/>
+            <a:ext cx="3291840" cy="2468880"/>
+          </a:xfrm>
+          <a:prstGeom prst="rect">
+            <a:avLst/>
+          </a:prstGeom>
+        </p:spPr>
+      </p:pic>
+      <p:sp>
+        <p:nvSpPr>
+          <p:cNvPr id="15" name="TextBox 14"/>
+          <p:cNvSpPr txBox="1"/>
+          <p:nvPr/>
+        </p:nvSpPr>
+        <p:spPr>
+          <a:xfrm>
+            <a:off x="8321040" y="5102352"/>
+            <a:ext cx="3291840" cy="1005840"/>
+          </a:xfrm>
+          <a:prstGeom prst="rect">
+            <a:avLst/>
+          </a:prstGeom>
+          <a:noFill/>
+        </p:spPr>
+        <p:txBody>
+          <a:bodyPr wrap="square" anchor="t">
+            <a:spAutoFit/>
+          </a:bodyPr>
+          <a:lstStyle/>
+          <a:p>
+            <a:pPr algn="ctr">
+              <a:spcBef>
+                <a:spcPts val="0"/>
+              </a:spcBef>
+              <a:spcAft>
+                <a:spcPts val="100"/>
+              </a:spcAft>
+            </a:pPr>
+            <a:r>
+              <a:rPr sz="1600" b="1" i="0">
+                <a:solidFill>
+                  <a:srgbClr val="1A1A1A"/>
+                </a:solidFill>
                 <a:latin typeface="Georgia"/>
               </a:rPr>
-              <a:t>KPI &amp; tableau de bord</a:t>
-            </a:r>
-          </a:p>
-          <a:p>
-            <a:pPr algn="l">
+              <a:t>Boucles</a:t>
+            </a:r>
+          </a:p>
+          <a:p>
+            <a:pPr algn="ctr">
+              <a:spcBef>
+                <a:spcPts val="0"/>
+              </a:spcBef>
+              <a:spcAft>
+                <a:spcPts val="200"/>
+              </a:spcAft>
+            </a:pPr>
+            <a:r>
+              <a:rPr sz="1100" b="0" i="0">
+                <a:solidFill>
+                  <a:srgbClr val="6F6F6F"/>
+                </a:solidFill>
+                <a:latin typeface="Helvetica Neue"/>
+              </a:rPr>
+              <a:t>Étoile · Cœur · Fleur</a:t>
+            </a:r>
+          </a:p>
+          <a:p>
+            <a:pPr algn="ctr">
               <a:spcBef>
                 <a:spcPts val="0"/>
               </a:spcBef>
@@ -7916,17 +9715,40 @@
               </a:spcAft>
             </a:pPr>
             <a:r>
-              <a:rPr sz="1300" b="0" i="0">
-                <a:solidFill>
-                  <a:srgbClr val="1A1A1A"/>
-                </a:solidFill>
-                <a:latin typeface="Helvetica Neue"/>
-              </a:rPr>
-              <a:t>Taux de conversion — la boutique</a:t>
-            </a:r>
-          </a:p>
-          <a:p>
-            <a:pPr algn="l">
+              <a:rPr sz="1250" b="1" i="0">
+                <a:solidFill>
+                  <a:srgbClr val="9C7A4A"/>
+                </a:solidFill>
+                <a:latin typeface="Helvetica Neue"/>
+              </a:rPr>
+              <a:t>69 – 89 €</a:t>
+            </a:r>
+          </a:p>
+        </p:txBody>
+      </p:sp>
+      <p:sp>
+        <p:nvSpPr>
+          <p:cNvPr id="16" name="TextBox 15"/>
+          <p:cNvSpPr txBox="1"/>
+          <p:nvPr/>
+        </p:nvSpPr>
+        <p:spPr>
+          <a:xfrm>
+            <a:off x="640080" y="6016752"/>
+            <a:ext cx="10881360" cy="365760"/>
+          </a:xfrm>
+          <a:prstGeom prst="rect">
+            <a:avLst/>
+          </a:prstGeom>
+          <a:noFill/>
+        </p:spPr>
+        <p:txBody>
+          <a:bodyPr wrap="square" anchor="t">
+            <a:spAutoFit/>
+          </a:bodyPr>
+          <a:lstStyle/>
+          <a:p>
+            <a:pPr algn="ctr">
               <a:spcBef>
                 <a:spcPts val="0"/>
               </a:spcBef>
@@ -7935,51 +9757,13 @@
               </a:spcAft>
             </a:pPr>
             <a:r>
-              <a:rPr sz="1300" b="0" i="0">
-                <a:solidFill>
-                  <a:srgbClr val="1A1A1A"/>
-                </a:solidFill>
-                <a:latin typeface="Helvetica Neue"/>
-              </a:rPr>
-              <a:t>CAC — l'acquisition</a:t>
-            </a:r>
-          </a:p>
-          <a:p>
-            <a:pPr algn="l">
-              <a:spcBef>
-                <a:spcPts val="0"/>
-              </a:spcBef>
-              <a:spcAft>
-                <a:spcPts val="600"/>
-              </a:spcAft>
-            </a:pPr>
-            <a:r>
-              <a:rPr sz="1300" b="0" i="0">
-                <a:solidFill>
-                  <a:srgbClr val="1A1A1A"/>
-                </a:solidFill>
-                <a:latin typeface="Helvetica Neue"/>
-              </a:rPr>
-              <a:t>Rétention — l'abonnement</a:t>
-            </a:r>
-          </a:p>
-          <a:p>
-            <a:pPr algn="l">
-              <a:spcBef>
-                <a:spcPts val="0"/>
-              </a:spcBef>
-              <a:spcAft>
-                <a:spcPts val="600"/>
-              </a:spcAft>
-            </a:pPr>
-            <a:r>
-              <a:rPr sz="1300" b="0" i="0">
-                <a:solidFill>
-                  <a:srgbClr val="1A1A1A"/>
-                </a:solidFill>
-                <a:latin typeface="Helvetica Neue"/>
-              </a:rPr>
-              <a:t>LTV — la valeur client</a:t>
+              <a:rPr sz="1200" b="0" i="1">
+                <a:solidFill>
+                  <a:srgbClr val="6F6F6F"/>
+                </a:solidFill>
+                <a:latin typeface="Helvetica Neue"/>
+              </a:rPr>
+              <a:t>Même base technique · abonnement à partir de 6,99 €/mois, sans engagement</a:t>
             </a:r>
           </a:p>
         </p:txBody>
@@ -7989,6 +9773,9 @@
   <p:clrMapOvr>
     <a:masterClrMapping/>
   </p:clrMapOvr>
+  <p:transition spd="med">
+    <p:fade/>
+  </p:transition>
 </p:sld>
 </file>
 
@@ -8017,7 +9804,7 @@
             <a:avLst/>
           </a:prstGeom>
           <a:solidFill>
-            <a:srgbClr val="1A1A1A"/>
+            <a:srgbClr val="FAF8F5"/>
           </a:solidFill>
           <a:ln>
             <a:noFill/>
@@ -8061,9 +9848,9 @@
             <a:avLst/>
           </a:prstGeom>
           <a:noFill/>
-          <a:ln w="15240">
+          <a:ln w="12700">
             <a:solidFill>
-              <a:srgbClr val="9C7A4A"/>
+              <a:srgbClr val="B89A6B"/>
             </a:solidFill>
           </a:ln>
           <a:effectLst/>
@@ -8106,8 +9893,8 @@
         </p:blipFill>
         <p:spPr>
           <a:xfrm>
-            <a:off x="5547207" y="1005840"/>
-            <a:ext cx="1097280" cy="1097280"/>
+            <a:off x="502920" y="411480"/>
+            <a:ext cx="457200" cy="457200"/>
           </a:xfrm>
           <a:prstGeom prst="rect">
             <a:avLst/>
@@ -8122,8 +9909,8 @@
         </p:nvSpPr>
         <p:spPr>
           <a:xfrm>
-            <a:off x="914400" y="2423160"/>
-            <a:ext cx="10362895" cy="1188720"/>
+            <a:off x="1051560" y="457200"/>
+            <a:ext cx="4572000" cy="365760"/>
           </a:xfrm>
           <a:prstGeom prst="rect">
             <a:avLst/>
@@ -8136,26 +9923,26 @@
           </a:bodyPr>
           <a:lstStyle/>
           <a:p>
-            <a:pPr algn="ctr">
-              <a:spcBef>
-                <a:spcPts val="0"/>
-              </a:spcBef>
-              <a:spcAft>
-                <a:spcPts val="200"/>
-              </a:spcAft>
-            </a:pPr>
-            <a:r>
-              <a:rPr sz="3000" b="0" i="0">
-                <a:solidFill>
-                  <a:srgbClr val="FFFFFF"/>
+            <a:pPr algn="l">
+              <a:spcBef>
+                <a:spcPts val="0"/>
+              </a:spcBef>
+              <a:spcAft>
+                <a:spcPts val="600"/>
+              </a:spcAft>
+            </a:pPr>
+            <a:r>
+              <a:rPr sz="1500" b="1" i="0">
+                <a:solidFill>
+                  <a:srgbClr val="1A1A1A"/>
                 </a:solidFill>
                 <a:latin typeface="Georgia"/>
               </a:rPr>
-              <a:t>JECA Jewelry transforme</a:t>
-            </a:r>
-          </a:p>
-          <a:p>
-            <a:pPr algn="ctr">
+              <a:t>JECA </a:t>
+            </a:r>
+          </a:p>
+          <a:p>
+            <a:pPr algn="l">
               <a:spcBef>
                 <a:spcPts val="0"/>
               </a:spcBef>
@@ -8164,33 +9951,137 @@
               </a:spcAft>
             </a:pPr>
             <a:r>
-              <a:rPr sz="3000" b="0" i="0">
-                <a:solidFill>
-                  <a:srgbClr val="FFFFFF"/>
+              <a:rPr sz="1500" b="0" i="0">
+                <a:solidFill>
+                  <a:srgbClr val="9C7A4A"/>
                 </a:solidFill>
                 <a:latin typeface="Georgia"/>
               </a:rPr>
-              <a:t>l'inquiétude en sérénité.</a:t>
-            </a:r>
-          </a:p>
-        </p:txBody>
-      </p:sp>
-      <p:sp>
-        <p:nvSpPr>
-          <p:cNvPr id="6" name="Rectangle 5"/>
+              <a:t>JEWELRY</a:t>
+            </a:r>
+          </a:p>
+        </p:txBody>
+      </p:sp>
+      <p:sp>
+        <p:nvSpPr>
+          <p:cNvPr id="6" name="TextBox 5"/>
+          <p:cNvSpPr txBox="1"/>
+          <p:nvPr/>
+        </p:nvSpPr>
+        <p:spPr>
+          <a:xfrm>
+            <a:off x="9082735" y="475488"/>
+            <a:ext cx="2606040" cy="365760"/>
+          </a:xfrm>
+          <a:prstGeom prst="rect">
+            <a:avLst/>
+          </a:prstGeom>
+          <a:noFill/>
+        </p:spPr>
+        <p:txBody>
+          <a:bodyPr wrap="square" anchor="t">
+            <a:spAutoFit/>
+          </a:bodyPr>
+          <a:lstStyle/>
+          <a:p>
+            <a:pPr algn="r">
+              <a:spcBef>
+                <a:spcPts val="0"/>
+              </a:spcBef>
+              <a:spcAft>
+                <a:spcPts val="600"/>
+              </a:spcAft>
+            </a:pPr>
+            <a:r>
+              <a:rPr sz="1050" b="0" i="0">
+                <a:solidFill>
+                  <a:srgbClr val="9C7A4A"/>
+                </a:solidFill>
+                <a:latin typeface="Helvetica Neue"/>
+                <a:hlinkClick r:id="rId3"/>
+              </a:rPr>
+              <a:t>jeca-site.vercel.app</a:t>
+            </a:r>
+          </a:p>
+          <a:p>
+            <a:pPr algn="r">
+              <a:spcBef>
+                <a:spcPts val="0"/>
+              </a:spcBef>
+              <a:spcAft>
+                <a:spcPts val="600"/>
+              </a:spcAft>
+            </a:pPr>
+            <a:r>
+              <a:rPr sz="1050" b="1" i="0">
+                <a:solidFill>
+                  <a:srgbClr val="6F6F6F"/>
+                </a:solidFill>
+                <a:latin typeface="Helvetica Neue"/>
+              </a:rPr>
+              <a:t>   09</a:t>
+            </a:r>
+          </a:p>
+        </p:txBody>
+      </p:sp>
+      <p:sp>
+        <p:nvSpPr>
+          <p:cNvPr id="7" name="TextBox 6"/>
+          <p:cNvSpPr txBox="1"/>
+          <p:nvPr/>
+        </p:nvSpPr>
+        <p:spPr>
+          <a:xfrm>
+            <a:off x="548640" y="1115568"/>
+            <a:ext cx="10058400" cy="320040"/>
+          </a:xfrm>
+          <a:prstGeom prst="rect">
+            <a:avLst/>
+          </a:prstGeom>
+          <a:noFill/>
+        </p:spPr>
+        <p:txBody>
+          <a:bodyPr wrap="square" anchor="t">
+            <a:spAutoFit/>
+          </a:bodyPr>
+          <a:lstStyle/>
+          <a:p>
+            <a:pPr algn="l">
+              <a:spcBef>
+                <a:spcPts val="0"/>
+              </a:spcBef>
+              <a:spcAft>
+                <a:spcPts val="600"/>
+              </a:spcAft>
+            </a:pPr>
+            <a:r>
+              <a:rPr sz="1200" b="1" i="0">
+                <a:solidFill>
+                  <a:srgbClr val="9C7A4A"/>
+                </a:solidFill>
+                <a:latin typeface="Helvetica Neue"/>
+              </a:rPr>
+              <a:t>STRATÉGIE — IA · SEO · KPI</a:t>
+            </a:r>
+          </a:p>
+        </p:txBody>
+      </p:sp>
+      <p:sp>
+        <p:nvSpPr>
+          <p:cNvPr id="8" name="Rectangle 7"/>
           <p:cNvSpPr/>
           <p:nvPr/>
         </p:nvSpPr>
         <p:spPr>
           <a:xfrm>
-            <a:off x="5730087" y="3794760"/>
-            <a:ext cx="731520" cy="19050"/>
+            <a:off x="566928" y="1463040"/>
+            <a:ext cx="457200" cy="19050"/>
           </a:xfrm>
           <a:prstGeom prst="rect">
             <a:avLst/>
           </a:prstGeom>
           <a:solidFill>
-            <a:srgbClr val="B89A6B"/>
+            <a:srgbClr val="9C7A4A"/>
           </a:solidFill>
           <a:ln>
             <a:noFill/>
@@ -8221,14 +10112,14 @@
       </p:sp>
       <p:sp>
         <p:nvSpPr>
-          <p:cNvPr id="7" name="TextBox 6"/>
+          <p:cNvPr id="9" name="TextBox 8"/>
           <p:cNvSpPr txBox="1"/>
           <p:nvPr/>
         </p:nvSpPr>
         <p:spPr>
           <a:xfrm>
-            <a:off x="914400" y="4023360"/>
-            <a:ext cx="10362895" cy="1645920"/>
+            <a:off x="640080" y="1783080"/>
+            <a:ext cx="10881360" cy="640080"/>
           </a:xfrm>
           <a:prstGeom prst="rect">
             <a:avLst/>
@@ -8241,26 +10132,114 @@
           </a:bodyPr>
           <a:lstStyle/>
           <a:p>
-            <a:pPr algn="ctr">
-              <a:spcBef>
-                <a:spcPts val="0"/>
-              </a:spcBef>
-              <a:spcAft>
-                <a:spcPts val="1200"/>
-              </a:spcAft>
-            </a:pPr>
-            <a:r>
-              <a:rPr sz="1900" b="0" i="1">
-                <a:solidFill>
-                  <a:srgbClr val="B89A6B"/>
+            <a:pPr algn="l">
+              <a:spcBef>
+                <a:spcPts val="0"/>
+              </a:spcBef>
+              <a:spcAft>
+                <a:spcPts val="600"/>
+              </a:spcAft>
+            </a:pPr>
+            <a:r>
+              <a:rPr sz="2900" b="0" i="0">
+                <a:solidFill>
+                  <a:srgbClr val="1A1A1A"/>
                 </a:solidFill>
                 <a:latin typeface="Georgia"/>
               </a:rPr>
-              <a:t>La sérénité se porte.</a:t>
-            </a:r>
-          </a:p>
-          <a:p>
-            <a:pPr algn="ctr">
+              <a:t>Construit avec l'IA, piloté par la donnée</a:t>
+            </a:r>
+          </a:p>
+        </p:txBody>
+      </p:sp>
+      <p:sp>
+        <p:nvSpPr>
+          <p:cNvPr id="10" name="Rectangle 9"/>
+          <p:cNvSpPr/>
+          <p:nvPr/>
+        </p:nvSpPr>
+        <p:spPr>
+          <a:xfrm>
+            <a:off x="640080" y="2651760"/>
+            <a:ext cx="3520440" cy="3200400"/>
+          </a:xfrm>
+          <a:prstGeom prst="rect">
+            <a:avLst/>
+          </a:prstGeom>
+          <a:solidFill>
+            <a:srgbClr val="F3EFE8"/>
+          </a:solidFill>
+          <a:ln w="12700">
+            <a:solidFill>
+              <a:srgbClr val="E7E1D6"/>
+            </a:solidFill>
+          </a:ln>
+          <a:effectLst/>
+        </p:spPr>
+        <p:style>
+          <a:lnRef idx="1">
+            <a:schemeClr val="accent1"/>
+          </a:lnRef>
+          <a:fillRef idx="3">
+            <a:schemeClr val="accent1"/>
+          </a:fillRef>
+          <a:effectRef idx="2">
+            <a:schemeClr val="accent1"/>
+          </a:effectRef>
+          <a:fontRef idx="minor">
+            <a:schemeClr val="lt1"/>
+          </a:fontRef>
+        </p:style>
+        <p:txBody>
+          <a:bodyPr rtlCol="0" anchor="ctr"/>
+          <a:lstStyle/>
+          <a:p>
+            <a:pPr algn="ctr"/>
+          </a:p>
+        </p:txBody>
+      </p:sp>
+      <p:sp>
+        <p:nvSpPr>
+          <p:cNvPr id="11" name="TextBox 10"/>
+          <p:cNvSpPr txBox="1"/>
+          <p:nvPr/>
+        </p:nvSpPr>
+        <p:spPr>
+          <a:xfrm>
+            <a:off x="896112" y="2907792"/>
+            <a:ext cx="3008376" cy="2743200"/>
+          </a:xfrm>
+          <a:prstGeom prst="rect">
+            <a:avLst/>
+          </a:prstGeom>
+          <a:noFill/>
+        </p:spPr>
+        <p:txBody>
+          <a:bodyPr wrap="square" anchor="t">
+            <a:spAutoFit/>
+          </a:bodyPr>
+          <a:lstStyle/>
+          <a:p>
+            <a:pPr algn="l">
+              <a:spcBef>
+                <a:spcPts val="0"/>
+              </a:spcBef>
+              <a:spcAft>
+                <a:spcPts val="900"/>
+              </a:spcAft>
+            </a:pPr>
+            <a:r>
+              <a:rPr sz="1550" b="1" i="0">
+                <a:solidFill>
+                  <a:srgbClr val="9C7A4A"/>
+                </a:solidFill>
+                <a:latin typeface="Georgia"/>
+              </a:rPr>
+              <a:t>Les IA utilisées</a:t>
+            </a:r>
+          </a:p>
+          <a:p>
+            <a:pPr algn="l">
               <a:spcBef>
                 <a:spcPts val="0"/>
               </a:spcBef>
@@ -8269,17 +10248,17 @@
               </a:spcAft>
             </a:pPr>
             <a:r>
-              <a:rPr sz="1600" b="1" i="0">
-                <a:solidFill>
-                  <a:srgbClr val="FFFFFF"/>
-                </a:solidFill>
-                <a:latin typeface="Helvetica Neue"/>
-              </a:rPr>
-              <a:t>▸  jeca-site.vercel.app</a:t>
-            </a:r>
-          </a:p>
-          <a:p>
-            <a:pPr algn="ctr">
+              <a:rPr sz="1250" b="0" i="0">
+                <a:solidFill>
+                  <a:srgbClr val="1A1A1A"/>
+                </a:solidFill>
+                <a:latin typeface="Helvetica Neue"/>
+              </a:rPr>
+              <a:t>Claude — site &amp; code</a:t>
+            </a:r>
+          </a:p>
+          <a:p>
+            <a:pPr algn="l">
               <a:spcBef>
                 <a:spcPts val="0"/>
               </a:spcBef>
@@ -8288,13 +10267,398 @@
               </a:spcAft>
             </a:pPr>
             <a:r>
-              <a:rPr sz="1300" b="0" i="0">
-                <a:solidFill>
-                  <a:srgbClr val="C9C4BA"/>
-                </a:solidFill>
-                <a:latin typeface="Helvetica Neue"/>
-              </a:rPr>
-              <a:t>Merci de votre attention.</a:t>
+              <a:rPr sz="1250" b="0" i="0">
+                <a:solidFill>
+                  <a:srgbClr val="1A1A1A"/>
+                </a:solidFill>
+                <a:latin typeface="Helvetica Neue"/>
+              </a:rPr>
+              <a:t>Canva — logo, visuels, film</a:t>
+            </a:r>
+          </a:p>
+          <a:p>
+            <a:pPr algn="l">
+              <a:spcBef>
+                <a:spcPts val="0"/>
+              </a:spcBef>
+              <a:spcAft>
+                <a:spcPts val="600"/>
+              </a:spcAft>
+            </a:pPr>
+            <a:r>
+              <a:rPr sz="1250" b="0" i="0">
+                <a:solidFill>
+                  <a:srgbClr val="1A1A1A"/>
+                </a:solidFill>
+                <a:latin typeface="Helvetica Neue"/>
+              </a:rPr>
+              <a:t>ChatGPT — fiches &amp; SEO</a:t>
+            </a:r>
+          </a:p>
+          <a:p>
+            <a:pPr algn="l">
+              <a:spcBef>
+                <a:spcPts val="0"/>
+              </a:spcBef>
+              <a:spcAft>
+                <a:spcPts val="600"/>
+              </a:spcAft>
+            </a:pPr>
+            <a:r>
+              <a:rPr sz="1250" b="0" i="0">
+                <a:solidFill>
+                  <a:srgbClr val="1A1A1A"/>
+                </a:solidFill>
+                <a:latin typeface="Helvetica Neue"/>
+              </a:rPr>
+              <a:t>Python — automatisation</a:t>
+            </a:r>
+          </a:p>
+          <a:p>
+            <a:pPr algn="l">
+              <a:spcBef>
+                <a:spcPts val="0"/>
+              </a:spcBef>
+              <a:spcAft>
+                <a:spcPts val="600"/>
+              </a:spcAft>
+            </a:pPr>
+            <a:r>
+              <a:rPr sz="1250" b="0" i="0">
+                <a:solidFill>
+                  <a:srgbClr val="1A1A1A"/>
+                </a:solidFill>
+                <a:latin typeface="Helvetica Neue"/>
+              </a:rPr>
+              <a:t>→ vitesse ×10, zéro agence</a:t>
+            </a:r>
+          </a:p>
+        </p:txBody>
+      </p:sp>
+      <p:sp>
+        <p:nvSpPr>
+          <p:cNvPr id="12" name="Rectangle 11"/>
+          <p:cNvSpPr/>
+          <p:nvPr/>
+        </p:nvSpPr>
+        <p:spPr>
+          <a:xfrm>
+            <a:off x="4434840" y="2651760"/>
+            <a:ext cx="3520440" cy="3200400"/>
+          </a:xfrm>
+          <a:prstGeom prst="rect">
+            <a:avLst/>
+          </a:prstGeom>
+          <a:solidFill>
+            <a:srgbClr val="F3EFE8"/>
+          </a:solidFill>
+          <a:ln w="12700">
+            <a:solidFill>
+              <a:srgbClr val="E7E1D6"/>
+            </a:solidFill>
+          </a:ln>
+          <a:effectLst/>
+        </p:spPr>
+        <p:style>
+          <a:lnRef idx="1">
+            <a:schemeClr val="accent1"/>
+          </a:lnRef>
+          <a:fillRef idx="3">
+            <a:schemeClr val="accent1"/>
+          </a:fillRef>
+          <a:effectRef idx="2">
+            <a:schemeClr val="accent1"/>
+          </a:effectRef>
+          <a:fontRef idx="minor">
+            <a:schemeClr val="lt1"/>
+          </a:fontRef>
+        </p:style>
+        <p:txBody>
+          <a:bodyPr rtlCol="0" anchor="ctr"/>
+          <a:lstStyle/>
+          <a:p>
+            <a:pPr algn="ctr"/>
+          </a:p>
+        </p:txBody>
+      </p:sp>
+      <p:sp>
+        <p:nvSpPr>
+          <p:cNvPr id="13" name="TextBox 12"/>
+          <p:cNvSpPr txBox="1"/>
+          <p:nvPr/>
+        </p:nvSpPr>
+        <p:spPr>
+          <a:xfrm>
+            <a:off x="4690872" y="2907792"/>
+            <a:ext cx="3008376" cy="2743200"/>
+          </a:xfrm>
+          <a:prstGeom prst="rect">
+            <a:avLst/>
+          </a:prstGeom>
+          <a:noFill/>
+        </p:spPr>
+        <p:txBody>
+          <a:bodyPr wrap="square" anchor="t">
+            <a:spAutoFit/>
+          </a:bodyPr>
+          <a:lstStyle/>
+          <a:p>
+            <a:pPr algn="l">
+              <a:spcBef>
+                <a:spcPts val="0"/>
+              </a:spcBef>
+              <a:spcAft>
+                <a:spcPts val="900"/>
+              </a:spcAft>
+            </a:pPr>
+            <a:r>
+              <a:rPr sz="1550" b="1" i="0">
+                <a:solidFill>
+                  <a:srgbClr val="9C7A4A"/>
+                </a:solidFill>
+                <a:latin typeface="Georgia"/>
+              </a:rPr>
+              <a:t>SEO &amp; calendrier éditorial</a:t>
+            </a:r>
+          </a:p>
+          <a:p>
+            <a:pPr algn="l">
+              <a:spcBef>
+                <a:spcPts val="0"/>
+              </a:spcBef>
+              <a:spcAft>
+                <a:spcPts val="600"/>
+              </a:spcAft>
+            </a:pPr>
+            <a:r>
+              <a:rPr sz="1250" b="0" i="0">
+                <a:solidFill>
+                  <a:srgbClr val="1A1A1A"/>
+                </a:solidFill>
+                <a:latin typeface="Helvetica Neue"/>
+              </a:rPr>
+              <a:t>« bracelet GPS enfant »</a:t>
+            </a:r>
+          </a:p>
+          <a:p>
+            <a:pPr algn="l">
+              <a:spcBef>
+                <a:spcPts val="0"/>
+              </a:spcBef>
+              <a:spcAft>
+                <a:spcPts val="600"/>
+              </a:spcAft>
+            </a:pPr>
+            <a:r>
+              <a:rPr sz="1250" b="0" i="0">
+                <a:solidFill>
+                  <a:srgbClr val="1A1A1A"/>
+                </a:solidFill>
+                <a:latin typeface="Helvetica Neue"/>
+              </a:rPr>
+              <a:t>Balises meta optimisées</a:t>
+            </a:r>
+          </a:p>
+          <a:p>
+            <a:pPr algn="l">
+              <a:spcBef>
+                <a:spcPts val="0"/>
+              </a:spcBef>
+              <a:spcAft>
+                <a:spcPts val="600"/>
+              </a:spcAft>
+            </a:pPr>
+            <a:r>
+              <a:rPr sz="1250" b="0" i="0">
+                <a:solidFill>
+                  <a:srgbClr val="1A1A1A"/>
+                </a:solidFill>
+                <a:latin typeface="Helvetica Neue"/>
+              </a:rPr>
+              <a:t>Blog : 1 article / semaine</a:t>
+            </a:r>
+          </a:p>
+          <a:p>
+            <a:pPr algn="l">
+              <a:spcBef>
+                <a:spcPts val="0"/>
+              </a:spcBef>
+              <a:spcAft>
+                <a:spcPts val="600"/>
+              </a:spcAft>
+            </a:pPr>
+            <a:r>
+              <a:rPr sz="1250" b="0" i="0">
+                <a:solidFill>
+                  <a:srgbClr val="1A1A1A"/>
+                </a:solidFill>
+                <a:latin typeface="Helvetica Neue"/>
+              </a:rPr>
+              <a:t>Temps forts : rentrée, Noël</a:t>
+            </a:r>
+          </a:p>
+        </p:txBody>
+      </p:sp>
+      <p:sp>
+        <p:nvSpPr>
+          <p:cNvPr id="14" name="Rectangle 13"/>
+          <p:cNvSpPr/>
+          <p:nvPr/>
+        </p:nvSpPr>
+        <p:spPr>
+          <a:xfrm>
+            <a:off x="8229600" y="2651760"/>
+            <a:ext cx="3520440" cy="3200400"/>
+          </a:xfrm>
+          <a:prstGeom prst="rect">
+            <a:avLst/>
+          </a:prstGeom>
+          <a:solidFill>
+            <a:srgbClr val="F3EFE8"/>
+          </a:solidFill>
+          <a:ln w="12700">
+            <a:solidFill>
+              <a:srgbClr val="E7E1D6"/>
+            </a:solidFill>
+          </a:ln>
+          <a:effectLst/>
+        </p:spPr>
+        <p:style>
+          <a:lnRef idx="1">
+            <a:schemeClr val="accent1"/>
+          </a:lnRef>
+          <a:fillRef idx="3">
+            <a:schemeClr val="accent1"/>
+          </a:fillRef>
+          <a:effectRef idx="2">
+            <a:schemeClr val="accent1"/>
+          </a:effectRef>
+          <a:fontRef idx="minor">
+            <a:schemeClr val="lt1"/>
+          </a:fontRef>
+        </p:style>
+        <p:txBody>
+          <a:bodyPr rtlCol="0" anchor="ctr"/>
+          <a:lstStyle/>
+          <a:p>
+            <a:pPr algn="ctr"/>
+          </a:p>
+        </p:txBody>
+      </p:sp>
+      <p:sp>
+        <p:nvSpPr>
+          <p:cNvPr id="15" name="TextBox 14"/>
+          <p:cNvSpPr txBox="1"/>
+          <p:nvPr/>
+        </p:nvSpPr>
+        <p:spPr>
+          <a:xfrm>
+            <a:off x="8485632" y="2907792"/>
+            <a:ext cx="3008376" cy="2743200"/>
+          </a:xfrm>
+          <a:prstGeom prst="rect">
+            <a:avLst/>
+          </a:prstGeom>
+          <a:noFill/>
+        </p:spPr>
+        <p:txBody>
+          <a:bodyPr wrap="square" anchor="t">
+            <a:spAutoFit/>
+          </a:bodyPr>
+          <a:lstStyle/>
+          <a:p>
+            <a:pPr algn="l">
+              <a:spcBef>
+                <a:spcPts val="0"/>
+              </a:spcBef>
+              <a:spcAft>
+                <a:spcPts val="900"/>
+              </a:spcAft>
+            </a:pPr>
+            <a:r>
+              <a:rPr sz="1550" b="1" i="0">
+                <a:solidFill>
+                  <a:srgbClr val="9C7A4A"/>
+                </a:solidFill>
+                <a:latin typeface="Georgia"/>
+              </a:rPr>
+              <a:t>KPI suivis — et pourquoi</a:t>
+            </a:r>
+          </a:p>
+          <a:p>
+            <a:pPr algn="l">
+              <a:spcBef>
+                <a:spcPts val="0"/>
+              </a:spcBef>
+              <a:spcAft>
+                <a:spcPts val="600"/>
+              </a:spcAft>
+            </a:pPr>
+            <a:r>
+              <a:rPr sz="1250" b="0" i="0">
+                <a:solidFill>
+                  <a:srgbClr val="1A1A1A"/>
+                </a:solidFill>
+                <a:latin typeface="Helvetica Neue"/>
+              </a:rPr>
+              <a:t>Conversion → la boutique</a:t>
+            </a:r>
+          </a:p>
+          <a:p>
+            <a:pPr algn="l">
+              <a:spcBef>
+                <a:spcPts val="0"/>
+              </a:spcBef>
+              <a:spcAft>
+                <a:spcPts val="600"/>
+              </a:spcAft>
+            </a:pPr>
+            <a:r>
+              <a:rPr sz="1250" b="0" i="0">
+                <a:solidFill>
+                  <a:srgbClr val="1A1A1A"/>
+                </a:solidFill>
+                <a:latin typeface="Helvetica Neue"/>
+              </a:rPr>
+              <a:t>CAC → l'acquisition</a:t>
+            </a:r>
+          </a:p>
+          <a:p>
+            <a:pPr algn="l">
+              <a:spcBef>
+                <a:spcPts val="0"/>
+              </a:spcBef>
+              <a:spcAft>
+                <a:spcPts val="600"/>
+              </a:spcAft>
+            </a:pPr>
+            <a:r>
+              <a:rPr sz="1250" b="0" i="0">
+                <a:solidFill>
+                  <a:srgbClr val="1A1A1A"/>
+                </a:solidFill>
+                <a:latin typeface="Helvetica Neue"/>
+              </a:rPr>
+              <a:t>Rétention → l'abonnement</a:t>
+            </a:r>
+          </a:p>
+          <a:p>
+            <a:pPr algn="l">
+              <a:spcBef>
+                <a:spcPts val="0"/>
+              </a:spcBef>
+              <a:spcAft>
+                <a:spcPts val="600"/>
+              </a:spcAft>
+            </a:pPr>
+            <a:r>
+              <a:rPr sz="1250" b="0" i="0">
+                <a:solidFill>
+                  <a:srgbClr val="1A1A1A"/>
+                </a:solidFill>
+                <a:latin typeface="Helvetica Neue"/>
+              </a:rPr>
+              <a:t>LTV → la valeur client</a:t>
             </a:r>
           </a:p>
         </p:txBody>
@@ -8304,6 +10668,9 @@
   <p:clrMapOvr>
     <a:masterClrMapping/>
   </p:clrMapOvr>
+  <p:transition spd="med">
+    <p:fade/>
+  </p:transition>
 </p:sld>
 </file>
 
